--- a/public/fun/pack/pptx/review/보장점검양식_12_부부점검_아카시아길.pptx
+++ b/public/fun/pack/pptx/review/보장점검양식_12_부부점검_아카시아길.pptx
@@ -3347,7 +3347,7 @@
             <a:r>
               <a:rPr sz="3600" b="1" i="0">
                 <a:solidFill>
-                  <a:srgbClr val="49562E"/>
+                  <a:srgbClr val="526728"/>
                 </a:solidFill>
               </a:rPr>
               <a:t>우리 보험 점검 시간</a:t>
@@ -3385,7 +3385,7 @@
             <a:r>
               <a:rPr sz="1700" b="0" i="1">
                 <a:solidFill>
-                  <a:srgbClr val="49562E"/>
+                  <a:srgbClr val="526728"/>
                 </a:solidFill>
               </a:rPr>
               <a:t>각자 증권을 가져와 식탁에 펼칩니다</a:t>
@@ -3460,7 +3460,7 @@
     <p:bg>
       <p:bgPr>
         <a:solidFill>
-          <a:srgbClr val="F6F8F2"/>
+          <a:srgbClr val="F9FCF3"/>
         </a:solidFill>
         <a:effectLst/>
       </p:bgPr>
@@ -3487,7 +3487,7 @@
             <a:avLst/>
           </a:prstGeom>
           <a:solidFill>
-            <a:srgbClr val="E4EBD6"/>
+            <a:srgbClr val="EBF7D4"/>
           </a:solidFill>
           <a:ln>
             <a:noFill/>
@@ -3516,7 +3516,7 @@
             <a:avLst/>
           </a:prstGeom>
           <a:solidFill>
-            <a:srgbClr val="819852"/>
+            <a:srgbClr val="9DBF5A"/>
           </a:solidFill>
           <a:ln>
             <a:noFill/>
@@ -3560,7 +3560,7 @@
             <a:r>
               <a:rPr sz="3000" b="1" i="0">
                 <a:solidFill>
-                  <a:srgbClr val="49562E"/>
+                  <a:srgbClr val="526728"/>
                 </a:solidFill>
               </a:rPr>
               <a:t>점검 대상 현황</a:t>
@@ -3611,30 +3611,30 @@
                   <a:tcPr anchor="ctr" marL="73152" marR="73152">
                     <a:lnL w="9525" cap="flat" cmpd="sng" algn="ctr">
                       <a:solidFill>
-                        <a:srgbClr val="819852"/>
+                        <a:srgbClr val="9DBF5A"/>
                       </a:solidFill>
                       <a:prstDash val="solid"/>
                     </a:lnL>
                     <a:lnR w="9525" cap="flat" cmpd="sng" algn="ctr">
                       <a:solidFill>
-                        <a:srgbClr val="819852"/>
+                        <a:srgbClr val="9DBF5A"/>
                       </a:solidFill>
                       <a:prstDash val="solid"/>
                     </a:lnR>
                     <a:lnT w="9525" cap="flat" cmpd="sng" algn="ctr">
                       <a:solidFill>
-                        <a:srgbClr val="819852"/>
+                        <a:srgbClr val="9DBF5A"/>
                       </a:solidFill>
                       <a:prstDash val="solid"/>
                     </a:lnT>
                     <a:lnB w="9525" cap="flat" cmpd="sng" algn="ctr">
                       <a:solidFill>
-                        <a:srgbClr val="819852"/>
+                        <a:srgbClr val="9DBF5A"/>
                       </a:solidFill>
                       <a:prstDash val="solid"/>
                     </a:lnB>
                     <a:solidFill>
-                      <a:srgbClr val="819852"/>
+                      <a:srgbClr val="9DBF5A"/>
                     </a:solidFill>
                   </a:tcPr>
                 </a:tc>
@@ -3657,30 +3657,30 @@
                   <a:tcPr anchor="ctr" marL="73152" marR="73152">
                     <a:lnL w="9525" cap="flat" cmpd="sng" algn="ctr">
                       <a:solidFill>
-                        <a:srgbClr val="819852"/>
+                        <a:srgbClr val="9DBF5A"/>
                       </a:solidFill>
                       <a:prstDash val="solid"/>
                     </a:lnL>
                     <a:lnR w="9525" cap="flat" cmpd="sng" algn="ctr">
                       <a:solidFill>
-                        <a:srgbClr val="819852"/>
+                        <a:srgbClr val="9DBF5A"/>
                       </a:solidFill>
                       <a:prstDash val="solid"/>
                     </a:lnR>
                     <a:lnT w="9525" cap="flat" cmpd="sng" algn="ctr">
                       <a:solidFill>
-                        <a:srgbClr val="819852"/>
+                        <a:srgbClr val="9DBF5A"/>
                       </a:solidFill>
                       <a:prstDash val="solid"/>
                     </a:lnT>
                     <a:lnB w="9525" cap="flat" cmpd="sng" algn="ctr">
                       <a:solidFill>
-                        <a:srgbClr val="819852"/>
+                        <a:srgbClr val="9DBF5A"/>
                       </a:solidFill>
                       <a:prstDash val="solid"/>
                     </a:lnB>
                     <a:solidFill>
-                      <a:srgbClr val="819852"/>
+                      <a:srgbClr val="9DBF5A"/>
                     </a:solidFill>
                   </a:tcPr>
                 </a:tc>
@@ -3703,30 +3703,30 @@
                   <a:tcPr anchor="ctr" marL="73152" marR="73152">
                     <a:lnL w="9525" cap="flat" cmpd="sng" algn="ctr">
                       <a:solidFill>
-                        <a:srgbClr val="819852"/>
+                        <a:srgbClr val="9DBF5A"/>
                       </a:solidFill>
                       <a:prstDash val="solid"/>
                     </a:lnL>
                     <a:lnR w="9525" cap="flat" cmpd="sng" algn="ctr">
                       <a:solidFill>
-                        <a:srgbClr val="819852"/>
+                        <a:srgbClr val="9DBF5A"/>
                       </a:solidFill>
                       <a:prstDash val="solid"/>
                     </a:lnR>
                     <a:lnT w="9525" cap="flat" cmpd="sng" algn="ctr">
                       <a:solidFill>
-                        <a:srgbClr val="819852"/>
+                        <a:srgbClr val="9DBF5A"/>
                       </a:solidFill>
                       <a:prstDash val="solid"/>
                     </a:lnT>
                     <a:lnB w="9525" cap="flat" cmpd="sng" algn="ctr">
                       <a:solidFill>
-                        <a:srgbClr val="819852"/>
+                        <a:srgbClr val="9DBF5A"/>
                       </a:solidFill>
                       <a:prstDash val="solid"/>
                     </a:lnB>
                     <a:solidFill>
-                      <a:srgbClr val="819852"/>
+                      <a:srgbClr val="9DBF5A"/>
                     </a:solidFill>
                   </a:tcPr>
                 </a:tc>
@@ -3741,7 +3741,7 @@
                       <a:r>
                         <a:rPr sz="1600" b="1">
                           <a:solidFill>
-                            <a:srgbClr val="49562E"/>
+                            <a:srgbClr val="526728"/>
                           </a:solidFill>
                         </a:rPr>
                         <a:t>이름</a:t>
@@ -3751,30 +3751,30 @@
                   <a:tcPr anchor="ctr" marL="73152" marR="73152">
                     <a:lnL w="9525" cap="flat" cmpd="sng" algn="ctr">
                       <a:solidFill>
-                        <a:srgbClr val="E4EBD6"/>
+                        <a:srgbClr val="EBF7D4"/>
                       </a:solidFill>
                       <a:prstDash val="solid"/>
                     </a:lnL>
                     <a:lnR w="9525" cap="flat" cmpd="sng" algn="ctr">
                       <a:solidFill>
-                        <a:srgbClr val="E4EBD6"/>
+                        <a:srgbClr val="EBF7D4"/>
                       </a:solidFill>
                       <a:prstDash val="solid"/>
                     </a:lnR>
                     <a:lnT w="9525" cap="flat" cmpd="sng" algn="ctr">
                       <a:solidFill>
-                        <a:srgbClr val="E4EBD6"/>
+                        <a:srgbClr val="EBF7D4"/>
                       </a:solidFill>
                       <a:prstDash val="solid"/>
                     </a:lnT>
                     <a:lnB w="9525" cap="flat" cmpd="sng" algn="ctr">
                       <a:solidFill>
-                        <a:srgbClr val="E4EBD6"/>
+                        <a:srgbClr val="EBF7D4"/>
                       </a:solidFill>
                       <a:prstDash val="solid"/>
                     </a:lnB>
                     <a:solidFill>
-                      <a:srgbClr val="E4EBD6"/>
+                      <a:srgbClr val="EBF7D4"/>
                     </a:solidFill>
                   </a:tcPr>
                 </a:tc>
@@ -3797,25 +3797,25 @@
                   <a:tcPr anchor="ctr" marL="73152" marR="73152">
                     <a:lnL w="9525" cap="flat" cmpd="sng" algn="ctr">
                       <a:solidFill>
-                        <a:srgbClr val="E4EBD6"/>
+                        <a:srgbClr val="EBF7D4"/>
                       </a:solidFill>
                       <a:prstDash val="solid"/>
                     </a:lnL>
                     <a:lnR w="9525" cap="flat" cmpd="sng" algn="ctr">
                       <a:solidFill>
-                        <a:srgbClr val="E4EBD6"/>
+                        <a:srgbClr val="EBF7D4"/>
                       </a:solidFill>
                       <a:prstDash val="solid"/>
                     </a:lnR>
                     <a:lnT w="9525" cap="flat" cmpd="sng" algn="ctr">
                       <a:solidFill>
-                        <a:srgbClr val="E4EBD6"/>
+                        <a:srgbClr val="EBF7D4"/>
                       </a:solidFill>
                       <a:prstDash val="solid"/>
                     </a:lnT>
                     <a:lnB w="9525" cap="flat" cmpd="sng" algn="ctr">
                       <a:solidFill>
-                        <a:srgbClr val="E4EBD6"/>
+                        <a:srgbClr val="EBF7D4"/>
                       </a:solidFill>
                       <a:prstDash val="solid"/>
                     </a:lnB>
@@ -3843,25 +3843,25 @@
                   <a:tcPr anchor="ctr" marL="73152" marR="73152">
                     <a:lnL w="9525" cap="flat" cmpd="sng" algn="ctr">
                       <a:solidFill>
-                        <a:srgbClr val="E4EBD6"/>
+                        <a:srgbClr val="EBF7D4"/>
                       </a:solidFill>
                       <a:prstDash val="solid"/>
                     </a:lnL>
                     <a:lnR w="9525" cap="flat" cmpd="sng" algn="ctr">
                       <a:solidFill>
-                        <a:srgbClr val="E4EBD6"/>
+                        <a:srgbClr val="EBF7D4"/>
                       </a:solidFill>
                       <a:prstDash val="solid"/>
                     </a:lnR>
                     <a:lnT w="9525" cap="flat" cmpd="sng" algn="ctr">
                       <a:solidFill>
-                        <a:srgbClr val="E4EBD6"/>
+                        <a:srgbClr val="EBF7D4"/>
                       </a:solidFill>
                       <a:prstDash val="solid"/>
                     </a:lnT>
                     <a:lnB w="9525" cap="flat" cmpd="sng" algn="ctr">
                       <a:solidFill>
-                        <a:srgbClr val="E4EBD6"/>
+                        <a:srgbClr val="EBF7D4"/>
                       </a:solidFill>
                       <a:prstDash val="solid"/>
                     </a:lnB>
@@ -3881,7 +3881,7 @@
                       <a:r>
                         <a:rPr sz="1600" b="1">
                           <a:solidFill>
-                            <a:srgbClr val="49562E"/>
+                            <a:srgbClr val="526728"/>
                           </a:solidFill>
                         </a:rPr>
                         <a:t>나이</a:t>
@@ -3891,30 +3891,30 @@
                   <a:tcPr anchor="ctr" marL="73152" marR="73152">
                     <a:lnL w="9525" cap="flat" cmpd="sng" algn="ctr">
                       <a:solidFill>
-                        <a:srgbClr val="E4EBD6"/>
+                        <a:srgbClr val="EBF7D4"/>
                       </a:solidFill>
                       <a:prstDash val="solid"/>
                     </a:lnL>
                     <a:lnR w="9525" cap="flat" cmpd="sng" algn="ctr">
                       <a:solidFill>
-                        <a:srgbClr val="E4EBD6"/>
+                        <a:srgbClr val="EBF7D4"/>
                       </a:solidFill>
                       <a:prstDash val="solid"/>
                     </a:lnR>
                     <a:lnT w="9525" cap="flat" cmpd="sng" algn="ctr">
                       <a:solidFill>
-                        <a:srgbClr val="E4EBD6"/>
+                        <a:srgbClr val="EBF7D4"/>
                       </a:solidFill>
                       <a:prstDash val="solid"/>
                     </a:lnT>
                     <a:lnB w="9525" cap="flat" cmpd="sng" algn="ctr">
                       <a:solidFill>
-                        <a:srgbClr val="E4EBD6"/>
+                        <a:srgbClr val="EBF7D4"/>
                       </a:solidFill>
                       <a:prstDash val="solid"/>
                     </a:lnB>
                     <a:solidFill>
-                      <a:srgbClr val="E4EBD6"/>
+                      <a:srgbClr val="EBF7D4"/>
                     </a:solidFill>
                   </a:tcPr>
                 </a:tc>
@@ -3937,30 +3937,30 @@
                   <a:tcPr anchor="ctr" marL="73152" marR="73152">
                     <a:lnL w="9525" cap="flat" cmpd="sng" algn="ctr">
                       <a:solidFill>
-                        <a:srgbClr val="E4EBD6"/>
+                        <a:srgbClr val="EBF7D4"/>
                       </a:solidFill>
                       <a:prstDash val="solid"/>
                     </a:lnL>
                     <a:lnR w="9525" cap="flat" cmpd="sng" algn="ctr">
                       <a:solidFill>
-                        <a:srgbClr val="E4EBD6"/>
+                        <a:srgbClr val="EBF7D4"/>
                       </a:solidFill>
                       <a:prstDash val="solid"/>
                     </a:lnR>
                     <a:lnT w="9525" cap="flat" cmpd="sng" algn="ctr">
                       <a:solidFill>
-                        <a:srgbClr val="E4EBD6"/>
+                        <a:srgbClr val="EBF7D4"/>
                       </a:solidFill>
                       <a:prstDash val="solid"/>
                     </a:lnT>
                     <a:lnB w="9525" cap="flat" cmpd="sng" algn="ctr">
                       <a:solidFill>
-                        <a:srgbClr val="E4EBD6"/>
+                        <a:srgbClr val="EBF7D4"/>
                       </a:solidFill>
                       <a:prstDash val="solid"/>
                     </a:lnB>
                     <a:solidFill>
-                      <a:srgbClr val="F6F8F2"/>
+                      <a:srgbClr val="F9FCF3"/>
                     </a:solidFill>
                   </a:tcPr>
                 </a:tc>
@@ -3983,30 +3983,30 @@
                   <a:tcPr anchor="ctr" marL="73152" marR="73152">
                     <a:lnL w="9525" cap="flat" cmpd="sng" algn="ctr">
                       <a:solidFill>
-                        <a:srgbClr val="E4EBD6"/>
+                        <a:srgbClr val="EBF7D4"/>
                       </a:solidFill>
                       <a:prstDash val="solid"/>
                     </a:lnL>
                     <a:lnR w="9525" cap="flat" cmpd="sng" algn="ctr">
                       <a:solidFill>
-                        <a:srgbClr val="E4EBD6"/>
+                        <a:srgbClr val="EBF7D4"/>
                       </a:solidFill>
                       <a:prstDash val="solid"/>
                     </a:lnR>
                     <a:lnT w="9525" cap="flat" cmpd="sng" algn="ctr">
                       <a:solidFill>
-                        <a:srgbClr val="E4EBD6"/>
+                        <a:srgbClr val="EBF7D4"/>
                       </a:solidFill>
                       <a:prstDash val="solid"/>
                     </a:lnT>
                     <a:lnB w="9525" cap="flat" cmpd="sng" algn="ctr">
                       <a:solidFill>
-                        <a:srgbClr val="E4EBD6"/>
+                        <a:srgbClr val="EBF7D4"/>
                       </a:solidFill>
                       <a:prstDash val="solid"/>
                     </a:lnB>
                     <a:solidFill>
-                      <a:srgbClr val="F6F8F2"/>
+                      <a:srgbClr val="F9FCF3"/>
                     </a:solidFill>
                   </a:tcPr>
                 </a:tc>
@@ -4021,7 +4021,7 @@
                       <a:r>
                         <a:rPr sz="1600" b="1">
                           <a:solidFill>
-                            <a:srgbClr val="49562E"/>
+                            <a:srgbClr val="526728"/>
                           </a:solidFill>
                         </a:rPr>
                         <a:t>직업</a:t>
@@ -4031,30 +4031,30 @@
                   <a:tcPr anchor="ctr" marL="73152" marR="73152">
                     <a:lnL w="9525" cap="flat" cmpd="sng" algn="ctr">
                       <a:solidFill>
-                        <a:srgbClr val="E4EBD6"/>
+                        <a:srgbClr val="EBF7D4"/>
                       </a:solidFill>
                       <a:prstDash val="solid"/>
                     </a:lnL>
                     <a:lnR w="9525" cap="flat" cmpd="sng" algn="ctr">
                       <a:solidFill>
-                        <a:srgbClr val="E4EBD6"/>
+                        <a:srgbClr val="EBF7D4"/>
                       </a:solidFill>
                       <a:prstDash val="solid"/>
                     </a:lnR>
                     <a:lnT w="9525" cap="flat" cmpd="sng" algn="ctr">
                       <a:solidFill>
-                        <a:srgbClr val="E4EBD6"/>
+                        <a:srgbClr val="EBF7D4"/>
                       </a:solidFill>
                       <a:prstDash val="solid"/>
                     </a:lnT>
                     <a:lnB w="9525" cap="flat" cmpd="sng" algn="ctr">
                       <a:solidFill>
-                        <a:srgbClr val="E4EBD6"/>
+                        <a:srgbClr val="EBF7D4"/>
                       </a:solidFill>
                       <a:prstDash val="solid"/>
                     </a:lnB>
                     <a:solidFill>
-                      <a:srgbClr val="E4EBD6"/>
+                      <a:srgbClr val="EBF7D4"/>
                     </a:solidFill>
                   </a:tcPr>
                 </a:tc>
@@ -4077,25 +4077,25 @@
                   <a:tcPr anchor="ctr" marL="73152" marR="73152">
                     <a:lnL w="9525" cap="flat" cmpd="sng" algn="ctr">
                       <a:solidFill>
-                        <a:srgbClr val="E4EBD6"/>
+                        <a:srgbClr val="EBF7D4"/>
                       </a:solidFill>
                       <a:prstDash val="solid"/>
                     </a:lnL>
                     <a:lnR w="9525" cap="flat" cmpd="sng" algn="ctr">
                       <a:solidFill>
-                        <a:srgbClr val="E4EBD6"/>
+                        <a:srgbClr val="EBF7D4"/>
                       </a:solidFill>
                       <a:prstDash val="solid"/>
                     </a:lnR>
                     <a:lnT w="9525" cap="flat" cmpd="sng" algn="ctr">
                       <a:solidFill>
-                        <a:srgbClr val="E4EBD6"/>
+                        <a:srgbClr val="EBF7D4"/>
                       </a:solidFill>
                       <a:prstDash val="solid"/>
                     </a:lnT>
                     <a:lnB w="9525" cap="flat" cmpd="sng" algn="ctr">
                       <a:solidFill>
-                        <a:srgbClr val="E4EBD6"/>
+                        <a:srgbClr val="EBF7D4"/>
                       </a:solidFill>
                       <a:prstDash val="solid"/>
                     </a:lnB>
@@ -4123,25 +4123,25 @@
                   <a:tcPr anchor="ctr" marL="73152" marR="73152">
                     <a:lnL w="9525" cap="flat" cmpd="sng" algn="ctr">
                       <a:solidFill>
-                        <a:srgbClr val="E4EBD6"/>
+                        <a:srgbClr val="EBF7D4"/>
                       </a:solidFill>
                       <a:prstDash val="solid"/>
                     </a:lnL>
                     <a:lnR w="9525" cap="flat" cmpd="sng" algn="ctr">
                       <a:solidFill>
-                        <a:srgbClr val="E4EBD6"/>
+                        <a:srgbClr val="EBF7D4"/>
                       </a:solidFill>
                       <a:prstDash val="solid"/>
                     </a:lnR>
                     <a:lnT w="9525" cap="flat" cmpd="sng" algn="ctr">
                       <a:solidFill>
-                        <a:srgbClr val="E4EBD6"/>
+                        <a:srgbClr val="EBF7D4"/>
                       </a:solidFill>
                       <a:prstDash val="solid"/>
                     </a:lnT>
                     <a:lnB w="9525" cap="flat" cmpd="sng" algn="ctr">
                       <a:solidFill>
-                        <a:srgbClr val="E4EBD6"/>
+                        <a:srgbClr val="EBF7D4"/>
                       </a:solidFill>
                       <a:prstDash val="solid"/>
                     </a:lnB>
@@ -4161,7 +4161,7 @@
                       <a:r>
                         <a:rPr sz="1600" b="1">
                           <a:solidFill>
-                            <a:srgbClr val="49562E"/>
+                            <a:srgbClr val="526728"/>
                           </a:solidFill>
                         </a:rPr>
                         <a:t>건강 상태 메모</a:t>
@@ -4171,30 +4171,30 @@
                   <a:tcPr anchor="ctr" marL="73152" marR="73152">
                     <a:lnL w="9525" cap="flat" cmpd="sng" algn="ctr">
                       <a:solidFill>
-                        <a:srgbClr val="E4EBD6"/>
+                        <a:srgbClr val="EBF7D4"/>
                       </a:solidFill>
                       <a:prstDash val="solid"/>
                     </a:lnL>
                     <a:lnR w="9525" cap="flat" cmpd="sng" algn="ctr">
                       <a:solidFill>
-                        <a:srgbClr val="E4EBD6"/>
+                        <a:srgbClr val="EBF7D4"/>
                       </a:solidFill>
                       <a:prstDash val="solid"/>
                     </a:lnR>
                     <a:lnT w="9525" cap="flat" cmpd="sng" algn="ctr">
                       <a:solidFill>
-                        <a:srgbClr val="E4EBD6"/>
+                        <a:srgbClr val="EBF7D4"/>
                       </a:solidFill>
                       <a:prstDash val="solid"/>
                     </a:lnT>
                     <a:lnB w="9525" cap="flat" cmpd="sng" algn="ctr">
                       <a:solidFill>
-                        <a:srgbClr val="E4EBD6"/>
+                        <a:srgbClr val="EBF7D4"/>
                       </a:solidFill>
                       <a:prstDash val="solid"/>
                     </a:lnB>
                     <a:solidFill>
-                      <a:srgbClr val="E4EBD6"/>
+                      <a:srgbClr val="EBF7D4"/>
                     </a:solidFill>
                   </a:tcPr>
                 </a:tc>
@@ -4217,30 +4217,30 @@
                   <a:tcPr anchor="ctr" marL="73152" marR="73152">
                     <a:lnL w="9525" cap="flat" cmpd="sng" algn="ctr">
                       <a:solidFill>
-                        <a:srgbClr val="E4EBD6"/>
+                        <a:srgbClr val="EBF7D4"/>
                       </a:solidFill>
                       <a:prstDash val="solid"/>
                     </a:lnL>
                     <a:lnR w="9525" cap="flat" cmpd="sng" algn="ctr">
                       <a:solidFill>
-                        <a:srgbClr val="E4EBD6"/>
+                        <a:srgbClr val="EBF7D4"/>
                       </a:solidFill>
                       <a:prstDash val="solid"/>
                     </a:lnR>
                     <a:lnT w="9525" cap="flat" cmpd="sng" algn="ctr">
                       <a:solidFill>
-                        <a:srgbClr val="E4EBD6"/>
+                        <a:srgbClr val="EBF7D4"/>
                       </a:solidFill>
                       <a:prstDash val="solid"/>
                     </a:lnT>
                     <a:lnB w="9525" cap="flat" cmpd="sng" algn="ctr">
                       <a:solidFill>
-                        <a:srgbClr val="E4EBD6"/>
+                        <a:srgbClr val="EBF7D4"/>
                       </a:solidFill>
                       <a:prstDash val="solid"/>
                     </a:lnB>
                     <a:solidFill>
-                      <a:srgbClr val="F6F8F2"/>
+                      <a:srgbClr val="F9FCF3"/>
                     </a:solidFill>
                   </a:tcPr>
                 </a:tc>
@@ -4263,30 +4263,30 @@
                   <a:tcPr anchor="ctr" marL="73152" marR="73152">
                     <a:lnL w="9525" cap="flat" cmpd="sng" algn="ctr">
                       <a:solidFill>
-                        <a:srgbClr val="E4EBD6"/>
+                        <a:srgbClr val="EBF7D4"/>
                       </a:solidFill>
                       <a:prstDash val="solid"/>
                     </a:lnL>
                     <a:lnR w="9525" cap="flat" cmpd="sng" algn="ctr">
                       <a:solidFill>
-                        <a:srgbClr val="E4EBD6"/>
+                        <a:srgbClr val="EBF7D4"/>
                       </a:solidFill>
                       <a:prstDash val="solid"/>
                     </a:lnR>
                     <a:lnT w="9525" cap="flat" cmpd="sng" algn="ctr">
                       <a:solidFill>
-                        <a:srgbClr val="E4EBD6"/>
+                        <a:srgbClr val="EBF7D4"/>
                       </a:solidFill>
                       <a:prstDash val="solid"/>
                     </a:lnT>
                     <a:lnB w="9525" cap="flat" cmpd="sng" algn="ctr">
                       <a:solidFill>
-                        <a:srgbClr val="E4EBD6"/>
+                        <a:srgbClr val="EBF7D4"/>
                       </a:solidFill>
                       <a:prstDash val="solid"/>
                     </a:lnB>
                     <a:solidFill>
-                      <a:srgbClr val="F6F8F2"/>
+                      <a:srgbClr val="F9FCF3"/>
                     </a:solidFill>
                   </a:tcPr>
                 </a:tc>
@@ -4309,7 +4309,7 @@
     <p:bg>
       <p:bgPr>
         <a:solidFill>
-          <a:srgbClr val="F6F8F2"/>
+          <a:srgbClr val="F9FCF3"/>
         </a:solidFill>
         <a:effectLst/>
       </p:bgPr>
@@ -4336,7 +4336,7 @@
             <a:avLst/>
           </a:prstGeom>
           <a:solidFill>
-            <a:srgbClr val="E4EBD6"/>
+            <a:srgbClr val="EBF7D4"/>
           </a:solidFill>
           <a:ln>
             <a:noFill/>
@@ -4365,7 +4365,7 @@
             <a:avLst/>
           </a:prstGeom>
           <a:solidFill>
-            <a:srgbClr val="819852"/>
+            <a:srgbClr val="9DBF5A"/>
           </a:solidFill>
           <a:ln>
             <a:noFill/>
@@ -4409,7 +4409,7 @@
             <a:r>
               <a:rPr sz="3000" b="1" i="0">
                 <a:solidFill>
-                  <a:srgbClr val="49562E"/>
+                  <a:srgbClr val="526728"/>
                 </a:solidFill>
               </a:rPr>
               <a:t>가입한 보험 목록</a:t>
@@ -4462,30 +4462,30 @@
                   <a:tcPr anchor="ctr" marL="73152" marR="73152">
                     <a:lnL w="9525" cap="flat" cmpd="sng" algn="ctr">
                       <a:solidFill>
-                        <a:srgbClr val="819852"/>
+                        <a:srgbClr val="9DBF5A"/>
                       </a:solidFill>
                       <a:prstDash val="solid"/>
                     </a:lnL>
                     <a:lnR w="9525" cap="flat" cmpd="sng" algn="ctr">
                       <a:solidFill>
-                        <a:srgbClr val="819852"/>
+                        <a:srgbClr val="9DBF5A"/>
                       </a:solidFill>
                       <a:prstDash val="solid"/>
                     </a:lnR>
                     <a:lnT w="9525" cap="flat" cmpd="sng" algn="ctr">
                       <a:solidFill>
-                        <a:srgbClr val="819852"/>
+                        <a:srgbClr val="9DBF5A"/>
                       </a:solidFill>
                       <a:prstDash val="solid"/>
                     </a:lnT>
                     <a:lnB w="9525" cap="flat" cmpd="sng" algn="ctr">
                       <a:solidFill>
-                        <a:srgbClr val="819852"/>
+                        <a:srgbClr val="9DBF5A"/>
                       </a:solidFill>
                       <a:prstDash val="solid"/>
                     </a:lnB>
                     <a:solidFill>
-                      <a:srgbClr val="819852"/>
+                      <a:srgbClr val="9DBF5A"/>
                     </a:solidFill>
                   </a:tcPr>
                 </a:tc>
@@ -4508,30 +4508,30 @@
                   <a:tcPr anchor="ctr" marL="73152" marR="73152">
                     <a:lnL w="9525" cap="flat" cmpd="sng" algn="ctr">
                       <a:solidFill>
-                        <a:srgbClr val="819852"/>
+                        <a:srgbClr val="9DBF5A"/>
                       </a:solidFill>
                       <a:prstDash val="solid"/>
                     </a:lnL>
                     <a:lnR w="9525" cap="flat" cmpd="sng" algn="ctr">
                       <a:solidFill>
-                        <a:srgbClr val="819852"/>
+                        <a:srgbClr val="9DBF5A"/>
                       </a:solidFill>
                       <a:prstDash val="solid"/>
                     </a:lnR>
                     <a:lnT w="9525" cap="flat" cmpd="sng" algn="ctr">
                       <a:solidFill>
-                        <a:srgbClr val="819852"/>
+                        <a:srgbClr val="9DBF5A"/>
                       </a:solidFill>
                       <a:prstDash val="solid"/>
                     </a:lnT>
                     <a:lnB w="9525" cap="flat" cmpd="sng" algn="ctr">
                       <a:solidFill>
-                        <a:srgbClr val="819852"/>
+                        <a:srgbClr val="9DBF5A"/>
                       </a:solidFill>
                       <a:prstDash val="solid"/>
                     </a:lnB>
                     <a:solidFill>
-                      <a:srgbClr val="819852"/>
+                      <a:srgbClr val="9DBF5A"/>
                     </a:solidFill>
                   </a:tcPr>
                 </a:tc>
@@ -4554,30 +4554,30 @@
                   <a:tcPr anchor="ctr" marL="73152" marR="73152">
                     <a:lnL w="9525" cap="flat" cmpd="sng" algn="ctr">
                       <a:solidFill>
-                        <a:srgbClr val="819852"/>
+                        <a:srgbClr val="9DBF5A"/>
                       </a:solidFill>
                       <a:prstDash val="solid"/>
                     </a:lnL>
                     <a:lnR w="9525" cap="flat" cmpd="sng" algn="ctr">
                       <a:solidFill>
-                        <a:srgbClr val="819852"/>
+                        <a:srgbClr val="9DBF5A"/>
                       </a:solidFill>
                       <a:prstDash val="solid"/>
                     </a:lnR>
                     <a:lnT w="9525" cap="flat" cmpd="sng" algn="ctr">
                       <a:solidFill>
-                        <a:srgbClr val="819852"/>
+                        <a:srgbClr val="9DBF5A"/>
                       </a:solidFill>
                       <a:prstDash val="solid"/>
                     </a:lnT>
                     <a:lnB w="9525" cap="flat" cmpd="sng" algn="ctr">
                       <a:solidFill>
-                        <a:srgbClr val="819852"/>
+                        <a:srgbClr val="9DBF5A"/>
                       </a:solidFill>
                       <a:prstDash val="solid"/>
                     </a:lnB>
                     <a:solidFill>
-                      <a:srgbClr val="819852"/>
+                      <a:srgbClr val="9DBF5A"/>
                     </a:solidFill>
                   </a:tcPr>
                 </a:tc>
@@ -4600,30 +4600,30 @@
                   <a:tcPr anchor="ctr" marL="73152" marR="73152">
                     <a:lnL w="9525" cap="flat" cmpd="sng" algn="ctr">
                       <a:solidFill>
-                        <a:srgbClr val="819852"/>
+                        <a:srgbClr val="9DBF5A"/>
                       </a:solidFill>
                       <a:prstDash val="solid"/>
                     </a:lnL>
                     <a:lnR w="9525" cap="flat" cmpd="sng" algn="ctr">
                       <a:solidFill>
-                        <a:srgbClr val="819852"/>
+                        <a:srgbClr val="9DBF5A"/>
                       </a:solidFill>
                       <a:prstDash val="solid"/>
                     </a:lnR>
                     <a:lnT w="9525" cap="flat" cmpd="sng" algn="ctr">
                       <a:solidFill>
-                        <a:srgbClr val="819852"/>
+                        <a:srgbClr val="9DBF5A"/>
                       </a:solidFill>
                       <a:prstDash val="solid"/>
                     </a:lnT>
                     <a:lnB w="9525" cap="flat" cmpd="sng" algn="ctr">
                       <a:solidFill>
-                        <a:srgbClr val="819852"/>
+                        <a:srgbClr val="9DBF5A"/>
                       </a:solidFill>
                       <a:prstDash val="solid"/>
                     </a:lnB>
                     <a:solidFill>
-                      <a:srgbClr val="819852"/>
+                      <a:srgbClr val="9DBF5A"/>
                     </a:solidFill>
                   </a:tcPr>
                 </a:tc>
@@ -4646,30 +4646,30 @@
                   <a:tcPr anchor="ctr" marL="73152" marR="73152">
                     <a:lnL w="9525" cap="flat" cmpd="sng" algn="ctr">
                       <a:solidFill>
-                        <a:srgbClr val="819852"/>
+                        <a:srgbClr val="9DBF5A"/>
                       </a:solidFill>
                       <a:prstDash val="solid"/>
                     </a:lnL>
                     <a:lnR w="9525" cap="flat" cmpd="sng" algn="ctr">
                       <a:solidFill>
-                        <a:srgbClr val="819852"/>
+                        <a:srgbClr val="9DBF5A"/>
                       </a:solidFill>
                       <a:prstDash val="solid"/>
                     </a:lnR>
                     <a:lnT w="9525" cap="flat" cmpd="sng" algn="ctr">
                       <a:solidFill>
-                        <a:srgbClr val="819852"/>
+                        <a:srgbClr val="9DBF5A"/>
                       </a:solidFill>
                       <a:prstDash val="solid"/>
                     </a:lnT>
                     <a:lnB w="9525" cap="flat" cmpd="sng" algn="ctr">
                       <a:solidFill>
-                        <a:srgbClr val="819852"/>
+                        <a:srgbClr val="9DBF5A"/>
                       </a:solidFill>
                       <a:prstDash val="solid"/>
                     </a:lnB>
                     <a:solidFill>
-                      <a:srgbClr val="819852"/>
+                      <a:srgbClr val="9DBF5A"/>
                     </a:solidFill>
                   </a:tcPr>
                 </a:tc>
@@ -4694,25 +4694,25 @@
                   <a:tcPr anchor="ctr" marL="73152" marR="73152">
                     <a:lnL w="9525" cap="flat" cmpd="sng" algn="ctr">
                       <a:solidFill>
-                        <a:srgbClr val="E4EBD6"/>
+                        <a:srgbClr val="EBF7D4"/>
                       </a:solidFill>
                       <a:prstDash val="solid"/>
                     </a:lnL>
                     <a:lnR w="9525" cap="flat" cmpd="sng" algn="ctr">
                       <a:solidFill>
-                        <a:srgbClr val="E4EBD6"/>
+                        <a:srgbClr val="EBF7D4"/>
                       </a:solidFill>
                       <a:prstDash val="solid"/>
                     </a:lnR>
                     <a:lnT w="9525" cap="flat" cmpd="sng" algn="ctr">
                       <a:solidFill>
-                        <a:srgbClr val="E4EBD6"/>
+                        <a:srgbClr val="EBF7D4"/>
                       </a:solidFill>
                       <a:prstDash val="solid"/>
                     </a:lnT>
                     <a:lnB w="9525" cap="flat" cmpd="sng" algn="ctr">
                       <a:solidFill>
-                        <a:srgbClr val="E4EBD6"/>
+                        <a:srgbClr val="EBF7D4"/>
                       </a:solidFill>
                       <a:prstDash val="solid"/>
                     </a:lnB>
@@ -4740,25 +4740,25 @@
                   <a:tcPr anchor="ctr" marL="73152" marR="73152">
                     <a:lnL w="9525" cap="flat" cmpd="sng" algn="ctr">
                       <a:solidFill>
-                        <a:srgbClr val="E4EBD6"/>
+                        <a:srgbClr val="EBF7D4"/>
                       </a:solidFill>
                       <a:prstDash val="solid"/>
                     </a:lnL>
                     <a:lnR w="9525" cap="flat" cmpd="sng" algn="ctr">
                       <a:solidFill>
-                        <a:srgbClr val="E4EBD6"/>
+                        <a:srgbClr val="EBF7D4"/>
                       </a:solidFill>
                       <a:prstDash val="solid"/>
                     </a:lnR>
                     <a:lnT w="9525" cap="flat" cmpd="sng" algn="ctr">
                       <a:solidFill>
-                        <a:srgbClr val="E4EBD6"/>
+                        <a:srgbClr val="EBF7D4"/>
                       </a:solidFill>
                       <a:prstDash val="solid"/>
                     </a:lnT>
                     <a:lnB w="9525" cap="flat" cmpd="sng" algn="ctr">
                       <a:solidFill>
-                        <a:srgbClr val="E4EBD6"/>
+                        <a:srgbClr val="EBF7D4"/>
                       </a:solidFill>
                       <a:prstDash val="solid"/>
                     </a:lnB>
@@ -4786,25 +4786,25 @@
                   <a:tcPr anchor="ctr" marL="73152" marR="73152">
                     <a:lnL w="9525" cap="flat" cmpd="sng" algn="ctr">
                       <a:solidFill>
-                        <a:srgbClr val="E4EBD6"/>
+                        <a:srgbClr val="EBF7D4"/>
                       </a:solidFill>
                       <a:prstDash val="solid"/>
                     </a:lnL>
                     <a:lnR w="9525" cap="flat" cmpd="sng" algn="ctr">
                       <a:solidFill>
-                        <a:srgbClr val="E4EBD6"/>
+                        <a:srgbClr val="EBF7D4"/>
                       </a:solidFill>
                       <a:prstDash val="solid"/>
                     </a:lnR>
                     <a:lnT w="9525" cap="flat" cmpd="sng" algn="ctr">
                       <a:solidFill>
-                        <a:srgbClr val="E4EBD6"/>
+                        <a:srgbClr val="EBF7D4"/>
                       </a:solidFill>
                       <a:prstDash val="solid"/>
                     </a:lnT>
                     <a:lnB w="9525" cap="flat" cmpd="sng" algn="ctr">
                       <a:solidFill>
-                        <a:srgbClr val="E4EBD6"/>
+                        <a:srgbClr val="EBF7D4"/>
                       </a:solidFill>
                       <a:prstDash val="solid"/>
                     </a:lnB>
@@ -4832,25 +4832,25 @@
                   <a:tcPr anchor="ctr" marL="73152" marR="73152">
                     <a:lnL w="9525" cap="flat" cmpd="sng" algn="ctr">
                       <a:solidFill>
-                        <a:srgbClr val="E4EBD6"/>
+                        <a:srgbClr val="EBF7D4"/>
                       </a:solidFill>
                       <a:prstDash val="solid"/>
                     </a:lnL>
                     <a:lnR w="9525" cap="flat" cmpd="sng" algn="ctr">
                       <a:solidFill>
-                        <a:srgbClr val="E4EBD6"/>
+                        <a:srgbClr val="EBF7D4"/>
                       </a:solidFill>
                       <a:prstDash val="solid"/>
                     </a:lnR>
                     <a:lnT w="9525" cap="flat" cmpd="sng" algn="ctr">
                       <a:solidFill>
-                        <a:srgbClr val="E4EBD6"/>
+                        <a:srgbClr val="EBF7D4"/>
                       </a:solidFill>
                       <a:prstDash val="solid"/>
                     </a:lnT>
                     <a:lnB w="9525" cap="flat" cmpd="sng" algn="ctr">
                       <a:solidFill>
-                        <a:srgbClr val="E4EBD6"/>
+                        <a:srgbClr val="EBF7D4"/>
                       </a:solidFill>
                       <a:prstDash val="solid"/>
                     </a:lnB>
@@ -4878,25 +4878,25 @@
                   <a:tcPr anchor="ctr" marL="73152" marR="73152">
                     <a:lnL w="9525" cap="flat" cmpd="sng" algn="ctr">
                       <a:solidFill>
-                        <a:srgbClr val="E4EBD6"/>
+                        <a:srgbClr val="EBF7D4"/>
                       </a:solidFill>
                       <a:prstDash val="solid"/>
                     </a:lnL>
                     <a:lnR w="9525" cap="flat" cmpd="sng" algn="ctr">
                       <a:solidFill>
-                        <a:srgbClr val="E4EBD6"/>
+                        <a:srgbClr val="EBF7D4"/>
                       </a:solidFill>
                       <a:prstDash val="solid"/>
                     </a:lnR>
                     <a:lnT w="9525" cap="flat" cmpd="sng" algn="ctr">
                       <a:solidFill>
-                        <a:srgbClr val="E4EBD6"/>
+                        <a:srgbClr val="EBF7D4"/>
                       </a:solidFill>
                       <a:prstDash val="solid"/>
                     </a:lnT>
                     <a:lnB w="9525" cap="flat" cmpd="sng" algn="ctr">
                       <a:solidFill>
-                        <a:srgbClr val="E4EBD6"/>
+                        <a:srgbClr val="EBF7D4"/>
                       </a:solidFill>
                       <a:prstDash val="solid"/>
                     </a:lnB>
@@ -4926,30 +4926,30 @@
                   <a:tcPr anchor="ctr" marL="73152" marR="73152">
                     <a:lnL w="9525" cap="flat" cmpd="sng" algn="ctr">
                       <a:solidFill>
-                        <a:srgbClr val="E4EBD6"/>
+                        <a:srgbClr val="EBF7D4"/>
                       </a:solidFill>
                       <a:prstDash val="solid"/>
                     </a:lnL>
                     <a:lnR w="9525" cap="flat" cmpd="sng" algn="ctr">
                       <a:solidFill>
-                        <a:srgbClr val="E4EBD6"/>
+                        <a:srgbClr val="EBF7D4"/>
                       </a:solidFill>
                       <a:prstDash val="solid"/>
                     </a:lnR>
                     <a:lnT w="9525" cap="flat" cmpd="sng" algn="ctr">
                       <a:solidFill>
-                        <a:srgbClr val="E4EBD6"/>
+                        <a:srgbClr val="EBF7D4"/>
                       </a:solidFill>
                       <a:prstDash val="solid"/>
                     </a:lnT>
                     <a:lnB w="9525" cap="flat" cmpd="sng" algn="ctr">
                       <a:solidFill>
-                        <a:srgbClr val="E4EBD6"/>
+                        <a:srgbClr val="EBF7D4"/>
                       </a:solidFill>
                       <a:prstDash val="solid"/>
                     </a:lnB>
                     <a:solidFill>
-                      <a:srgbClr val="F6F8F2"/>
+                      <a:srgbClr val="F9FCF3"/>
                     </a:solidFill>
                   </a:tcPr>
                 </a:tc>
@@ -4972,30 +4972,30 @@
                   <a:tcPr anchor="ctr" marL="73152" marR="73152">
                     <a:lnL w="9525" cap="flat" cmpd="sng" algn="ctr">
                       <a:solidFill>
-                        <a:srgbClr val="E4EBD6"/>
+                        <a:srgbClr val="EBF7D4"/>
                       </a:solidFill>
                       <a:prstDash val="solid"/>
                     </a:lnL>
                     <a:lnR w="9525" cap="flat" cmpd="sng" algn="ctr">
                       <a:solidFill>
-                        <a:srgbClr val="E4EBD6"/>
+                        <a:srgbClr val="EBF7D4"/>
                       </a:solidFill>
                       <a:prstDash val="solid"/>
                     </a:lnR>
                     <a:lnT w="9525" cap="flat" cmpd="sng" algn="ctr">
                       <a:solidFill>
-                        <a:srgbClr val="E4EBD6"/>
+                        <a:srgbClr val="EBF7D4"/>
                       </a:solidFill>
                       <a:prstDash val="solid"/>
                     </a:lnT>
                     <a:lnB w="9525" cap="flat" cmpd="sng" algn="ctr">
                       <a:solidFill>
-                        <a:srgbClr val="E4EBD6"/>
+                        <a:srgbClr val="EBF7D4"/>
                       </a:solidFill>
                       <a:prstDash val="solid"/>
                     </a:lnB>
                     <a:solidFill>
-                      <a:srgbClr val="F6F8F2"/>
+                      <a:srgbClr val="F9FCF3"/>
                     </a:solidFill>
                   </a:tcPr>
                 </a:tc>
@@ -5018,30 +5018,30 @@
                   <a:tcPr anchor="ctr" marL="73152" marR="73152">
                     <a:lnL w="9525" cap="flat" cmpd="sng" algn="ctr">
                       <a:solidFill>
-                        <a:srgbClr val="E4EBD6"/>
+                        <a:srgbClr val="EBF7D4"/>
                       </a:solidFill>
                       <a:prstDash val="solid"/>
                     </a:lnL>
                     <a:lnR w="9525" cap="flat" cmpd="sng" algn="ctr">
                       <a:solidFill>
-                        <a:srgbClr val="E4EBD6"/>
+                        <a:srgbClr val="EBF7D4"/>
                       </a:solidFill>
                       <a:prstDash val="solid"/>
                     </a:lnR>
                     <a:lnT w="9525" cap="flat" cmpd="sng" algn="ctr">
                       <a:solidFill>
-                        <a:srgbClr val="E4EBD6"/>
+                        <a:srgbClr val="EBF7D4"/>
                       </a:solidFill>
                       <a:prstDash val="solid"/>
                     </a:lnT>
                     <a:lnB w="9525" cap="flat" cmpd="sng" algn="ctr">
                       <a:solidFill>
-                        <a:srgbClr val="E4EBD6"/>
+                        <a:srgbClr val="EBF7D4"/>
                       </a:solidFill>
                       <a:prstDash val="solid"/>
                     </a:lnB>
                     <a:solidFill>
-                      <a:srgbClr val="F6F8F2"/>
+                      <a:srgbClr val="F9FCF3"/>
                     </a:solidFill>
                   </a:tcPr>
                 </a:tc>
@@ -5064,30 +5064,30 @@
                   <a:tcPr anchor="ctr" marL="73152" marR="73152">
                     <a:lnL w="9525" cap="flat" cmpd="sng" algn="ctr">
                       <a:solidFill>
-                        <a:srgbClr val="E4EBD6"/>
+                        <a:srgbClr val="EBF7D4"/>
                       </a:solidFill>
                       <a:prstDash val="solid"/>
                     </a:lnL>
                     <a:lnR w="9525" cap="flat" cmpd="sng" algn="ctr">
                       <a:solidFill>
-                        <a:srgbClr val="E4EBD6"/>
+                        <a:srgbClr val="EBF7D4"/>
                       </a:solidFill>
                       <a:prstDash val="solid"/>
                     </a:lnR>
                     <a:lnT w="9525" cap="flat" cmpd="sng" algn="ctr">
                       <a:solidFill>
-                        <a:srgbClr val="E4EBD6"/>
+                        <a:srgbClr val="EBF7D4"/>
                       </a:solidFill>
                       <a:prstDash val="solid"/>
                     </a:lnT>
                     <a:lnB w="9525" cap="flat" cmpd="sng" algn="ctr">
                       <a:solidFill>
-                        <a:srgbClr val="E4EBD6"/>
+                        <a:srgbClr val="EBF7D4"/>
                       </a:solidFill>
                       <a:prstDash val="solid"/>
                     </a:lnB>
                     <a:solidFill>
-                      <a:srgbClr val="F6F8F2"/>
+                      <a:srgbClr val="F9FCF3"/>
                     </a:solidFill>
                   </a:tcPr>
                 </a:tc>
@@ -5110,30 +5110,30 @@
                   <a:tcPr anchor="ctr" marL="73152" marR="73152">
                     <a:lnL w="9525" cap="flat" cmpd="sng" algn="ctr">
                       <a:solidFill>
-                        <a:srgbClr val="E4EBD6"/>
+                        <a:srgbClr val="EBF7D4"/>
                       </a:solidFill>
                       <a:prstDash val="solid"/>
                     </a:lnL>
                     <a:lnR w="9525" cap="flat" cmpd="sng" algn="ctr">
                       <a:solidFill>
-                        <a:srgbClr val="E4EBD6"/>
+                        <a:srgbClr val="EBF7D4"/>
                       </a:solidFill>
                       <a:prstDash val="solid"/>
                     </a:lnR>
                     <a:lnT w="9525" cap="flat" cmpd="sng" algn="ctr">
                       <a:solidFill>
-                        <a:srgbClr val="E4EBD6"/>
+                        <a:srgbClr val="EBF7D4"/>
                       </a:solidFill>
                       <a:prstDash val="solid"/>
                     </a:lnT>
                     <a:lnB w="9525" cap="flat" cmpd="sng" algn="ctr">
                       <a:solidFill>
-                        <a:srgbClr val="E4EBD6"/>
+                        <a:srgbClr val="EBF7D4"/>
                       </a:solidFill>
                       <a:prstDash val="solid"/>
                     </a:lnB>
                     <a:solidFill>
-                      <a:srgbClr val="F6F8F2"/>
+                      <a:srgbClr val="F9FCF3"/>
                     </a:solidFill>
                   </a:tcPr>
                 </a:tc>
@@ -5158,25 +5158,25 @@
                   <a:tcPr anchor="ctr" marL="73152" marR="73152">
                     <a:lnL w="9525" cap="flat" cmpd="sng" algn="ctr">
                       <a:solidFill>
-                        <a:srgbClr val="E4EBD6"/>
+                        <a:srgbClr val="EBF7D4"/>
                       </a:solidFill>
                       <a:prstDash val="solid"/>
                     </a:lnL>
                     <a:lnR w="9525" cap="flat" cmpd="sng" algn="ctr">
                       <a:solidFill>
-                        <a:srgbClr val="E4EBD6"/>
+                        <a:srgbClr val="EBF7D4"/>
                       </a:solidFill>
                       <a:prstDash val="solid"/>
                     </a:lnR>
                     <a:lnT w="9525" cap="flat" cmpd="sng" algn="ctr">
                       <a:solidFill>
-                        <a:srgbClr val="E4EBD6"/>
+                        <a:srgbClr val="EBF7D4"/>
                       </a:solidFill>
                       <a:prstDash val="solid"/>
                     </a:lnT>
                     <a:lnB w="9525" cap="flat" cmpd="sng" algn="ctr">
                       <a:solidFill>
-                        <a:srgbClr val="E4EBD6"/>
+                        <a:srgbClr val="EBF7D4"/>
                       </a:solidFill>
                       <a:prstDash val="solid"/>
                     </a:lnB>
@@ -5204,25 +5204,25 @@
                   <a:tcPr anchor="ctr" marL="73152" marR="73152">
                     <a:lnL w="9525" cap="flat" cmpd="sng" algn="ctr">
                       <a:solidFill>
-                        <a:srgbClr val="E4EBD6"/>
+                        <a:srgbClr val="EBF7D4"/>
                       </a:solidFill>
                       <a:prstDash val="solid"/>
                     </a:lnL>
                     <a:lnR w="9525" cap="flat" cmpd="sng" algn="ctr">
                       <a:solidFill>
-                        <a:srgbClr val="E4EBD6"/>
+                        <a:srgbClr val="EBF7D4"/>
                       </a:solidFill>
                       <a:prstDash val="solid"/>
                     </a:lnR>
                     <a:lnT w="9525" cap="flat" cmpd="sng" algn="ctr">
                       <a:solidFill>
-                        <a:srgbClr val="E4EBD6"/>
+                        <a:srgbClr val="EBF7D4"/>
                       </a:solidFill>
                       <a:prstDash val="solid"/>
                     </a:lnT>
                     <a:lnB w="9525" cap="flat" cmpd="sng" algn="ctr">
                       <a:solidFill>
-                        <a:srgbClr val="E4EBD6"/>
+                        <a:srgbClr val="EBF7D4"/>
                       </a:solidFill>
                       <a:prstDash val="solid"/>
                     </a:lnB>
@@ -5250,25 +5250,25 @@
                   <a:tcPr anchor="ctr" marL="73152" marR="73152">
                     <a:lnL w="9525" cap="flat" cmpd="sng" algn="ctr">
                       <a:solidFill>
-                        <a:srgbClr val="E4EBD6"/>
+                        <a:srgbClr val="EBF7D4"/>
                       </a:solidFill>
                       <a:prstDash val="solid"/>
                     </a:lnL>
                     <a:lnR w="9525" cap="flat" cmpd="sng" algn="ctr">
                       <a:solidFill>
-                        <a:srgbClr val="E4EBD6"/>
+                        <a:srgbClr val="EBF7D4"/>
                       </a:solidFill>
                       <a:prstDash val="solid"/>
                     </a:lnR>
                     <a:lnT w="9525" cap="flat" cmpd="sng" algn="ctr">
                       <a:solidFill>
-                        <a:srgbClr val="E4EBD6"/>
+                        <a:srgbClr val="EBF7D4"/>
                       </a:solidFill>
                       <a:prstDash val="solid"/>
                     </a:lnT>
                     <a:lnB w="9525" cap="flat" cmpd="sng" algn="ctr">
                       <a:solidFill>
-                        <a:srgbClr val="E4EBD6"/>
+                        <a:srgbClr val="EBF7D4"/>
                       </a:solidFill>
                       <a:prstDash val="solid"/>
                     </a:lnB>
@@ -5296,25 +5296,25 @@
                   <a:tcPr anchor="ctr" marL="73152" marR="73152">
                     <a:lnL w="9525" cap="flat" cmpd="sng" algn="ctr">
                       <a:solidFill>
-                        <a:srgbClr val="E4EBD6"/>
+                        <a:srgbClr val="EBF7D4"/>
                       </a:solidFill>
                       <a:prstDash val="solid"/>
                     </a:lnL>
                     <a:lnR w="9525" cap="flat" cmpd="sng" algn="ctr">
                       <a:solidFill>
-                        <a:srgbClr val="E4EBD6"/>
+                        <a:srgbClr val="EBF7D4"/>
                       </a:solidFill>
                       <a:prstDash val="solid"/>
                     </a:lnR>
                     <a:lnT w="9525" cap="flat" cmpd="sng" algn="ctr">
                       <a:solidFill>
-                        <a:srgbClr val="E4EBD6"/>
+                        <a:srgbClr val="EBF7D4"/>
                       </a:solidFill>
                       <a:prstDash val="solid"/>
                     </a:lnT>
                     <a:lnB w="9525" cap="flat" cmpd="sng" algn="ctr">
                       <a:solidFill>
-                        <a:srgbClr val="E4EBD6"/>
+                        <a:srgbClr val="EBF7D4"/>
                       </a:solidFill>
                       <a:prstDash val="solid"/>
                     </a:lnB>
@@ -5342,25 +5342,25 @@
                   <a:tcPr anchor="ctr" marL="73152" marR="73152">
                     <a:lnL w="9525" cap="flat" cmpd="sng" algn="ctr">
                       <a:solidFill>
-                        <a:srgbClr val="E4EBD6"/>
+                        <a:srgbClr val="EBF7D4"/>
                       </a:solidFill>
                       <a:prstDash val="solid"/>
                     </a:lnL>
                     <a:lnR w="9525" cap="flat" cmpd="sng" algn="ctr">
                       <a:solidFill>
-                        <a:srgbClr val="E4EBD6"/>
+                        <a:srgbClr val="EBF7D4"/>
                       </a:solidFill>
                       <a:prstDash val="solid"/>
                     </a:lnR>
                     <a:lnT w="9525" cap="flat" cmpd="sng" algn="ctr">
                       <a:solidFill>
-                        <a:srgbClr val="E4EBD6"/>
+                        <a:srgbClr val="EBF7D4"/>
                       </a:solidFill>
                       <a:prstDash val="solid"/>
                     </a:lnT>
                     <a:lnB w="9525" cap="flat" cmpd="sng" algn="ctr">
                       <a:solidFill>
-                        <a:srgbClr val="E4EBD6"/>
+                        <a:srgbClr val="EBF7D4"/>
                       </a:solidFill>
                       <a:prstDash val="solid"/>
                     </a:lnB>
@@ -5390,30 +5390,30 @@
                   <a:tcPr anchor="ctr" marL="73152" marR="73152">
                     <a:lnL w="9525" cap="flat" cmpd="sng" algn="ctr">
                       <a:solidFill>
-                        <a:srgbClr val="E4EBD6"/>
+                        <a:srgbClr val="EBF7D4"/>
                       </a:solidFill>
                       <a:prstDash val="solid"/>
                     </a:lnL>
                     <a:lnR w="9525" cap="flat" cmpd="sng" algn="ctr">
                       <a:solidFill>
-                        <a:srgbClr val="E4EBD6"/>
+                        <a:srgbClr val="EBF7D4"/>
                       </a:solidFill>
                       <a:prstDash val="solid"/>
                     </a:lnR>
                     <a:lnT w="9525" cap="flat" cmpd="sng" algn="ctr">
                       <a:solidFill>
-                        <a:srgbClr val="E4EBD6"/>
+                        <a:srgbClr val="EBF7D4"/>
                       </a:solidFill>
                       <a:prstDash val="solid"/>
                     </a:lnT>
                     <a:lnB w="9525" cap="flat" cmpd="sng" algn="ctr">
                       <a:solidFill>
-                        <a:srgbClr val="E4EBD6"/>
+                        <a:srgbClr val="EBF7D4"/>
                       </a:solidFill>
                       <a:prstDash val="solid"/>
                     </a:lnB>
                     <a:solidFill>
-                      <a:srgbClr val="F6F8F2"/>
+                      <a:srgbClr val="F9FCF3"/>
                     </a:solidFill>
                   </a:tcPr>
                 </a:tc>
@@ -5436,30 +5436,30 @@
                   <a:tcPr anchor="ctr" marL="73152" marR="73152">
                     <a:lnL w="9525" cap="flat" cmpd="sng" algn="ctr">
                       <a:solidFill>
-                        <a:srgbClr val="E4EBD6"/>
+                        <a:srgbClr val="EBF7D4"/>
                       </a:solidFill>
                       <a:prstDash val="solid"/>
                     </a:lnL>
                     <a:lnR w="9525" cap="flat" cmpd="sng" algn="ctr">
                       <a:solidFill>
-                        <a:srgbClr val="E4EBD6"/>
+                        <a:srgbClr val="EBF7D4"/>
                       </a:solidFill>
                       <a:prstDash val="solid"/>
                     </a:lnR>
                     <a:lnT w="9525" cap="flat" cmpd="sng" algn="ctr">
                       <a:solidFill>
-                        <a:srgbClr val="E4EBD6"/>
+                        <a:srgbClr val="EBF7D4"/>
                       </a:solidFill>
                       <a:prstDash val="solid"/>
                     </a:lnT>
                     <a:lnB w="9525" cap="flat" cmpd="sng" algn="ctr">
                       <a:solidFill>
-                        <a:srgbClr val="E4EBD6"/>
+                        <a:srgbClr val="EBF7D4"/>
                       </a:solidFill>
                       <a:prstDash val="solid"/>
                     </a:lnB>
                     <a:solidFill>
-                      <a:srgbClr val="F6F8F2"/>
+                      <a:srgbClr val="F9FCF3"/>
                     </a:solidFill>
                   </a:tcPr>
                 </a:tc>
@@ -5482,30 +5482,30 @@
                   <a:tcPr anchor="ctr" marL="73152" marR="73152">
                     <a:lnL w="9525" cap="flat" cmpd="sng" algn="ctr">
                       <a:solidFill>
-                        <a:srgbClr val="E4EBD6"/>
+                        <a:srgbClr val="EBF7D4"/>
                       </a:solidFill>
                       <a:prstDash val="solid"/>
                     </a:lnL>
                     <a:lnR w="9525" cap="flat" cmpd="sng" algn="ctr">
                       <a:solidFill>
-                        <a:srgbClr val="E4EBD6"/>
+                        <a:srgbClr val="EBF7D4"/>
                       </a:solidFill>
                       <a:prstDash val="solid"/>
                     </a:lnR>
                     <a:lnT w="9525" cap="flat" cmpd="sng" algn="ctr">
                       <a:solidFill>
-                        <a:srgbClr val="E4EBD6"/>
+                        <a:srgbClr val="EBF7D4"/>
                       </a:solidFill>
                       <a:prstDash val="solid"/>
                     </a:lnT>
                     <a:lnB w="9525" cap="flat" cmpd="sng" algn="ctr">
                       <a:solidFill>
-                        <a:srgbClr val="E4EBD6"/>
+                        <a:srgbClr val="EBF7D4"/>
                       </a:solidFill>
                       <a:prstDash val="solid"/>
                     </a:lnB>
                     <a:solidFill>
-                      <a:srgbClr val="F6F8F2"/>
+                      <a:srgbClr val="F9FCF3"/>
                     </a:solidFill>
                   </a:tcPr>
                 </a:tc>
@@ -5528,30 +5528,30 @@
                   <a:tcPr anchor="ctr" marL="73152" marR="73152">
                     <a:lnL w="9525" cap="flat" cmpd="sng" algn="ctr">
                       <a:solidFill>
-                        <a:srgbClr val="E4EBD6"/>
+                        <a:srgbClr val="EBF7D4"/>
                       </a:solidFill>
                       <a:prstDash val="solid"/>
                     </a:lnL>
                     <a:lnR w="9525" cap="flat" cmpd="sng" algn="ctr">
                       <a:solidFill>
-                        <a:srgbClr val="E4EBD6"/>
+                        <a:srgbClr val="EBF7D4"/>
                       </a:solidFill>
                       <a:prstDash val="solid"/>
                     </a:lnR>
                     <a:lnT w="9525" cap="flat" cmpd="sng" algn="ctr">
                       <a:solidFill>
-                        <a:srgbClr val="E4EBD6"/>
+                        <a:srgbClr val="EBF7D4"/>
                       </a:solidFill>
                       <a:prstDash val="solid"/>
                     </a:lnT>
                     <a:lnB w="9525" cap="flat" cmpd="sng" algn="ctr">
                       <a:solidFill>
-                        <a:srgbClr val="E4EBD6"/>
+                        <a:srgbClr val="EBF7D4"/>
                       </a:solidFill>
                       <a:prstDash val="solid"/>
                     </a:lnB>
                     <a:solidFill>
-                      <a:srgbClr val="F6F8F2"/>
+                      <a:srgbClr val="F9FCF3"/>
                     </a:solidFill>
                   </a:tcPr>
                 </a:tc>
@@ -5574,30 +5574,30 @@
                   <a:tcPr anchor="ctr" marL="73152" marR="73152">
                     <a:lnL w="9525" cap="flat" cmpd="sng" algn="ctr">
                       <a:solidFill>
-                        <a:srgbClr val="E4EBD6"/>
+                        <a:srgbClr val="EBF7D4"/>
                       </a:solidFill>
                       <a:prstDash val="solid"/>
                     </a:lnL>
                     <a:lnR w="9525" cap="flat" cmpd="sng" algn="ctr">
                       <a:solidFill>
-                        <a:srgbClr val="E4EBD6"/>
+                        <a:srgbClr val="EBF7D4"/>
                       </a:solidFill>
                       <a:prstDash val="solid"/>
                     </a:lnR>
                     <a:lnT w="9525" cap="flat" cmpd="sng" algn="ctr">
                       <a:solidFill>
-                        <a:srgbClr val="E4EBD6"/>
+                        <a:srgbClr val="EBF7D4"/>
                       </a:solidFill>
                       <a:prstDash val="solid"/>
                     </a:lnT>
                     <a:lnB w="9525" cap="flat" cmpd="sng" algn="ctr">
                       <a:solidFill>
-                        <a:srgbClr val="E4EBD6"/>
+                        <a:srgbClr val="EBF7D4"/>
                       </a:solidFill>
                       <a:prstDash val="solid"/>
                     </a:lnB>
                     <a:solidFill>
-                      <a:srgbClr val="F6F8F2"/>
+                      <a:srgbClr val="F9FCF3"/>
                     </a:solidFill>
                   </a:tcPr>
                 </a:tc>
@@ -5622,25 +5622,25 @@
                   <a:tcPr anchor="ctr" marL="73152" marR="73152">
                     <a:lnL w="9525" cap="flat" cmpd="sng" algn="ctr">
                       <a:solidFill>
-                        <a:srgbClr val="E4EBD6"/>
+                        <a:srgbClr val="EBF7D4"/>
                       </a:solidFill>
                       <a:prstDash val="solid"/>
                     </a:lnL>
                     <a:lnR w="9525" cap="flat" cmpd="sng" algn="ctr">
                       <a:solidFill>
-                        <a:srgbClr val="E4EBD6"/>
+                        <a:srgbClr val="EBF7D4"/>
                       </a:solidFill>
                       <a:prstDash val="solid"/>
                     </a:lnR>
                     <a:lnT w="9525" cap="flat" cmpd="sng" algn="ctr">
                       <a:solidFill>
-                        <a:srgbClr val="E4EBD6"/>
+                        <a:srgbClr val="EBF7D4"/>
                       </a:solidFill>
                       <a:prstDash val="solid"/>
                     </a:lnT>
                     <a:lnB w="9525" cap="flat" cmpd="sng" algn="ctr">
                       <a:solidFill>
-                        <a:srgbClr val="E4EBD6"/>
+                        <a:srgbClr val="EBF7D4"/>
                       </a:solidFill>
                       <a:prstDash val="solid"/>
                     </a:lnB>
@@ -5668,25 +5668,25 @@
                   <a:tcPr anchor="ctr" marL="73152" marR="73152">
                     <a:lnL w="9525" cap="flat" cmpd="sng" algn="ctr">
                       <a:solidFill>
-                        <a:srgbClr val="E4EBD6"/>
+                        <a:srgbClr val="EBF7D4"/>
                       </a:solidFill>
                       <a:prstDash val="solid"/>
                     </a:lnL>
                     <a:lnR w="9525" cap="flat" cmpd="sng" algn="ctr">
                       <a:solidFill>
-                        <a:srgbClr val="E4EBD6"/>
+                        <a:srgbClr val="EBF7D4"/>
                       </a:solidFill>
                       <a:prstDash val="solid"/>
                     </a:lnR>
                     <a:lnT w="9525" cap="flat" cmpd="sng" algn="ctr">
                       <a:solidFill>
-                        <a:srgbClr val="E4EBD6"/>
+                        <a:srgbClr val="EBF7D4"/>
                       </a:solidFill>
                       <a:prstDash val="solid"/>
                     </a:lnT>
                     <a:lnB w="9525" cap="flat" cmpd="sng" algn="ctr">
                       <a:solidFill>
-                        <a:srgbClr val="E4EBD6"/>
+                        <a:srgbClr val="EBF7D4"/>
                       </a:solidFill>
                       <a:prstDash val="solid"/>
                     </a:lnB>
@@ -5714,25 +5714,25 @@
                   <a:tcPr anchor="ctr" marL="73152" marR="73152">
                     <a:lnL w="9525" cap="flat" cmpd="sng" algn="ctr">
                       <a:solidFill>
-                        <a:srgbClr val="E4EBD6"/>
+                        <a:srgbClr val="EBF7D4"/>
                       </a:solidFill>
                       <a:prstDash val="solid"/>
                     </a:lnL>
                     <a:lnR w="9525" cap="flat" cmpd="sng" algn="ctr">
                       <a:solidFill>
-                        <a:srgbClr val="E4EBD6"/>
+                        <a:srgbClr val="EBF7D4"/>
                       </a:solidFill>
                       <a:prstDash val="solid"/>
                     </a:lnR>
                     <a:lnT w="9525" cap="flat" cmpd="sng" algn="ctr">
                       <a:solidFill>
-                        <a:srgbClr val="E4EBD6"/>
+                        <a:srgbClr val="EBF7D4"/>
                       </a:solidFill>
                       <a:prstDash val="solid"/>
                     </a:lnT>
                     <a:lnB w="9525" cap="flat" cmpd="sng" algn="ctr">
                       <a:solidFill>
-                        <a:srgbClr val="E4EBD6"/>
+                        <a:srgbClr val="EBF7D4"/>
                       </a:solidFill>
                       <a:prstDash val="solid"/>
                     </a:lnB>
@@ -5760,25 +5760,25 @@
                   <a:tcPr anchor="ctr" marL="73152" marR="73152">
                     <a:lnL w="9525" cap="flat" cmpd="sng" algn="ctr">
                       <a:solidFill>
-                        <a:srgbClr val="E4EBD6"/>
+                        <a:srgbClr val="EBF7D4"/>
                       </a:solidFill>
                       <a:prstDash val="solid"/>
                     </a:lnL>
                     <a:lnR w="9525" cap="flat" cmpd="sng" algn="ctr">
                       <a:solidFill>
-                        <a:srgbClr val="E4EBD6"/>
+                        <a:srgbClr val="EBF7D4"/>
                       </a:solidFill>
                       <a:prstDash val="solid"/>
                     </a:lnR>
                     <a:lnT w="9525" cap="flat" cmpd="sng" algn="ctr">
                       <a:solidFill>
-                        <a:srgbClr val="E4EBD6"/>
+                        <a:srgbClr val="EBF7D4"/>
                       </a:solidFill>
                       <a:prstDash val="solid"/>
                     </a:lnT>
                     <a:lnB w="9525" cap="flat" cmpd="sng" algn="ctr">
                       <a:solidFill>
-                        <a:srgbClr val="E4EBD6"/>
+                        <a:srgbClr val="EBF7D4"/>
                       </a:solidFill>
                       <a:prstDash val="solid"/>
                     </a:lnB>
@@ -5806,25 +5806,25 @@
                   <a:tcPr anchor="ctr" marL="73152" marR="73152">
                     <a:lnL w="9525" cap="flat" cmpd="sng" algn="ctr">
                       <a:solidFill>
-                        <a:srgbClr val="E4EBD6"/>
+                        <a:srgbClr val="EBF7D4"/>
                       </a:solidFill>
                       <a:prstDash val="solid"/>
                     </a:lnL>
                     <a:lnR w="9525" cap="flat" cmpd="sng" algn="ctr">
                       <a:solidFill>
-                        <a:srgbClr val="E4EBD6"/>
+                        <a:srgbClr val="EBF7D4"/>
                       </a:solidFill>
                       <a:prstDash val="solid"/>
                     </a:lnR>
                     <a:lnT w="9525" cap="flat" cmpd="sng" algn="ctr">
                       <a:solidFill>
-                        <a:srgbClr val="E4EBD6"/>
+                        <a:srgbClr val="EBF7D4"/>
                       </a:solidFill>
                       <a:prstDash val="solid"/>
                     </a:lnT>
                     <a:lnB w="9525" cap="flat" cmpd="sng" algn="ctr">
                       <a:solidFill>
-                        <a:srgbClr val="E4EBD6"/>
+                        <a:srgbClr val="EBF7D4"/>
                       </a:solidFill>
                       <a:prstDash val="solid"/>
                     </a:lnB>
@@ -5854,30 +5854,30 @@
                   <a:tcPr anchor="ctr" marL="73152" marR="73152">
                     <a:lnL w="9525" cap="flat" cmpd="sng" algn="ctr">
                       <a:solidFill>
-                        <a:srgbClr val="E4EBD6"/>
+                        <a:srgbClr val="EBF7D4"/>
                       </a:solidFill>
                       <a:prstDash val="solid"/>
                     </a:lnL>
                     <a:lnR w="9525" cap="flat" cmpd="sng" algn="ctr">
                       <a:solidFill>
-                        <a:srgbClr val="E4EBD6"/>
+                        <a:srgbClr val="EBF7D4"/>
                       </a:solidFill>
                       <a:prstDash val="solid"/>
                     </a:lnR>
                     <a:lnT w="9525" cap="flat" cmpd="sng" algn="ctr">
                       <a:solidFill>
-                        <a:srgbClr val="E4EBD6"/>
+                        <a:srgbClr val="EBF7D4"/>
                       </a:solidFill>
                       <a:prstDash val="solid"/>
                     </a:lnT>
                     <a:lnB w="9525" cap="flat" cmpd="sng" algn="ctr">
                       <a:solidFill>
-                        <a:srgbClr val="E4EBD6"/>
+                        <a:srgbClr val="EBF7D4"/>
                       </a:solidFill>
                       <a:prstDash val="solid"/>
                     </a:lnB>
                     <a:solidFill>
-                      <a:srgbClr val="F6F8F2"/>
+                      <a:srgbClr val="F9FCF3"/>
                     </a:solidFill>
                   </a:tcPr>
                 </a:tc>
@@ -5900,30 +5900,30 @@
                   <a:tcPr anchor="ctr" marL="73152" marR="73152">
                     <a:lnL w="9525" cap="flat" cmpd="sng" algn="ctr">
                       <a:solidFill>
-                        <a:srgbClr val="E4EBD6"/>
+                        <a:srgbClr val="EBF7D4"/>
                       </a:solidFill>
                       <a:prstDash val="solid"/>
                     </a:lnL>
                     <a:lnR w="9525" cap="flat" cmpd="sng" algn="ctr">
                       <a:solidFill>
-                        <a:srgbClr val="E4EBD6"/>
+                        <a:srgbClr val="EBF7D4"/>
                       </a:solidFill>
                       <a:prstDash val="solid"/>
                     </a:lnR>
                     <a:lnT w="9525" cap="flat" cmpd="sng" algn="ctr">
                       <a:solidFill>
-                        <a:srgbClr val="E4EBD6"/>
+                        <a:srgbClr val="EBF7D4"/>
                       </a:solidFill>
                       <a:prstDash val="solid"/>
                     </a:lnT>
                     <a:lnB w="9525" cap="flat" cmpd="sng" algn="ctr">
                       <a:solidFill>
-                        <a:srgbClr val="E4EBD6"/>
+                        <a:srgbClr val="EBF7D4"/>
                       </a:solidFill>
                       <a:prstDash val="solid"/>
                     </a:lnB>
                     <a:solidFill>
-                      <a:srgbClr val="F6F8F2"/>
+                      <a:srgbClr val="F9FCF3"/>
                     </a:solidFill>
                   </a:tcPr>
                 </a:tc>
@@ -5946,30 +5946,30 @@
                   <a:tcPr anchor="ctr" marL="73152" marR="73152">
                     <a:lnL w="9525" cap="flat" cmpd="sng" algn="ctr">
                       <a:solidFill>
-                        <a:srgbClr val="E4EBD6"/>
+                        <a:srgbClr val="EBF7D4"/>
                       </a:solidFill>
                       <a:prstDash val="solid"/>
                     </a:lnL>
                     <a:lnR w="9525" cap="flat" cmpd="sng" algn="ctr">
                       <a:solidFill>
-                        <a:srgbClr val="E4EBD6"/>
+                        <a:srgbClr val="EBF7D4"/>
                       </a:solidFill>
                       <a:prstDash val="solid"/>
                     </a:lnR>
                     <a:lnT w="9525" cap="flat" cmpd="sng" algn="ctr">
                       <a:solidFill>
-                        <a:srgbClr val="E4EBD6"/>
+                        <a:srgbClr val="EBF7D4"/>
                       </a:solidFill>
                       <a:prstDash val="solid"/>
                     </a:lnT>
                     <a:lnB w="9525" cap="flat" cmpd="sng" algn="ctr">
                       <a:solidFill>
-                        <a:srgbClr val="E4EBD6"/>
+                        <a:srgbClr val="EBF7D4"/>
                       </a:solidFill>
                       <a:prstDash val="solid"/>
                     </a:lnB>
                     <a:solidFill>
-                      <a:srgbClr val="F6F8F2"/>
+                      <a:srgbClr val="F9FCF3"/>
                     </a:solidFill>
                   </a:tcPr>
                 </a:tc>
@@ -5992,30 +5992,30 @@
                   <a:tcPr anchor="ctr" marL="73152" marR="73152">
                     <a:lnL w="9525" cap="flat" cmpd="sng" algn="ctr">
                       <a:solidFill>
-                        <a:srgbClr val="E4EBD6"/>
+                        <a:srgbClr val="EBF7D4"/>
                       </a:solidFill>
                       <a:prstDash val="solid"/>
                     </a:lnL>
                     <a:lnR w="9525" cap="flat" cmpd="sng" algn="ctr">
                       <a:solidFill>
-                        <a:srgbClr val="E4EBD6"/>
+                        <a:srgbClr val="EBF7D4"/>
                       </a:solidFill>
                       <a:prstDash val="solid"/>
                     </a:lnR>
                     <a:lnT w="9525" cap="flat" cmpd="sng" algn="ctr">
                       <a:solidFill>
-                        <a:srgbClr val="E4EBD6"/>
+                        <a:srgbClr val="EBF7D4"/>
                       </a:solidFill>
                       <a:prstDash val="solid"/>
                     </a:lnT>
                     <a:lnB w="9525" cap="flat" cmpd="sng" algn="ctr">
                       <a:solidFill>
-                        <a:srgbClr val="E4EBD6"/>
+                        <a:srgbClr val="EBF7D4"/>
                       </a:solidFill>
                       <a:prstDash val="solid"/>
                     </a:lnB>
                     <a:solidFill>
-                      <a:srgbClr val="F6F8F2"/>
+                      <a:srgbClr val="F9FCF3"/>
                     </a:solidFill>
                   </a:tcPr>
                 </a:tc>
@@ -6038,30 +6038,30 @@
                   <a:tcPr anchor="ctr" marL="73152" marR="73152">
                     <a:lnL w="9525" cap="flat" cmpd="sng" algn="ctr">
                       <a:solidFill>
-                        <a:srgbClr val="E4EBD6"/>
+                        <a:srgbClr val="EBF7D4"/>
                       </a:solidFill>
                       <a:prstDash val="solid"/>
                     </a:lnL>
                     <a:lnR w="9525" cap="flat" cmpd="sng" algn="ctr">
                       <a:solidFill>
-                        <a:srgbClr val="E4EBD6"/>
+                        <a:srgbClr val="EBF7D4"/>
                       </a:solidFill>
                       <a:prstDash val="solid"/>
                     </a:lnR>
                     <a:lnT w="9525" cap="flat" cmpd="sng" algn="ctr">
                       <a:solidFill>
-                        <a:srgbClr val="E4EBD6"/>
+                        <a:srgbClr val="EBF7D4"/>
                       </a:solidFill>
                       <a:prstDash val="solid"/>
                     </a:lnT>
                     <a:lnB w="9525" cap="flat" cmpd="sng" algn="ctr">
                       <a:solidFill>
-                        <a:srgbClr val="E4EBD6"/>
+                        <a:srgbClr val="EBF7D4"/>
                       </a:solidFill>
                       <a:prstDash val="solid"/>
                     </a:lnB>
                     <a:solidFill>
-                      <a:srgbClr val="F6F8F2"/>
+                      <a:srgbClr val="F9FCF3"/>
                     </a:solidFill>
                   </a:tcPr>
                 </a:tc>
@@ -6084,7 +6084,7 @@
     <p:bg>
       <p:bgPr>
         <a:solidFill>
-          <a:srgbClr val="F6F8F2"/>
+          <a:srgbClr val="F9FCF3"/>
         </a:solidFill>
         <a:effectLst/>
       </p:bgPr>
@@ -6111,7 +6111,7 @@
             <a:avLst/>
           </a:prstGeom>
           <a:solidFill>
-            <a:srgbClr val="E4EBD6"/>
+            <a:srgbClr val="EBF7D4"/>
           </a:solidFill>
           <a:ln>
             <a:noFill/>
@@ -6140,7 +6140,7 @@
             <a:avLst/>
           </a:prstGeom>
           <a:solidFill>
-            <a:srgbClr val="819852"/>
+            <a:srgbClr val="9DBF5A"/>
           </a:solidFill>
           <a:ln>
             <a:noFill/>
@@ -6184,7 +6184,7 @@
             <a:r>
               <a:rPr sz="3000" b="1" i="0">
                 <a:solidFill>
-                  <a:srgbClr val="49562E"/>
+                  <a:srgbClr val="526728"/>
                 </a:solidFill>
               </a:rPr>
               <a:t>보장 항목 체크</a:t>
@@ -6236,30 +6236,30 @@
                   <a:tcPr anchor="ctr" marL="73152" marR="73152">
                     <a:lnL w="9525" cap="flat" cmpd="sng" algn="ctr">
                       <a:solidFill>
-                        <a:srgbClr val="819852"/>
+                        <a:srgbClr val="9DBF5A"/>
                       </a:solidFill>
                       <a:prstDash val="solid"/>
                     </a:lnL>
                     <a:lnR w="9525" cap="flat" cmpd="sng" algn="ctr">
                       <a:solidFill>
-                        <a:srgbClr val="819852"/>
+                        <a:srgbClr val="9DBF5A"/>
                       </a:solidFill>
                       <a:prstDash val="solid"/>
                     </a:lnR>
                     <a:lnT w="9525" cap="flat" cmpd="sng" algn="ctr">
                       <a:solidFill>
-                        <a:srgbClr val="819852"/>
+                        <a:srgbClr val="9DBF5A"/>
                       </a:solidFill>
                       <a:prstDash val="solid"/>
                     </a:lnT>
                     <a:lnB w="9525" cap="flat" cmpd="sng" algn="ctr">
                       <a:solidFill>
-                        <a:srgbClr val="819852"/>
+                        <a:srgbClr val="9DBF5A"/>
                       </a:solidFill>
                       <a:prstDash val="solid"/>
                     </a:lnB>
                     <a:solidFill>
-                      <a:srgbClr val="819852"/>
+                      <a:srgbClr val="9DBF5A"/>
                     </a:solidFill>
                   </a:tcPr>
                 </a:tc>
@@ -6282,30 +6282,30 @@
                   <a:tcPr anchor="ctr" marL="73152" marR="73152">
                     <a:lnL w="9525" cap="flat" cmpd="sng" algn="ctr">
                       <a:solidFill>
-                        <a:srgbClr val="819852"/>
+                        <a:srgbClr val="9DBF5A"/>
                       </a:solidFill>
                       <a:prstDash val="solid"/>
                     </a:lnL>
                     <a:lnR w="9525" cap="flat" cmpd="sng" algn="ctr">
                       <a:solidFill>
-                        <a:srgbClr val="819852"/>
+                        <a:srgbClr val="9DBF5A"/>
                       </a:solidFill>
                       <a:prstDash val="solid"/>
                     </a:lnR>
                     <a:lnT w="9525" cap="flat" cmpd="sng" algn="ctr">
                       <a:solidFill>
-                        <a:srgbClr val="819852"/>
+                        <a:srgbClr val="9DBF5A"/>
                       </a:solidFill>
                       <a:prstDash val="solid"/>
                     </a:lnT>
                     <a:lnB w="9525" cap="flat" cmpd="sng" algn="ctr">
                       <a:solidFill>
-                        <a:srgbClr val="819852"/>
+                        <a:srgbClr val="9DBF5A"/>
                       </a:solidFill>
                       <a:prstDash val="solid"/>
                     </a:lnB>
                     <a:solidFill>
-                      <a:srgbClr val="819852"/>
+                      <a:srgbClr val="9DBF5A"/>
                     </a:solidFill>
                   </a:tcPr>
                 </a:tc>
@@ -6328,30 +6328,30 @@
                   <a:tcPr anchor="ctr" marL="73152" marR="73152">
                     <a:lnL w="9525" cap="flat" cmpd="sng" algn="ctr">
                       <a:solidFill>
-                        <a:srgbClr val="819852"/>
+                        <a:srgbClr val="9DBF5A"/>
                       </a:solidFill>
                       <a:prstDash val="solid"/>
                     </a:lnL>
                     <a:lnR w="9525" cap="flat" cmpd="sng" algn="ctr">
                       <a:solidFill>
-                        <a:srgbClr val="819852"/>
+                        <a:srgbClr val="9DBF5A"/>
                       </a:solidFill>
                       <a:prstDash val="solid"/>
                     </a:lnR>
                     <a:lnT w="9525" cap="flat" cmpd="sng" algn="ctr">
                       <a:solidFill>
-                        <a:srgbClr val="819852"/>
+                        <a:srgbClr val="9DBF5A"/>
                       </a:solidFill>
                       <a:prstDash val="solid"/>
                     </a:lnT>
                     <a:lnB w="9525" cap="flat" cmpd="sng" algn="ctr">
                       <a:solidFill>
-                        <a:srgbClr val="819852"/>
+                        <a:srgbClr val="9DBF5A"/>
                       </a:solidFill>
                       <a:prstDash val="solid"/>
                     </a:lnB>
                     <a:solidFill>
-                      <a:srgbClr val="819852"/>
+                      <a:srgbClr val="9DBF5A"/>
                     </a:solidFill>
                   </a:tcPr>
                 </a:tc>
@@ -6374,30 +6374,30 @@
                   <a:tcPr anchor="ctr" marL="73152" marR="73152">
                     <a:lnL w="9525" cap="flat" cmpd="sng" algn="ctr">
                       <a:solidFill>
-                        <a:srgbClr val="819852"/>
+                        <a:srgbClr val="9DBF5A"/>
                       </a:solidFill>
                       <a:prstDash val="solid"/>
                     </a:lnL>
                     <a:lnR w="9525" cap="flat" cmpd="sng" algn="ctr">
                       <a:solidFill>
-                        <a:srgbClr val="819852"/>
+                        <a:srgbClr val="9DBF5A"/>
                       </a:solidFill>
                       <a:prstDash val="solid"/>
                     </a:lnR>
                     <a:lnT w="9525" cap="flat" cmpd="sng" algn="ctr">
                       <a:solidFill>
-                        <a:srgbClr val="819852"/>
+                        <a:srgbClr val="9DBF5A"/>
                       </a:solidFill>
                       <a:prstDash val="solid"/>
                     </a:lnT>
                     <a:lnB w="9525" cap="flat" cmpd="sng" algn="ctr">
                       <a:solidFill>
-                        <a:srgbClr val="819852"/>
+                        <a:srgbClr val="9DBF5A"/>
                       </a:solidFill>
                       <a:prstDash val="solid"/>
                     </a:lnB>
                     <a:solidFill>
-                      <a:srgbClr val="819852"/>
+                      <a:srgbClr val="9DBF5A"/>
                     </a:solidFill>
                   </a:tcPr>
                 </a:tc>
@@ -6412,7 +6412,7 @@
                       <a:r>
                         <a:rPr sz="1400" b="1">
                           <a:solidFill>
-                            <a:srgbClr val="49562E"/>
+                            <a:srgbClr val="526728"/>
                           </a:solidFill>
                         </a:rPr>
                         <a:t>사망·재해</a:t>
@@ -6422,30 +6422,30 @@
                   <a:tcPr anchor="ctr" marL="73152" marR="73152">
                     <a:lnL w="9525" cap="flat" cmpd="sng" algn="ctr">
                       <a:solidFill>
-                        <a:srgbClr val="E4EBD6"/>
+                        <a:srgbClr val="EBF7D4"/>
                       </a:solidFill>
                       <a:prstDash val="solid"/>
                     </a:lnL>
                     <a:lnR w="9525" cap="flat" cmpd="sng" algn="ctr">
                       <a:solidFill>
-                        <a:srgbClr val="E4EBD6"/>
+                        <a:srgbClr val="EBF7D4"/>
                       </a:solidFill>
                       <a:prstDash val="solid"/>
                     </a:lnR>
                     <a:lnT w="9525" cap="flat" cmpd="sng" algn="ctr">
                       <a:solidFill>
-                        <a:srgbClr val="E4EBD6"/>
+                        <a:srgbClr val="EBF7D4"/>
                       </a:solidFill>
                       <a:prstDash val="solid"/>
                     </a:lnT>
                     <a:lnB w="9525" cap="flat" cmpd="sng" algn="ctr">
                       <a:solidFill>
-                        <a:srgbClr val="E4EBD6"/>
+                        <a:srgbClr val="EBF7D4"/>
                       </a:solidFill>
                       <a:prstDash val="solid"/>
                     </a:lnB>
                     <a:solidFill>
-                      <a:srgbClr val="E4EBD6"/>
+                      <a:srgbClr val="EBF7D4"/>
                     </a:solidFill>
                   </a:tcPr>
                 </a:tc>
@@ -6468,25 +6468,25 @@
                   <a:tcPr anchor="ctr" marL="73152" marR="73152">
                     <a:lnL w="9525" cap="flat" cmpd="sng" algn="ctr">
                       <a:solidFill>
-                        <a:srgbClr val="E4EBD6"/>
+                        <a:srgbClr val="EBF7D4"/>
                       </a:solidFill>
                       <a:prstDash val="solid"/>
                     </a:lnL>
                     <a:lnR w="9525" cap="flat" cmpd="sng" algn="ctr">
                       <a:solidFill>
-                        <a:srgbClr val="E4EBD6"/>
+                        <a:srgbClr val="EBF7D4"/>
                       </a:solidFill>
                       <a:prstDash val="solid"/>
                     </a:lnR>
                     <a:lnT w="9525" cap="flat" cmpd="sng" algn="ctr">
                       <a:solidFill>
-                        <a:srgbClr val="E4EBD6"/>
+                        <a:srgbClr val="EBF7D4"/>
                       </a:solidFill>
                       <a:prstDash val="solid"/>
                     </a:lnT>
                     <a:lnB w="9525" cap="flat" cmpd="sng" algn="ctr">
                       <a:solidFill>
-                        <a:srgbClr val="E4EBD6"/>
+                        <a:srgbClr val="EBF7D4"/>
                       </a:solidFill>
                       <a:prstDash val="solid"/>
                     </a:lnB>
@@ -6514,25 +6514,25 @@
                   <a:tcPr anchor="ctr" marL="73152" marR="73152">
                     <a:lnL w="9525" cap="flat" cmpd="sng" algn="ctr">
                       <a:solidFill>
-                        <a:srgbClr val="E4EBD6"/>
+                        <a:srgbClr val="EBF7D4"/>
                       </a:solidFill>
                       <a:prstDash val="solid"/>
                     </a:lnL>
                     <a:lnR w="9525" cap="flat" cmpd="sng" algn="ctr">
                       <a:solidFill>
-                        <a:srgbClr val="E4EBD6"/>
+                        <a:srgbClr val="EBF7D4"/>
                       </a:solidFill>
                       <a:prstDash val="solid"/>
                     </a:lnR>
                     <a:lnT w="9525" cap="flat" cmpd="sng" algn="ctr">
                       <a:solidFill>
-                        <a:srgbClr val="E4EBD6"/>
+                        <a:srgbClr val="EBF7D4"/>
                       </a:solidFill>
                       <a:prstDash val="solid"/>
                     </a:lnT>
                     <a:lnB w="9525" cap="flat" cmpd="sng" algn="ctr">
                       <a:solidFill>
-                        <a:srgbClr val="E4EBD6"/>
+                        <a:srgbClr val="EBF7D4"/>
                       </a:solidFill>
                       <a:prstDash val="solid"/>
                     </a:lnB>
@@ -6560,25 +6560,25 @@
                   <a:tcPr anchor="ctr" marL="73152" marR="73152">
                     <a:lnL w="9525" cap="flat" cmpd="sng" algn="ctr">
                       <a:solidFill>
-                        <a:srgbClr val="E4EBD6"/>
+                        <a:srgbClr val="EBF7D4"/>
                       </a:solidFill>
                       <a:prstDash val="solid"/>
                     </a:lnL>
                     <a:lnR w="9525" cap="flat" cmpd="sng" algn="ctr">
                       <a:solidFill>
-                        <a:srgbClr val="E4EBD6"/>
+                        <a:srgbClr val="EBF7D4"/>
                       </a:solidFill>
                       <a:prstDash val="solid"/>
                     </a:lnR>
                     <a:lnT w="9525" cap="flat" cmpd="sng" algn="ctr">
                       <a:solidFill>
-                        <a:srgbClr val="E4EBD6"/>
+                        <a:srgbClr val="EBF7D4"/>
                       </a:solidFill>
                       <a:prstDash val="solid"/>
                     </a:lnT>
                     <a:lnB w="9525" cap="flat" cmpd="sng" algn="ctr">
                       <a:solidFill>
-                        <a:srgbClr val="E4EBD6"/>
+                        <a:srgbClr val="EBF7D4"/>
                       </a:solidFill>
                       <a:prstDash val="solid"/>
                     </a:lnB>
@@ -6598,7 +6598,7 @@
                       <a:r>
                         <a:rPr sz="1400" b="1">
                           <a:solidFill>
-                            <a:srgbClr val="49562E"/>
+                            <a:srgbClr val="526728"/>
                           </a:solidFill>
                         </a:rPr>
                         <a:t>질병 진단</a:t>
@@ -6608,30 +6608,30 @@
                   <a:tcPr anchor="ctr" marL="73152" marR="73152">
                     <a:lnL w="9525" cap="flat" cmpd="sng" algn="ctr">
                       <a:solidFill>
-                        <a:srgbClr val="E4EBD6"/>
+                        <a:srgbClr val="EBF7D4"/>
                       </a:solidFill>
                       <a:prstDash val="solid"/>
                     </a:lnL>
                     <a:lnR w="9525" cap="flat" cmpd="sng" algn="ctr">
                       <a:solidFill>
-                        <a:srgbClr val="E4EBD6"/>
+                        <a:srgbClr val="EBF7D4"/>
                       </a:solidFill>
                       <a:prstDash val="solid"/>
                     </a:lnR>
                     <a:lnT w="9525" cap="flat" cmpd="sng" algn="ctr">
                       <a:solidFill>
-                        <a:srgbClr val="E4EBD6"/>
+                        <a:srgbClr val="EBF7D4"/>
                       </a:solidFill>
                       <a:prstDash val="solid"/>
                     </a:lnT>
                     <a:lnB w="9525" cap="flat" cmpd="sng" algn="ctr">
                       <a:solidFill>
-                        <a:srgbClr val="E4EBD6"/>
+                        <a:srgbClr val="EBF7D4"/>
                       </a:solidFill>
                       <a:prstDash val="solid"/>
                     </a:lnB>
                     <a:solidFill>
-                      <a:srgbClr val="E4EBD6"/>
+                      <a:srgbClr val="EBF7D4"/>
                     </a:solidFill>
                   </a:tcPr>
                 </a:tc>
@@ -6654,30 +6654,30 @@
                   <a:tcPr anchor="ctr" marL="73152" marR="73152">
                     <a:lnL w="9525" cap="flat" cmpd="sng" algn="ctr">
                       <a:solidFill>
-                        <a:srgbClr val="E4EBD6"/>
+                        <a:srgbClr val="EBF7D4"/>
                       </a:solidFill>
                       <a:prstDash val="solid"/>
                     </a:lnL>
                     <a:lnR w="9525" cap="flat" cmpd="sng" algn="ctr">
                       <a:solidFill>
-                        <a:srgbClr val="E4EBD6"/>
+                        <a:srgbClr val="EBF7D4"/>
                       </a:solidFill>
                       <a:prstDash val="solid"/>
                     </a:lnR>
                     <a:lnT w="9525" cap="flat" cmpd="sng" algn="ctr">
                       <a:solidFill>
-                        <a:srgbClr val="E4EBD6"/>
+                        <a:srgbClr val="EBF7D4"/>
                       </a:solidFill>
                       <a:prstDash val="solid"/>
                     </a:lnT>
                     <a:lnB w="9525" cap="flat" cmpd="sng" algn="ctr">
                       <a:solidFill>
-                        <a:srgbClr val="E4EBD6"/>
+                        <a:srgbClr val="EBF7D4"/>
                       </a:solidFill>
                       <a:prstDash val="solid"/>
                     </a:lnB>
                     <a:solidFill>
-                      <a:srgbClr val="F6F8F2"/>
+                      <a:srgbClr val="F9FCF3"/>
                     </a:solidFill>
                   </a:tcPr>
                 </a:tc>
@@ -6700,30 +6700,30 @@
                   <a:tcPr anchor="ctr" marL="73152" marR="73152">
                     <a:lnL w="9525" cap="flat" cmpd="sng" algn="ctr">
                       <a:solidFill>
-                        <a:srgbClr val="E4EBD6"/>
+                        <a:srgbClr val="EBF7D4"/>
                       </a:solidFill>
                       <a:prstDash val="solid"/>
                     </a:lnL>
                     <a:lnR w="9525" cap="flat" cmpd="sng" algn="ctr">
                       <a:solidFill>
-                        <a:srgbClr val="E4EBD6"/>
+                        <a:srgbClr val="EBF7D4"/>
                       </a:solidFill>
                       <a:prstDash val="solid"/>
                     </a:lnR>
                     <a:lnT w="9525" cap="flat" cmpd="sng" algn="ctr">
                       <a:solidFill>
-                        <a:srgbClr val="E4EBD6"/>
+                        <a:srgbClr val="EBF7D4"/>
                       </a:solidFill>
                       <a:prstDash val="solid"/>
                     </a:lnT>
                     <a:lnB w="9525" cap="flat" cmpd="sng" algn="ctr">
                       <a:solidFill>
-                        <a:srgbClr val="E4EBD6"/>
+                        <a:srgbClr val="EBF7D4"/>
                       </a:solidFill>
                       <a:prstDash val="solid"/>
                     </a:lnB>
                     <a:solidFill>
-                      <a:srgbClr val="F6F8F2"/>
+                      <a:srgbClr val="F9FCF3"/>
                     </a:solidFill>
                   </a:tcPr>
                 </a:tc>
@@ -6746,30 +6746,30 @@
                   <a:tcPr anchor="ctr" marL="73152" marR="73152">
                     <a:lnL w="9525" cap="flat" cmpd="sng" algn="ctr">
                       <a:solidFill>
-                        <a:srgbClr val="E4EBD6"/>
+                        <a:srgbClr val="EBF7D4"/>
                       </a:solidFill>
                       <a:prstDash val="solid"/>
                     </a:lnL>
                     <a:lnR w="9525" cap="flat" cmpd="sng" algn="ctr">
                       <a:solidFill>
-                        <a:srgbClr val="E4EBD6"/>
+                        <a:srgbClr val="EBF7D4"/>
                       </a:solidFill>
                       <a:prstDash val="solid"/>
                     </a:lnR>
                     <a:lnT w="9525" cap="flat" cmpd="sng" algn="ctr">
                       <a:solidFill>
-                        <a:srgbClr val="E4EBD6"/>
+                        <a:srgbClr val="EBF7D4"/>
                       </a:solidFill>
                       <a:prstDash val="solid"/>
                     </a:lnT>
                     <a:lnB w="9525" cap="flat" cmpd="sng" algn="ctr">
                       <a:solidFill>
-                        <a:srgbClr val="E4EBD6"/>
+                        <a:srgbClr val="EBF7D4"/>
                       </a:solidFill>
                       <a:prstDash val="solid"/>
                     </a:lnB>
                     <a:solidFill>
-                      <a:srgbClr val="F6F8F2"/>
+                      <a:srgbClr val="F9FCF3"/>
                     </a:solidFill>
                   </a:tcPr>
                 </a:tc>
@@ -6784,7 +6784,7 @@
                       <a:r>
                         <a:rPr sz="1400" b="1">
                           <a:solidFill>
-                            <a:srgbClr val="49562E"/>
+                            <a:srgbClr val="526728"/>
                           </a:solidFill>
                         </a:rPr>
                         <a:t>암</a:t>
@@ -6794,30 +6794,30 @@
                   <a:tcPr anchor="ctr" marL="73152" marR="73152">
                     <a:lnL w="9525" cap="flat" cmpd="sng" algn="ctr">
                       <a:solidFill>
-                        <a:srgbClr val="E4EBD6"/>
+                        <a:srgbClr val="EBF7D4"/>
                       </a:solidFill>
                       <a:prstDash val="solid"/>
                     </a:lnL>
                     <a:lnR w="9525" cap="flat" cmpd="sng" algn="ctr">
                       <a:solidFill>
-                        <a:srgbClr val="E4EBD6"/>
+                        <a:srgbClr val="EBF7D4"/>
                       </a:solidFill>
                       <a:prstDash val="solid"/>
                     </a:lnR>
                     <a:lnT w="9525" cap="flat" cmpd="sng" algn="ctr">
                       <a:solidFill>
-                        <a:srgbClr val="E4EBD6"/>
+                        <a:srgbClr val="EBF7D4"/>
                       </a:solidFill>
                       <a:prstDash val="solid"/>
                     </a:lnT>
                     <a:lnB w="9525" cap="flat" cmpd="sng" algn="ctr">
                       <a:solidFill>
-                        <a:srgbClr val="E4EBD6"/>
+                        <a:srgbClr val="EBF7D4"/>
                       </a:solidFill>
                       <a:prstDash val="solid"/>
                     </a:lnB>
                     <a:solidFill>
-                      <a:srgbClr val="E4EBD6"/>
+                      <a:srgbClr val="EBF7D4"/>
                     </a:solidFill>
                   </a:tcPr>
                 </a:tc>
@@ -6840,25 +6840,25 @@
                   <a:tcPr anchor="ctr" marL="73152" marR="73152">
                     <a:lnL w="9525" cap="flat" cmpd="sng" algn="ctr">
                       <a:solidFill>
-                        <a:srgbClr val="E4EBD6"/>
+                        <a:srgbClr val="EBF7D4"/>
                       </a:solidFill>
                       <a:prstDash val="solid"/>
                     </a:lnL>
                     <a:lnR w="9525" cap="flat" cmpd="sng" algn="ctr">
                       <a:solidFill>
-                        <a:srgbClr val="E4EBD6"/>
+                        <a:srgbClr val="EBF7D4"/>
                       </a:solidFill>
                       <a:prstDash val="solid"/>
                     </a:lnR>
                     <a:lnT w="9525" cap="flat" cmpd="sng" algn="ctr">
                       <a:solidFill>
-                        <a:srgbClr val="E4EBD6"/>
+                        <a:srgbClr val="EBF7D4"/>
                       </a:solidFill>
                       <a:prstDash val="solid"/>
                     </a:lnT>
                     <a:lnB w="9525" cap="flat" cmpd="sng" algn="ctr">
                       <a:solidFill>
-                        <a:srgbClr val="E4EBD6"/>
+                        <a:srgbClr val="EBF7D4"/>
                       </a:solidFill>
                       <a:prstDash val="solid"/>
                     </a:lnB>
@@ -6886,25 +6886,25 @@
                   <a:tcPr anchor="ctr" marL="73152" marR="73152">
                     <a:lnL w="9525" cap="flat" cmpd="sng" algn="ctr">
                       <a:solidFill>
-                        <a:srgbClr val="E4EBD6"/>
+                        <a:srgbClr val="EBF7D4"/>
                       </a:solidFill>
                       <a:prstDash val="solid"/>
                     </a:lnL>
                     <a:lnR w="9525" cap="flat" cmpd="sng" algn="ctr">
                       <a:solidFill>
-                        <a:srgbClr val="E4EBD6"/>
+                        <a:srgbClr val="EBF7D4"/>
                       </a:solidFill>
                       <a:prstDash val="solid"/>
                     </a:lnR>
                     <a:lnT w="9525" cap="flat" cmpd="sng" algn="ctr">
                       <a:solidFill>
-                        <a:srgbClr val="E4EBD6"/>
+                        <a:srgbClr val="EBF7D4"/>
                       </a:solidFill>
                       <a:prstDash val="solid"/>
                     </a:lnT>
                     <a:lnB w="9525" cap="flat" cmpd="sng" algn="ctr">
                       <a:solidFill>
-                        <a:srgbClr val="E4EBD6"/>
+                        <a:srgbClr val="EBF7D4"/>
                       </a:solidFill>
                       <a:prstDash val="solid"/>
                     </a:lnB>
@@ -6932,25 +6932,25 @@
                   <a:tcPr anchor="ctr" marL="73152" marR="73152">
                     <a:lnL w="9525" cap="flat" cmpd="sng" algn="ctr">
                       <a:solidFill>
-                        <a:srgbClr val="E4EBD6"/>
+                        <a:srgbClr val="EBF7D4"/>
                       </a:solidFill>
                       <a:prstDash val="solid"/>
                     </a:lnL>
                     <a:lnR w="9525" cap="flat" cmpd="sng" algn="ctr">
                       <a:solidFill>
-                        <a:srgbClr val="E4EBD6"/>
+                        <a:srgbClr val="EBF7D4"/>
                       </a:solidFill>
                       <a:prstDash val="solid"/>
                     </a:lnR>
                     <a:lnT w="9525" cap="flat" cmpd="sng" algn="ctr">
                       <a:solidFill>
-                        <a:srgbClr val="E4EBD6"/>
+                        <a:srgbClr val="EBF7D4"/>
                       </a:solidFill>
                       <a:prstDash val="solid"/>
                     </a:lnT>
                     <a:lnB w="9525" cap="flat" cmpd="sng" algn="ctr">
                       <a:solidFill>
-                        <a:srgbClr val="E4EBD6"/>
+                        <a:srgbClr val="EBF7D4"/>
                       </a:solidFill>
                       <a:prstDash val="solid"/>
                     </a:lnB>
@@ -6970,7 +6970,7 @@
                       <a:r>
                         <a:rPr sz="1400" b="1">
                           <a:solidFill>
-                            <a:srgbClr val="49562E"/>
+                            <a:srgbClr val="526728"/>
                           </a:solidFill>
                         </a:rPr>
                         <a:t>뇌·심장</a:t>
@@ -6980,30 +6980,30 @@
                   <a:tcPr anchor="ctr" marL="73152" marR="73152">
                     <a:lnL w="9525" cap="flat" cmpd="sng" algn="ctr">
                       <a:solidFill>
-                        <a:srgbClr val="E4EBD6"/>
+                        <a:srgbClr val="EBF7D4"/>
                       </a:solidFill>
                       <a:prstDash val="solid"/>
                     </a:lnL>
                     <a:lnR w="9525" cap="flat" cmpd="sng" algn="ctr">
                       <a:solidFill>
-                        <a:srgbClr val="E4EBD6"/>
+                        <a:srgbClr val="EBF7D4"/>
                       </a:solidFill>
                       <a:prstDash val="solid"/>
                     </a:lnR>
                     <a:lnT w="9525" cap="flat" cmpd="sng" algn="ctr">
                       <a:solidFill>
-                        <a:srgbClr val="E4EBD6"/>
+                        <a:srgbClr val="EBF7D4"/>
                       </a:solidFill>
                       <a:prstDash val="solid"/>
                     </a:lnT>
                     <a:lnB w="9525" cap="flat" cmpd="sng" algn="ctr">
                       <a:solidFill>
-                        <a:srgbClr val="E4EBD6"/>
+                        <a:srgbClr val="EBF7D4"/>
                       </a:solidFill>
                       <a:prstDash val="solid"/>
                     </a:lnB>
                     <a:solidFill>
-                      <a:srgbClr val="E4EBD6"/>
+                      <a:srgbClr val="EBF7D4"/>
                     </a:solidFill>
                   </a:tcPr>
                 </a:tc>
@@ -7026,30 +7026,30 @@
                   <a:tcPr anchor="ctr" marL="73152" marR="73152">
                     <a:lnL w="9525" cap="flat" cmpd="sng" algn="ctr">
                       <a:solidFill>
-                        <a:srgbClr val="E4EBD6"/>
+                        <a:srgbClr val="EBF7D4"/>
                       </a:solidFill>
                       <a:prstDash val="solid"/>
                     </a:lnL>
                     <a:lnR w="9525" cap="flat" cmpd="sng" algn="ctr">
                       <a:solidFill>
-                        <a:srgbClr val="E4EBD6"/>
+                        <a:srgbClr val="EBF7D4"/>
                       </a:solidFill>
                       <a:prstDash val="solid"/>
                     </a:lnR>
                     <a:lnT w="9525" cap="flat" cmpd="sng" algn="ctr">
                       <a:solidFill>
-                        <a:srgbClr val="E4EBD6"/>
+                        <a:srgbClr val="EBF7D4"/>
                       </a:solidFill>
                       <a:prstDash val="solid"/>
                     </a:lnT>
                     <a:lnB w="9525" cap="flat" cmpd="sng" algn="ctr">
                       <a:solidFill>
-                        <a:srgbClr val="E4EBD6"/>
+                        <a:srgbClr val="EBF7D4"/>
                       </a:solidFill>
                       <a:prstDash val="solid"/>
                     </a:lnB>
                     <a:solidFill>
-                      <a:srgbClr val="F6F8F2"/>
+                      <a:srgbClr val="F9FCF3"/>
                     </a:solidFill>
                   </a:tcPr>
                 </a:tc>
@@ -7072,30 +7072,30 @@
                   <a:tcPr anchor="ctr" marL="73152" marR="73152">
                     <a:lnL w="9525" cap="flat" cmpd="sng" algn="ctr">
                       <a:solidFill>
-                        <a:srgbClr val="E4EBD6"/>
+                        <a:srgbClr val="EBF7D4"/>
                       </a:solidFill>
                       <a:prstDash val="solid"/>
                     </a:lnL>
                     <a:lnR w="9525" cap="flat" cmpd="sng" algn="ctr">
                       <a:solidFill>
-                        <a:srgbClr val="E4EBD6"/>
+                        <a:srgbClr val="EBF7D4"/>
                       </a:solidFill>
                       <a:prstDash val="solid"/>
                     </a:lnR>
                     <a:lnT w="9525" cap="flat" cmpd="sng" algn="ctr">
                       <a:solidFill>
-                        <a:srgbClr val="E4EBD6"/>
+                        <a:srgbClr val="EBF7D4"/>
                       </a:solidFill>
                       <a:prstDash val="solid"/>
                     </a:lnT>
                     <a:lnB w="9525" cap="flat" cmpd="sng" algn="ctr">
                       <a:solidFill>
-                        <a:srgbClr val="E4EBD6"/>
+                        <a:srgbClr val="EBF7D4"/>
                       </a:solidFill>
                       <a:prstDash val="solid"/>
                     </a:lnB>
                     <a:solidFill>
-                      <a:srgbClr val="F6F8F2"/>
+                      <a:srgbClr val="F9FCF3"/>
                     </a:solidFill>
                   </a:tcPr>
                 </a:tc>
@@ -7118,30 +7118,30 @@
                   <a:tcPr anchor="ctr" marL="73152" marR="73152">
                     <a:lnL w="9525" cap="flat" cmpd="sng" algn="ctr">
                       <a:solidFill>
-                        <a:srgbClr val="E4EBD6"/>
+                        <a:srgbClr val="EBF7D4"/>
                       </a:solidFill>
                       <a:prstDash val="solid"/>
                     </a:lnL>
                     <a:lnR w="9525" cap="flat" cmpd="sng" algn="ctr">
                       <a:solidFill>
-                        <a:srgbClr val="E4EBD6"/>
+                        <a:srgbClr val="EBF7D4"/>
                       </a:solidFill>
                       <a:prstDash val="solid"/>
                     </a:lnR>
                     <a:lnT w="9525" cap="flat" cmpd="sng" algn="ctr">
                       <a:solidFill>
-                        <a:srgbClr val="E4EBD6"/>
+                        <a:srgbClr val="EBF7D4"/>
                       </a:solidFill>
                       <a:prstDash val="solid"/>
                     </a:lnT>
                     <a:lnB w="9525" cap="flat" cmpd="sng" algn="ctr">
                       <a:solidFill>
-                        <a:srgbClr val="E4EBD6"/>
+                        <a:srgbClr val="EBF7D4"/>
                       </a:solidFill>
                       <a:prstDash val="solid"/>
                     </a:lnB>
                     <a:solidFill>
-                      <a:srgbClr val="F6F8F2"/>
+                      <a:srgbClr val="F9FCF3"/>
                     </a:solidFill>
                   </a:tcPr>
                 </a:tc>
@@ -7156,7 +7156,7 @@
                       <a:r>
                         <a:rPr sz="1400" b="1">
                           <a:solidFill>
-                            <a:srgbClr val="49562E"/>
+                            <a:srgbClr val="526728"/>
                           </a:solidFill>
                         </a:rPr>
                         <a:t>입원·수술</a:t>
@@ -7166,30 +7166,30 @@
                   <a:tcPr anchor="ctr" marL="73152" marR="73152">
                     <a:lnL w="9525" cap="flat" cmpd="sng" algn="ctr">
                       <a:solidFill>
-                        <a:srgbClr val="E4EBD6"/>
+                        <a:srgbClr val="EBF7D4"/>
                       </a:solidFill>
                       <a:prstDash val="solid"/>
                     </a:lnL>
                     <a:lnR w="9525" cap="flat" cmpd="sng" algn="ctr">
                       <a:solidFill>
-                        <a:srgbClr val="E4EBD6"/>
+                        <a:srgbClr val="EBF7D4"/>
                       </a:solidFill>
                       <a:prstDash val="solid"/>
                     </a:lnR>
                     <a:lnT w="9525" cap="flat" cmpd="sng" algn="ctr">
                       <a:solidFill>
-                        <a:srgbClr val="E4EBD6"/>
+                        <a:srgbClr val="EBF7D4"/>
                       </a:solidFill>
                       <a:prstDash val="solid"/>
                     </a:lnT>
                     <a:lnB w="9525" cap="flat" cmpd="sng" algn="ctr">
                       <a:solidFill>
-                        <a:srgbClr val="E4EBD6"/>
+                        <a:srgbClr val="EBF7D4"/>
                       </a:solidFill>
                       <a:prstDash val="solid"/>
                     </a:lnB>
                     <a:solidFill>
-                      <a:srgbClr val="E4EBD6"/>
+                      <a:srgbClr val="EBF7D4"/>
                     </a:solidFill>
                   </a:tcPr>
                 </a:tc>
@@ -7212,25 +7212,25 @@
                   <a:tcPr anchor="ctr" marL="73152" marR="73152">
                     <a:lnL w="9525" cap="flat" cmpd="sng" algn="ctr">
                       <a:solidFill>
-                        <a:srgbClr val="E4EBD6"/>
+                        <a:srgbClr val="EBF7D4"/>
                       </a:solidFill>
                       <a:prstDash val="solid"/>
                     </a:lnL>
                     <a:lnR w="9525" cap="flat" cmpd="sng" algn="ctr">
                       <a:solidFill>
-                        <a:srgbClr val="E4EBD6"/>
+                        <a:srgbClr val="EBF7D4"/>
                       </a:solidFill>
                       <a:prstDash val="solid"/>
                     </a:lnR>
                     <a:lnT w="9525" cap="flat" cmpd="sng" algn="ctr">
                       <a:solidFill>
-                        <a:srgbClr val="E4EBD6"/>
+                        <a:srgbClr val="EBF7D4"/>
                       </a:solidFill>
                       <a:prstDash val="solid"/>
                     </a:lnT>
                     <a:lnB w="9525" cap="flat" cmpd="sng" algn="ctr">
                       <a:solidFill>
-                        <a:srgbClr val="E4EBD6"/>
+                        <a:srgbClr val="EBF7D4"/>
                       </a:solidFill>
                       <a:prstDash val="solid"/>
                     </a:lnB>
@@ -7258,25 +7258,25 @@
                   <a:tcPr anchor="ctr" marL="73152" marR="73152">
                     <a:lnL w="9525" cap="flat" cmpd="sng" algn="ctr">
                       <a:solidFill>
-                        <a:srgbClr val="E4EBD6"/>
+                        <a:srgbClr val="EBF7D4"/>
                       </a:solidFill>
                       <a:prstDash val="solid"/>
                     </a:lnL>
                     <a:lnR w="9525" cap="flat" cmpd="sng" algn="ctr">
                       <a:solidFill>
-                        <a:srgbClr val="E4EBD6"/>
+                        <a:srgbClr val="EBF7D4"/>
                       </a:solidFill>
                       <a:prstDash val="solid"/>
                     </a:lnR>
                     <a:lnT w="9525" cap="flat" cmpd="sng" algn="ctr">
                       <a:solidFill>
-                        <a:srgbClr val="E4EBD6"/>
+                        <a:srgbClr val="EBF7D4"/>
                       </a:solidFill>
                       <a:prstDash val="solid"/>
                     </a:lnT>
                     <a:lnB w="9525" cap="flat" cmpd="sng" algn="ctr">
                       <a:solidFill>
-                        <a:srgbClr val="E4EBD6"/>
+                        <a:srgbClr val="EBF7D4"/>
                       </a:solidFill>
                       <a:prstDash val="solid"/>
                     </a:lnB>
@@ -7304,25 +7304,25 @@
                   <a:tcPr anchor="ctr" marL="73152" marR="73152">
                     <a:lnL w="9525" cap="flat" cmpd="sng" algn="ctr">
                       <a:solidFill>
-                        <a:srgbClr val="E4EBD6"/>
+                        <a:srgbClr val="EBF7D4"/>
                       </a:solidFill>
                       <a:prstDash val="solid"/>
                     </a:lnL>
                     <a:lnR w="9525" cap="flat" cmpd="sng" algn="ctr">
                       <a:solidFill>
-                        <a:srgbClr val="E4EBD6"/>
+                        <a:srgbClr val="EBF7D4"/>
                       </a:solidFill>
                       <a:prstDash val="solid"/>
                     </a:lnR>
                     <a:lnT w="9525" cap="flat" cmpd="sng" algn="ctr">
                       <a:solidFill>
-                        <a:srgbClr val="E4EBD6"/>
+                        <a:srgbClr val="EBF7D4"/>
                       </a:solidFill>
                       <a:prstDash val="solid"/>
                     </a:lnT>
                     <a:lnB w="9525" cap="flat" cmpd="sng" algn="ctr">
                       <a:solidFill>
-                        <a:srgbClr val="E4EBD6"/>
+                        <a:srgbClr val="EBF7D4"/>
                       </a:solidFill>
                       <a:prstDash val="solid"/>
                     </a:lnB>
@@ -7342,7 +7342,7 @@
                       <a:r>
                         <a:rPr sz="1400" b="1">
                           <a:solidFill>
-                            <a:srgbClr val="49562E"/>
+                            <a:srgbClr val="526728"/>
                           </a:solidFill>
                         </a:rPr>
                         <a:t>상해</a:t>
@@ -7352,30 +7352,30 @@
                   <a:tcPr anchor="ctr" marL="73152" marR="73152">
                     <a:lnL w="9525" cap="flat" cmpd="sng" algn="ctr">
                       <a:solidFill>
-                        <a:srgbClr val="E4EBD6"/>
+                        <a:srgbClr val="EBF7D4"/>
                       </a:solidFill>
                       <a:prstDash val="solid"/>
                     </a:lnL>
                     <a:lnR w="9525" cap="flat" cmpd="sng" algn="ctr">
                       <a:solidFill>
-                        <a:srgbClr val="E4EBD6"/>
+                        <a:srgbClr val="EBF7D4"/>
                       </a:solidFill>
                       <a:prstDash val="solid"/>
                     </a:lnR>
                     <a:lnT w="9525" cap="flat" cmpd="sng" algn="ctr">
                       <a:solidFill>
-                        <a:srgbClr val="E4EBD6"/>
+                        <a:srgbClr val="EBF7D4"/>
                       </a:solidFill>
                       <a:prstDash val="solid"/>
                     </a:lnT>
                     <a:lnB w="9525" cap="flat" cmpd="sng" algn="ctr">
                       <a:solidFill>
-                        <a:srgbClr val="E4EBD6"/>
+                        <a:srgbClr val="EBF7D4"/>
                       </a:solidFill>
                       <a:prstDash val="solid"/>
                     </a:lnB>
                     <a:solidFill>
-                      <a:srgbClr val="E4EBD6"/>
+                      <a:srgbClr val="EBF7D4"/>
                     </a:solidFill>
                   </a:tcPr>
                 </a:tc>
@@ -7398,30 +7398,30 @@
                   <a:tcPr anchor="ctr" marL="73152" marR="73152">
                     <a:lnL w="9525" cap="flat" cmpd="sng" algn="ctr">
                       <a:solidFill>
-                        <a:srgbClr val="E4EBD6"/>
+                        <a:srgbClr val="EBF7D4"/>
                       </a:solidFill>
                       <a:prstDash val="solid"/>
                     </a:lnL>
                     <a:lnR w="9525" cap="flat" cmpd="sng" algn="ctr">
                       <a:solidFill>
-                        <a:srgbClr val="E4EBD6"/>
+                        <a:srgbClr val="EBF7D4"/>
                       </a:solidFill>
                       <a:prstDash val="solid"/>
                     </a:lnR>
                     <a:lnT w="9525" cap="flat" cmpd="sng" algn="ctr">
                       <a:solidFill>
-                        <a:srgbClr val="E4EBD6"/>
+                        <a:srgbClr val="EBF7D4"/>
                       </a:solidFill>
                       <a:prstDash val="solid"/>
                     </a:lnT>
                     <a:lnB w="9525" cap="flat" cmpd="sng" algn="ctr">
                       <a:solidFill>
-                        <a:srgbClr val="E4EBD6"/>
+                        <a:srgbClr val="EBF7D4"/>
                       </a:solidFill>
                       <a:prstDash val="solid"/>
                     </a:lnB>
                     <a:solidFill>
-                      <a:srgbClr val="F6F8F2"/>
+                      <a:srgbClr val="F9FCF3"/>
                     </a:solidFill>
                   </a:tcPr>
                 </a:tc>
@@ -7444,30 +7444,30 @@
                   <a:tcPr anchor="ctr" marL="73152" marR="73152">
                     <a:lnL w="9525" cap="flat" cmpd="sng" algn="ctr">
                       <a:solidFill>
-                        <a:srgbClr val="E4EBD6"/>
+                        <a:srgbClr val="EBF7D4"/>
                       </a:solidFill>
                       <a:prstDash val="solid"/>
                     </a:lnL>
                     <a:lnR w="9525" cap="flat" cmpd="sng" algn="ctr">
                       <a:solidFill>
-                        <a:srgbClr val="E4EBD6"/>
+                        <a:srgbClr val="EBF7D4"/>
                       </a:solidFill>
                       <a:prstDash val="solid"/>
                     </a:lnR>
                     <a:lnT w="9525" cap="flat" cmpd="sng" algn="ctr">
                       <a:solidFill>
-                        <a:srgbClr val="E4EBD6"/>
+                        <a:srgbClr val="EBF7D4"/>
                       </a:solidFill>
                       <a:prstDash val="solid"/>
                     </a:lnT>
                     <a:lnB w="9525" cap="flat" cmpd="sng" algn="ctr">
                       <a:solidFill>
-                        <a:srgbClr val="E4EBD6"/>
+                        <a:srgbClr val="EBF7D4"/>
                       </a:solidFill>
                       <a:prstDash val="solid"/>
                     </a:lnB>
                     <a:solidFill>
-                      <a:srgbClr val="F6F8F2"/>
+                      <a:srgbClr val="F9FCF3"/>
                     </a:solidFill>
                   </a:tcPr>
                 </a:tc>
@@ -7490,30 +7490,30 @@
                   <a:tcPr anchor="ctr" marL="73152" marR="73152">
                     <a:lnL w="9525" cap="flat" cmpd="sng" algn="ctr">
                       <a:solidFill>
-                        <a:srgbClr val="E4EBD6"/>
+                        <a:srgbClr val="EBF7D4"/>
                       </a:solidFill>
                       <a:prstDash val="solid"/>
                     </a:lnL>
                     <a:lnR w="9525" cap="flat" cmpd="sng" algn="ctr">
                       <a:solidFill>
-                        <a:srgbClr val="E4EBD6"/>
+                        <a:srgbClr val="EBF7D4"/>
                       </a:solidFill>
                       <a:prstDash val="solid"/>
                     </a:lnR>
                     <a:lnT w="9525" cap="flat" cmpd="sng" algn="ctr">
                       <a:solidFill>
-                        <a:srgbClr val="E4EBD6"/>
+                        <a:srgbClr val="EBF7D4"/>
                       </a:solidFill>
                       <a:prstDash val="solid"/>
                     </a:lnT>
                     <a:lnB w="9525" cap="flat" cmpd="sng" algn="ctr">
                       <a:solidFill>
-                        <a:srgbClr val="E4EBD6"/>
+                        <a:srgbClr val="EBF7D4"/>
                       </a:solidFill>
                       <a:prstDash val="solid"/>
                     </a:lnB>
                     <a:solidFill>
-                      <a:srgbClr val="F6F8F2"/>
+                      <a:srgbClr val="F9FCF3"/>
                     </a:solidFill>
                   </a:tcPr>
                 </a:tc>
@@ -7528,7 +7528,7 @@
                       <a:r>
                         <a:rPr sz="1400" b="1">
                           <a:solidFill>
-                            <a:srgbClr val="49562E"/>
+                            <a:srgbClr val="526728"/>
                           </a:solidFill>
                         </a:rPr>
                         <a:t>실손의료</a:t>
@@ -7538,30 +7538,30 @@
                   <a:tcPr anchor="ctr" marL="73152" marR="73152">
                     <a:lnL w="9525" cap="flat" cmpd="sng" algn="ctr">
                       <a:solidFill>
-                        <a:srgbClr val="E4EBD6"/>
+                        <a:srgbClr val="EBF7D4"/>
                       </a:solidFill>
                       <a:prstDash val="solid"/>
                     </a:lnL>
                     <a:lnR w="9525" cap="flat" cmpd="sng" algn="ctr">
                       <a:solidFill>
-                        <a:srgbClr val="E4EBD6"/>
+                        <a:srgbClr val="EBF7D4"/>
                       </a:solidFill>
                       <a:prstDash val="solid"/>
                     </a:lnR>
                     <a:lnT w="9525" cap="flat" cmpd="sng" algn="ctr">
                       <a:solidFill>
-                        <a:srgbClr val="E4EBD6"/>
+                        <a:srgbClr val="EBF7D4"/>
                       </a:solidFill>
                       <a:prstDash val="solid"/>
                     </a:lnT>
                     <a:lnB w="9525" cap="flat" cmpd="sng" algn="ctr">
                       <a:solidFill>
-                        <a:srgbClr val="E4EBD6"/>
+                        <a:srgbClr val="EBF7D4"/>
                       </a:solidFill>
                       <a:prstDash val="solid"/>
                     </a:lnB>
                     <a:solidFill>
-                      <a:srgbClr val="E4EBD6"/>
+                      <a:srgbClr val="EBF7D4"/>
                     </a:solidFill>
                   </a:tcPr>
                 </a:tc>
@@ -7584,25 +7584,25 @@
                   <a:tcPr anchor="ctr" marL="73152" marR="73152">
                     <a:lnL w="9525" cap="flat" cmpd="sng" algn="ctr">
                       <a:solidFill>
-                        <a:srgbClr val="E4EBD6"/>
+                        <a:srgbClr val="EBF7D4"/>
                       </a:solidFill>
                       <a:prstDash val="solid"/>
                     </a:lnL>
                     <a:lnR w="9525" cap="flat" cmpd="sng" algn="ctr">
                       <a:solidFill>
-                        <a:srgbClr val="E4EBD6"/>
+                        <a:srgbClr val="EBF7D4"/>
                       </a:solidFill>
                       <a:prstDash val="solid"/>
                     </a:lnR>
                     <a:lnT w="9525" cap="flat" cmpd="sng" algn="ctr">
                       <a:solidFill>
-                        <a:srgbClr val="E4EBD6"/>
+                        <a:srgbClr val="EBF7D4"/>
                       </a:solidFill>
                       <a:prstDash val="solid"/>
                     </a:lnT>
                     <a:lnB w="9525" cap="flat" cmpd="sng" algn="ctr">
                       <a:solidFill>
-                        <a:srgbClr val="E4EBD6"/>
+                        <a:srgbClr val="EBF7D4"/>
                       </a:solidFill>
                       <a:prstDash val="solid"/>
                     </a:lnB>
@@ -7630,25 +7630,25 @@
                   <a:tcPr anchor="ctr" marL="73152" marR="73152">
                     <a:lnL w="9525" cap="flat" cmpd="sng" algn="ctr">
                       <a:solidFill>
-                        <a:srgbClr val="E4EBD6"/>
+                        <a:srgbClr val="EBF7D4"/>
                       </a:solidFill>
                       <a:prstDash val="solid"/>
                     </a:lnL>
                     <a:lnR w="9525" cap="flat" cmpd="sng" algn="ctr">
                       <a:solidFill>
-                        <a:srgbClr val="E4EBD6"/>
+                        <a:srgbClr val="EBF7D4"/>
                       </a:solidFill>
                       <a:prstDash val="solid"/>
                     </a:lnR>
                     <a:lnT w="9525" cap="flat" cmpd="sng" algn="ctr">
                       <a:solidFill>
-                        <a:srgbClr val="E4EBD6"/>
+                        <a:srgbClr val="EBF7D4"/>
                       </a:solidFill>
                       <a:prstDash val="solid"/>
                     </a:lnT>
                     <a:lnB w="9525" cap="flat" cmpd="sng" algn="ctr">
                       <a:solidFill>
-                        <a:srgbClr val="E4EBD6"/>
+                        <a:srgbClr val="EBF7D4"/>
                       </a:solidFill>
                       <a:prstDash val="solid"/>
                     </a:lnB>
@@ -7676,25 +7676,25 @@
                   <a:tcPr anchor="ctr" marL="73152" marR="73152">
                     <a:lnL w="9525" cap="flat" cmpd="sng" algn="ctr">
                       <a:solidFill>
-                        <a:srgbClr val="E4EBD6"/>
+                        <a:srgbClr val="EBF7D4"/>
                       </a:solidFill>
                       <a:prstDash val="solid"/>
                     </a:lnL>
                     <a:lnR w="9525" cap="flat" cmpd="sng" algn="ctr">
                       <a:solidFill>
-                        <a:srgbClr val="E4EBD6"/>
+                        <a:srgbClr val="EBF7D4"/>
                       </a:solidFill>
                       <a:prstDash val="solid"/>
                     </a:lnR>
                     <a:lnT w="9525" cap="flat" cmpd="sng" algn="ctr">
                       <a:solidFill>
-                        <a:srgbClr val="E4EBD6"/>
+                        <a:srgbClr val="EBF7D4"/>
                       </a:solidFill>
                       <a:prstDash val="solid"/>
                     </a:lnT>
                     <a:lnB w="9525" cap="flat" cmpd="sng" algn="ctr">
                       <a:solidFill>
-                        <a:srgbClr val="E4EBD6"/>
+                        <a:srgbClr val="EBF7D4"/>
                       </a:solidFill>
                       <a:prstDash val="solid"/>
                     </a:lnB>
@@ -7714,7 +7714,7 @@
                       <a:r>
                         <a:rPr sz="1400" b="1">
                           <a:solidFill>
-                            <a:srgbClr val="49562E"/>
+                            <a:srgbClr val="526728"/>
                           </a:solidFill>
                         </a:rPr>
                         <a:t>연금·노후자금</a:t>
@@ -7724,30 +7724,30 @@
                   <a:tcPr anchor="ctr" marL="73152" marR="73152">
                     <a:lnL w="9525" cap="flat" cmpd="sng" algn="ctr">
                       <a:solidFill>
-                        <a:srgbClr val="E4EBD6"/>
+                        <a:srgbClr val="EBF7D4"/>
                       </a:solidFill>
                       <a:prstDash val="solid"/>
                     </a:lnL>
                     <a:lnR w="9525" cap="flat" cmpd="sng" algn="ctr">
                       <a:solidFill>
-                        <a:srgbClr val="E4EBD6"/>
+                        <a:srgbClr val="EBF7D4"/>
                       </a:solidFill>
                       <a:prstDash val="solid"/>
                     </a:lnR>
                     <a:lnT w="9525" cap="flat" cmpd="sng" algn="ctr">
                       <a:solidFill>
-                        <a:srgbClr val="E4EBD6"/>
+                        <a:srgbClr val="EBF7D4"/>
                       </a:solidFill>
                       <a:prstDash val="solid"/>
                     </a:lnT>
                     <a:lnB w="9525" cap="flat" cmpd="sng" algn="ctr">
                       <a:solidFill>
-                        <a:srgbClr val="E4EBD6"/>
+                        <a:srgbClr val="EBF7D4"/>
                       </a:solidFill>
                       <a:prstDash val="solid"/>
                     </a:lnB>
                     <a:solidFill>
-                      <a:srgbClr val="E4EBD6"/>
+                      <a:srgbClr val="EBF7D4"/>
                     </a:solidFill>
                   </a:tcPr>
                 </a:tc>
@@ -7770,30 +7770,30 @@
                   <a:tcPr anchor="ctr" marL="73152" marR="73152">
                     <a:lnL w="9525" cap="flat" cmpd="sng" algn="ctr">
                       <a:solidFill>
-                        <a:srgbClr val="E4EBD6"/>
+                        <a:srgbClr val="EBF7D4"/>
                       </a:solidFill>
                       <a:prstDash val="solid"/>
                     </a:lnL>
                     <a:lnR w="9525" cap="flat" cmpd="sng" algn="ctr">
                       <a:solidFill>
-                        <a:srgbClr val="E4EBD6"/>
+                        <a:srgbClr val="EBF7D4"/>
                       </a:solidFill>
                       <a:prstDash val="solid"/>
                     </a:lnR>
                     <a:lnT w="9525" cap="flat" cmpd="sng" algn="ctr">
                       <a:solidFill>
-                        <a:srgbClr val="E4EBD6"/>
+                        <a:srgbClr val="EBF7D4"/>
                       </a:solidFill>
                       <a:prstDash val="solid"/>
                     </a:lnT>
                     <a:lnB w="9525" cap="flat" cmpd="sng" algn="ctr">
                       <a:solidFill>
-                        <a:srgbClr val="E4EBD6"/>
+                        <a:srgbClr val="EBF7D4"/>
                       </a:solidFill>
                       <a:prstDash val="solid"/>
                     </a:lnB>
                     <a:solidFill>
-                      <a:srgbClr val="F6F8F2"/>
+                      <a:srgbClr val="F9FCF3"/>
                     </a:solidFill>
                   </a:tcPr>
                 </a:tc>
@@ -7816,30 +7816,30 @@
                   <a:tcPr anchor="ctr" marL="73152" marR="73152">
                     <a:lnL w="9525" cap="flat" cmpd="sng" algn="ctr">
                       <a:solidFill>
-                        <a:srgbClr val="E4EBD6"/>
+                        <a:srgbClr val="EBF7D4"/>
                       </a:solidFill>
                       <a:prstDash val="solid"/>
                     </a:lnL>
                     <a:lnR w="9525" cap="flat" cmpd="sng" algn="ctr">
                       <a:solidFill>
-                        <a:srgbClr val="E4EBD6"/>
+                        <a:srgbClr val="EBF7D4"/>
                       </a:solidFill>
                       <a:prstDash val="solid"/>
                     </a:lnR>
                     <a:lnT w="9525" cap="flat" cmpd="sng" algn="ctr">
                       <a:solidFill>
-                        <a:srgbClr val="E4EBD6"/>
+                        <a:srgbClr val="EBF7D4"/>
                       </a:solidFill>
                       <a:prstDash val="solid"/>
                     </a:lnT>
                     <a:lnB w="9525" cap="flat" cmpd="sng" algn="ctr">
                       <a:solidFill>
-                        <a:srgbClr val="E4EBD6"/>
+                        <a:srgbClr val="EBF7D4"/>
                       </a:solidFill>
                       <a:prstDash val="solid"/>
                     </a:lnB>
                     <a:solidFill>
-                      <a:srgbClr val="F6F8F2"/>
+                      <a:srgbClr val="F9FCF3"/>
                     </a:solidFill>
                   </a:tcPr>
                 </a:tc>
@@ -7862,30 +7862,30 @@
                   <a:tcPr anchor="ctr" marL="73152" marR="73152">
                     <a:lnL w="9525" cap="flat" cmpd="sng" algn="ctr">
                       <a:solidFill>
-                        <a:srgbClr val="E4EBD6"/>
+                        <a:srgbClr val="EBF7D4"/>
                       </a:solidFill>
                       <a:prstDash val="solid"/>
                     </a:lnL>
                     <a:lnR w="9525" cap="flat" cmpd="sng" algn="ctr">
                       <a:solidFill>
-                        <a:srgbClr val="E4EBD6"/>
+                        <a:srgbClr val="EBF7D4"/>
                       </a:solidFill>
                       <a:prstDash val="solid"/>
                     </a:lnR>
                     <a:lnT w="9525" cap="flat" cmpd="sng" algn="ctr">
                       <a:solidFill>
-                        <a:srgbClr val="E4EBD6"/>
+                        <a:srgbClr val="EBF7D4"/>
                       </a:solidFill>
                       <a:prstDash val="solid"/>
                     </a:lnT>
                     <a:lnB w="9525" cap="flat" cmpd="sng" algn="ctr">
                       <a:solidFill>
-                        <a:srgbClr val="E4EBD6"/>
+                        <a:srgbClr val="EBF7D4"/>
                       </a:solidFill>
                       <a:prstDash val="solid"/>
                     </a:lnB>
                     <a:solidFill>
-                      <a:srgbClr val="F6F8F2"/>
+                      <a:srgbClr val="F9FCF3"/>
                     </a:solidFill>
                   </a:tcPr>
                 </a:tc>
@@ -7908,7 +7908,7 @@
     <p:bg>
       <p:bgPr>
         <a:solidFill>
-          <a:srgbClr val="F6F8F2"/>
+          <a:srgbClr val="F9FCF3"/>
         </a:solidFill>
         <a:effectLst/>
       </p:bgPr>
@@ -7935,7 +7935,7 @@
             <a:avLst/>
           </a:prstGeom>
           <a:solidFill>
-            <a:srgbClr val="E4EBD6"/>
+            <a:srgbClr val="EBF7D4"/>
           </a:solidFill>
           <a:ln>
             <a:noFill/>
@@ -7964,7 +7964,7 @@
             <a:avLst/>
           </a:prstGeom>
           <a:solidFill>
-            <a:srgbClr val="819852"/>
+            <a:srgbClr val="9DBF5A"/>
           </a:solidFill>
           <a:ln>
             <a:noFill/>
@@ -8008,7 +8008,7 @@
             <a:r>
               <a:rPr sz="3000" b="1" i="0">
                 <a:solidFill>
-                  <a:srgbClr val="49562E"/>
+                  <a:srgbClr val="526728"/>
                 </a:solidFill>
               </a:rPr>
               <a:t>월 보험료 한눈에</a:t>
@@ -8033,11 +8033,11 @@
             </a:avLst>
           </a:prstGeom>
           <a:solidFill>
-            <a:srgbClr val="F6F8F2"/>
+            <a:srgbClr val="F9FCF3"/>
           </a:solidFill>
           <a:ln w="15875">
             <a:solidFill>
-              <a:srgbClr val="E4EBD6"/>
+              <a:srgbClr val="EBF7D4"/>
             </a:solidFill>
           </a:ln>
         </p:spPr>
@@ -8064,7 +8064,7 @@
             <a:avLst/>
           </a:prstGeom>
           <a:solidFill>
-            <a:srgbClr val="819852"/>
+            <a:srgbClr val="9DBF5A"/>
           </a:solidFill>
           <a:ln>
             <a:noFill/>
@@ -8122,7 +8122,7 @@
             <a:r>
               <a:rPr sz="1700" b="1" i="0">
                 <a:solidFill>
-                  <a:srgbClr val="49562E"/>
+                  <a:srgbClr val="526728"/>
                 </a:solidFill>
               </a:rPr>
               <a:t>월 보험료 합계</a:t>
@@ -8185,11 +8185,11 @@
             </a:avLst>
           </a:prstGeom>
           <a:solidFill>
-            <a:srgbClr val="F6F8F2"/>
+            <a:srgbClr val="F9FCF3"/>
           </a:solidFill>
           <a:ln w="15875">
             <a:solidFill>
-              <a:srgbClr val="E4EBD6"/>
+              <a:srgbClr val="EBF7D4"/>
             </a:solidFill>
           </a:ln>
         </p:spPr>
@@ -8216,7 +8216,7 @@
             <a:avLst/>
           </a:prstGeom>
           <a:solidFill>
-            <a:srgbClr val="819852"/>
+            <a:srgbClr val="9DBF5A"/>
           </a:solidFill>
           <a:ln>
             <a:noFill/>
@@ -8274,7 +8274,7 @@
             <a:r>
               <a:rPr sz="1700" b="1" i="0">
                 <a:solidFill>
-                  <a:srgbClr val="49562E"/>
+                  <a:srgbClr val="526728"/>
                 </a:solidFill>
               </a:rPr>
               <a:t>연 보험료 합계</a:t>
@@ -8337,11 +8337,11 @@
             </a:avLst>
           </a:prstGeom>
           <a:solidFill>
-            <a:srgbClr val="F6F8F2"/>
+            <a:srgbClr val="F9FCF3"/>
           </a:solidFill>
           <a:ln w="15875">
             <a:solidFill>
-              <a:srgbClr val="E4EBD6"/>
+              <a:srgbClr val="EBF7D4"/>
             </a:solidFill>
           </a:ln>
         </p:spPr>
@@ -8368,7 +8368,7 @@
             <a:avLst/>
           </a:prstGeom>
           <a:solidFill>
-            <a:srgbClr val="819852"/>
+            <a:srgbClr val="9DBF5A"/>
           </a:solidFill>
           <a:ln>
             <a:noFill/>
@@ -8426,7 +8426,7 @@
             <a:r>
               <a:rPr sz="1700" b="1" i="0">
                 <a:solidFill>
-                  <a:srgbClr val="49562E"/>
+                  <a:srgbClr val="526728"/>
                 </a:solidFill>
               </a:rPr>
               <a:t>월 소득 대비</a:t>
@@ -8524,7 +8524,7 @@
     <p:bg>
       <p:bgPr>
         <a:solidFill>
-          <a:srgbClr val="F6F8F2"/>
+          <a:srgbClr val="F9FCF3"/>
         </a:solidFill>
         <a:effectLst/>
       </p:bgPr>
@@ -8551,7 +8551,7 @@
             <a:avLst/>
           </a:prstGeom>
           <a:solidFill>
-            <a:srgbClr val="E4EBD6"/>
+            <a:srgbClr val="EBF7D4"/>
           </a:solidFill>
           <a:ln>
             <a:noFill/>
@@ -8580,7 +8580,7 @@
             <a:avLst/>
           </a:prstGeom>
           <a:solidFill>
-            <a:srgbClr val="819852"/>
+            <a:srgbClr val="9DBF5A"/>
           </a:solidFill>
           <a:ln>
             <a:noFill/>
@@ -8624,7 +8624,7 @@
             <a:r>
               <a:rPr sz="3000" b="1" i="0">
                 <a:solidFill>
-                  <a:srgbClr val="49562E"/>
+                  <a:srgbClr val="526728"/>
                 </a:solidFill>
               </a:rPr>
               <a:t>점검 메모와 다음 할 일</a:t>
@@ -8649,11 +8649,11 @@
             </a:avLst>
           </a:prstGeom>
           <a:solidFill>
-            <a:srgbClr val="F6F8F2"/>
+            <a:srgbClr val="F9FCF3"/>
           </a:solidFill>
           <a:ln w="15875">
             <a:solidFill>
-              <a:srgbClr val="E4EBD6"/>
+              <a:srgbClr val="EBF7D4"/>
             </a:solidFill>
           </a:ln>
         </p:spPr>
@@ -8680,7 +8680,7 @@
             <a:avLst/>
           </a:prstGeom>
           <a:solidFill>
-            <a:srgbClr val="819852"/>
+            <a:srgbClr val="9DBF5A"/>
           </a:solidFill>
           <a:ln>
             <a:noFill/>
@@ -8738,7 +8738,7 @@
             <a:r>
               <a:rPr sz="1800" b="1" i="0">
                 <a:solidFill>
-                  <a:srgbClr val="49562E"/>
+                  <a:srgbClr val="526728"/>
                 </a:solidFill>
               </a:rPr>
               <a:t>확인할 것</a:t>
@@ -8801,11 +8801,11 @@
             </a:avLst>
           </a:prstGeom>
           <a:solidFill>
-            <a:srgbClr val="F6F8F2"/>
+            <a:srgbClr val="F9FCF3"/>
           </a:solidFill>
           <a:ln w="15875">
             <a:solidFill>
-              <a:srgbClr val="E4EBD6"/>
+              <a:srgbClr val="EBF7D4"/>
             </a:solidFill>
           </a:ln>
         </p:spPr>
@@ -8832,7 +8832,7 @@
             <a:avLst/>
           </a:prstGeom>
           <a:solidFill>
-            <a:srgbClr val="819852"/>
+            <a:srgbClr val="9DBF5A"/>
           </a:solidFill>
           <a:ln>
             <a:noFill/>
@@ -8890,7 +8890,7 @@
             <a:r>
               <a:rPr sz="1800" b="1" i="0">
                 <a:solidFill>
-                  <a:srgbClr val="49562E"/>
+                  <a:srgbClr val="526728"/>
                 </a:solidFill>
               </a:rPr>
               <a:t>문의할 것</a:t>
@@ -8953,11 +8953,11 @@
             </a:avLst>
           </a:prstGeom>
           <a:solidFill>
-            <a:srgbClr val="F6F8F2"/>
+            <a:srgbClr val="F9FCF3"/>
           </a:solidFill>
           <a:ln w="15875">
             <a:solidFill>
-              <a:srgbClr val="E4EBD6"/>
+              <a:srgbClr val="EBF7D4"/>
             </a:solidFill>
           </a:ln>
         </p:spPr>
@@ -8984,7 +8984,7 @@
             <a:avLst/>
           </a:prstGeom>
           <a:solidFill>
-            <a:srgbClr val="819852"/>
+            <a:srgbClr val="9DBF5A"/>
           </a:solidFill>
           <a:ln>
             <a:noFill/>
@@ -9042,7 +9042,7 @@
             <a:r>
               <a:rPr sz="1800" b="1" i="0">
                 <a:solidFill>
-                  <a:srgbClr val="49562E"/>
+                  <a:srgbClr val="526728"/>
                 </a:solidFill>
               </a:rPr>
               <a:t>정리할 날짜</a:t>
@@ -9145,34 +9145,34 @@
         <a:sysClr val="window" lastClr="FFFFFF"/>
       </a:lt1>
       <a:dk2>
-        <a:srgbClr val="49562E"/>
+        <a:srgbClr val="526728"/>
       </a:dk2>
       <a:lt2>
-        <a:srgbClr val="F6F8F2"/>
+        <a:srgbClr val="F9FCF3"/>
       </a:lt2>
       <a:accent1>
-        <a:srgbClr val="819852"/>
+        <a:srgbClr val="9DBF5A"/>
       </a:accent1>
       <a:accent2>
-        <a:srgbClr val="475285"/>
+        <a:srgbClr val="339941"/>
       </a:accent2>
       <a:accent3>
-        <a:srgbClr val="49562E"/>
+        <a:srgbClr val="526728"/>
       </a:accent3>
       <a:accent4>
-        <a:srgbClr val="E4EBD6"/>
+        <a:srgbClr val="EBF7D4"/>
       </a:accent4>
       <a:accent5>
-        <a:srgbClr val="64756C"/>
+        <a:srgbClr val="68AC4E"/>
       </a:accent5>
       <a:accent6>
-        <a:srgbClr val="929A82"/>
+        <a:srgbClr val="97A47E"/>
       </a:accent6>
       <a:hlink>
-        <a:srgbClr val="819852"/>
+        <a:srgbClr val="9DBF5A"/>
       </a:hlink>
       <a:folHlink>
-        <a:srgbClr val="49562E"/>
+        <a:srgbClr val="526728"/>
       </a:folHlink>
     </a:clrScheme>
     <a:fontScheme name="Office">

--- a/public/fun/pack/pptx/review/보장점검양식_12_부부점검_아카시아길.pptx
+++ b/public/fun/pack/pptx/review/보장점검양식_12_부부점검_아카시아길.pptx
@@ -3286,6 +3286,14 @@
 <file path=ppt/slides/slide1.xml><?xml version="1.0" encoding="utf-8"?>
 <p:sld xmlns:a="http://schemas.openxmlformats.org/drawingml/2006/main" xmlns:p="http://schemas.openxmlformats.org/presentationml/2006/main" xmlns:r="http://schemas.openxmlformats.org/officeDocument/2006/relationships">
   <p:cSld>
+    <p:bg>
+      <p:bgPr>
+        <a:solidFill>
+          <a:srgbClr val="F7FDEA"/>
+        </a:solidFill>
+        <a:effectLst/>
+      </p:bgPr>
+    </p:bg>
     <p:spTree>
       <p:nvGrpSpPr>
         <p:cNvPr id="1" name=""/>
@@ -3293,30 +3301,102 @@
         <p:nvPr/>
       </p:nvGrpSpPr>
       <p:grpSpPr/>
-      <p:pic>
-        <p:nvPicPr>
-          <p:cNvPr id="3" name="표지 그림" descr="review-12.jpg"/>
-          <p:cNvPicPr>
-            <a:picLocks noChangeAspect="1"/>
-          </p:cNvPicPr>
+      <p:sp>
+        <p:nvSpPr>
+          <p:cNvPr id="3" name="장식"/>
+          <p:cNvSpPr/>
           <p:nvPr/>
-        </p:nvPicPr>
-        <p:blipFill>
-          <a:blip r:embed="rId2"/>
-          <a:stretch>
-            <a:fillRect/>
-          </a:stretch>
-        </p:blipFill>
+        </p:nvSpPr>
         <p:spPr>
           <a:xfrm>
             <a:off x="0" y="0"/>
-            <a:ext cx="12191695" cy="6858000"/>
+            <a:ext cx="3657508" cy="6858000"/>
           </a:xfrm>
           <a:prstGeom prst="rect">
             <a:avLst/>
           </a:prstGeom>
-        </p:spPr>
-      </p:pic>
+          <a:solidFill>
+            <a:srgbClr val="D0ED97"/>
+          </a:solidFill>
+          <a:ln>
+            <a:noFill/>
+          </a:ln>
+        </p:spPr>
+        <p:txBody>
+          <a:bodyPr rtlCol="0" anchor="ctr"/>
+          <a:lstStyle/>
+          <a:p>
+            <a:pPr algn="ctr"/>
+          </a:p>
+        </p:txBody>
+      </p:sp>
+      <p:sp>
+        <p:nvSpPr>
+          <p:cNvPr id="4" name="장식"/>
+          <p:cNvSpPr/>
+          <p:nvPr/>
+        </p:nvSpPr>
+        <p:spPr>
+          <a:xfrm>
+            <a:off x="3108868" y="2880360"/>
+            <a:ext cx="1097280" cy="1097280"/>
+          </a:xfrm>
+          <a:prstGeom prst="ellipse">
+            <a:avLst/>
+          </a:prstGeom>
+          <a:solidFill>
+            <a:srgbClr val="D9F2A6"/>
+          </a:solidFill>
+          <a:ln>
+            <a:noFill/>
+          </a:ln>
+        </p:spPr>
+        <p:txBody>
+          <a:bodyPr rtlCol="0" anchor="ctr"/>
+          <a:lstStyle/>
+          <a:p>
+            <a:pPr algn="ctr"/>
+          </a:p>
+        </p:txBody>
+      </p:sp>
+      <p:sp>
+        <p:nvSpPr>
+          <p:cNvPr id="5" name="라벨"/>
+          <p:cNvSpPr txBox="1"/>
+          <p:nvPr/>
+        </p:nvSpPr>
+        <p:spPr>
+          <a:xfrm>
+            <a:off x="4632844" y="2148840"/>
+            <a:ext cx="6705432" cy="274320"/>
+          </a:xfrm>
+          <a:prstGeom prst="rect">
+            <a:avLst/>
+          </a:prstGeom>
+          <a:noFill/>
+        </p:spPr>
+        <p:txBody>
+          <a:bodyPr wrap="square" lIns="54864" rIns="54864" tIns="27432" bIns="27432" anchor="t">
+            <a:noAutofit/>
+          </a:bodyPr>
+          <a:lstStyle/>
+          <a:p>
+            <a:pPr algn="l">
+              <a:lnSpc>
+                <a:spcPct val="115000"/>
+              </a:lnSpc>
+            </a:pPr>
+            <a:r>
+              <a:rPr sz="1000" b="1" i="0" spc="250">
+                <a:solidFill>
+                  <a:srgbClr val="26231F"/>
+                </a:solidFill>
+              </a:rPr>
+              <a:t>INSURANCE CHECK</a:t>
+            </a:r>
+          </a:p>
+        </p:txBody>
+      </p:sp>
       <p:sp>
         <p:nvSpPr>
           <p:cNvPr id="2" name="Title 1"/>
@@ -3329,8 +3409,8 @@
         </p:nvSpPr>
         <p:spPr>
           <a:xfrm>
-            <a:off x="853418" y="2057400"/>
-            <a:ext cx="6095847" cy="1554480"/>
+            <a:off x="4632844" y="2606040"/>
+            <a:ext cx="6705432" cy="1188720"/>
           </a:xfrm>
         </p:spPr>
         <p:txBody>
@@ -3347,7 +3427,7 @@
             <a:r>
               <a:rPr sz="3600" b="1" i="0">
                 <a:solidFill>
-                  <a:srgbClr val="526728"/>
+                  <a:srgbClr val="26231F"/>
                 </a:solidFill>
               </a:rPr>
               <a:t>우리 보험 점검 시간</a:t>
@@ -3357,14 +3437,14 @@
       </p:sp>
       <p:sp>
         <p:nvSpPr>
-          <p:cNvPr id="4" name="한 줄 문구"/>
+          <p:cNvPr id="6" name="한 줄 문구"/>
           <p:cNvSpPr txBox="1"/>
           <p:nvPr/>
         </p:nvSpPr>
         <p:spPr>
           <a:xfrm>
-            <a:off x="853418" y="3749039"/>
-            <a:ext cx="6095847" cy="822960"/>
+            <a:off x="4632844" y="3886200"/>
+            <a:ext cx="6705432" cy="822960"/>
           </a:xfrm>
           <a:prstGeom prst="rect">
             <a:avLst/>
@@ -3383,9 +3463,9 @@
               </a:lnSpc>
             </a:pPr>
             <a:r>
-              <a:rPr sz="1700" b="0" i="1">
+              <a:rPr sz="1700" b="0" i="0">
                 <a:solidFill>
-                  <a:srgbClr val="526728"/>
+                  <a:srgbClr val="26231F"/>
                 </a:solidFill>
               </a:rPr>
               <a:t>각자 증권을 가져와 식탁에 펼칩니다</a:t>
@@ -3395,14 +3475,14 @@
       </p:sp>
       <p:sp>
         <p:nvSpPr>
-          <p:cNvPr id="5" name="안내 문구"/>
+          <p:cNvPr id="7" name="안내 문구"/>
           <p:cNvSpPr txBox="1"/>
           <p:nvPr/>
         </p:nvSpPr>
         <p:spPr>
           <a:xfrm>
-            <a:off x="853418" y="4617720"/>
-            <a:ext cx="6095847" cy="914400"/>
+            <a:off x="4632844" y="4754880"/>
+            <a:ext cx="6705432" cy="914400"/>
           </a:xfrm>
           <a:prstGeom prst="rect">
             <a:avLst/>
@@ -3423,10 +3503,10 @@
             <a:r>
               <a:rPr sz="1400" b="0" i="0">
                 <a:solidFill>
-                  <a:srgbClr val="666666"/>
+                  <a:srgbClr val="26231F"/>
                 </a:solidFill>
               </a:rPr>
-              <a:t>부부 점검 · 2027. 00. 00</a:t>
+              <a:t>부부 점검 · 날짜 입력</a:t>
             </a:r>
           </a:p>
           <a:p>
@@ -3438,7 +3518,7 @@
             <a:r>
               <a:rPr sz="1400" b="0" i="0">
                 <a:solidFill>
-                  <a:srgbClr val="666666"/>
+                  <a:srgbClr val="26231F"/>
                 </a:solidFill>
               </a:rPr>
               <a:t>가입 내용을 정리하고 함께 확인하는 양식</a:t>
@@ -3460,7 +3540,7 @@
     <p:bg>
       <p:bgPr>
         <a:solidFill>
-          <a:srgbClr val="F9FCF3"/>
+          <a:srgbClr val="FCFDFA"/>
         </a:solidFill>
         <a:effectLst/>
       </p:bgPr>
@@ -3474,20 +3554,20 @@
       <p:grpSpPr/>
       <p:sp>
         <p:nvSpPr>
-          <p:cNvPr id="3" name="장식"/>
+          <p:cNvPr id="3" name="포인트"/>
           <p:cNvSpPr/>
           <p:nvPr/>
         </p:nvSpPr>
         <p:spPr>
           <a:xfrm>
-            <a:off x="0" y="6035040"/>
-            <a:ext cx="1737360" cy="822960"/>
-          </a:xfrm>
-          <a:prstGeom prst="rtTriangle">
+            <a:off x="5958687" y="246888"/>
+            <a:ext cx="274320" cy="274320"/>
+          </a:xfrm>
+          <a:prstGeom prst="round2SameRect">
             <a:avLst/>
           </a:prstGeom>
           <a:solidFill>
-            <a:srgbClr val="EBF7D4"/>
+            <a:srgbClr val="D0ED97"/>
           </a:solidFill>
           <a:ln>
             <a:noFill/>
@@ -3509,14 +3589,14 @@
         </p:nvSpPr>
         <p:spPr>
           <a:xfrm>
-            <a:off x="0" y="6400800"/>
-            <a:ext cx="914400" cy="457200"/>
-          </a:xfrm>
-          <a:prstGeom prst="rtTriangle">
+            <a:off x="5684367" y="1572768"/>
+            <a:ext cx="822960" cy="22860"/>
+          </a:xfrm>
+          <a:prstGeom prst="rect">
             <a:avLst/>
           </a:prstGeom>
           <a:solidFill>
-            <a:srgbClr val="9DBF5A"/>
+            <a:srgbClr val="D0ED97"/>
           </a:solidFill>
           <a:ln>
             <a:noFill/>
@@ -3527,6 +3607,44 @@
           <a:lstStyle/>
           <a:p>
             <a:pPr algn="ctr"/>
+          </a:p>
+        </p:txBody>
+      </p:sp>
+      <p:sp>
+        <p:nvSpPr>
+          <p:cNvPr id="5" name="상단 라벨"/>
+          <p:cNvSpPr txBox="1"/>
+          <p:nvPr/>
+        </p:nvSpPr>
+        <p:spPr>
+          <a:xfrm>
+            <a:off x="640080" y="182880"/>
+            <a:ext cx="3657600" cy="274320"/>
+          </a:xfrm>
+          <a:prstGeom prst="rect">
+            <a:avLst/>
+          </a:prstGeom>
+          <a:noFill/>
+        </p:spPr>
+        <p:txBody>
+          <a:bodyPr wrap="square" lIns="54864" rIns="54864" tIns="27432" bIns="27432" anchor="ctr">
+            <a:noAutofit/>
+          </a:bodyPr>
+          <a:lstStyle/>
+          <a:p>
+            <a:pPr algn="l">
+              <a:lnSpc>
+                <a:spcPct val="115000"/>
+              </a:lnSpc>
+            </a:pPr>
+            <a:r>
+              <a:rPr sz="800" b="1" i="0" spc="250">
+                <a:solidFill>
+                  <a:srgbClr val="8E8780"/>
+                </a:solidFill>
+              </a:rPr>
+              <a:t>INSURANCE CHECK</a:t>
+            </a:r>
           </a:p>
         </p:txBody>
       </p:sp>
@@ -3542,8 +3660,8 @@
         </p:nvSpPr>
         <p:spPr>
           <a:xfrm>
-            <a:off x="640080" y="457200"/>
-            <a:ext cx="9722815" cy="868680"/>
+            <a:off x="1371600" y="640080"/>
+            <a:ext cx="9448495" cy="868680"/>
           </a:xfrm>
         </p:spPr>
         <p:txBody>
@@ -3552,7 +3670,7 @@
           </a:bodyPr>
           <a:lstStyle/>
           <a:p>
-            <a:pPr algn="l">
+            <a:pPr algn="ctr">
               <a:lnSpc>
                 <a:spcPct val="105000"/>
               </a:lnSpc>
@@ -3560,7 +3678,7 @@
             <a:r>
               <a:rPr sz="3000" b="1" i="0">
                 <a:solidFill>
-                  <a:srgbClr val="526728"/>
+                  <a:srgbClr val="26231F"/>
                 </a:solidFill>
               </a:rPr>
               <a:t>점검 대상 현황</a:t>
@@ -3570,14 +3688,14 @@
       </p:sp>
       <p:graphicFrame>
         <p:nvGraphicFramePr>
-          <p:cNvPr id="5" name="표"/>
+          <p:cNvPr id="6" name="표"/>
           <p:cNvGraphicFramePr>
             <a:graphicFrameLocks noGrp="1"/>
           </p:cNvGraphicFramePr>
           <p:nvPr/>
         </p:nvGraphicFramePr>
         <p:xfrm>
-          <a:off x="640080" y="1600200"/>
+          <a:off x="640080" y="1783080"/>
           <a:ext cx="10911534" cy="3657600"/>
         </p:xfrm>
         <a:graphic>
@@ -3601,7 +3719,7 @@
                       <a:r>
                         <a:rPr sz="1600" b="1">
                           <a:solidFill>
-                            <a:srgbClr val="FFFFFF"/>
+                            <a:srgbClr val="26231F"/>
                           </a:solidFill>
                         </a:rPr>
                         <a:t>구분</a:t>
@@ -3611,30 +3729,30 @@
                   <a:tcPr anchor="ctr" marL="73152" marR="73152">
                     <a:lnL w="9525" cap="flat" cmpd="sng" algn="ctr">
                       <a:solidFill>
-                        <a:srgbClr val="9DBF5A"/>
+                        <a:srgbClr val="D0ED97"/>
                       </a:solidFill>
                       <a:prstDash val="solid"/>
                     </a:lnL>
                     <a:lnR w="9525" cap="flat" cmpd="sng" algn="ctr">
                       <a:solidFill>
-                        <a:srgbClr val="9DBF5A"/>
+                        <a:srgbClr val="D0ED97"/>
                       </a:solidFill>
                       <a:prstDash val="solid"/>
                     </a:lnR>
                     <a:lnT w="9525" cap="flat" cmpd="sng" algn="ctr">
                       <a:solidFill>
-                        <a:srgbClr val="9DBF5A"/>
+                        <a:srgbClr val="D0ED97"/>
                       </a:solidFill>
                       <a:prstDash val="solid"/>
                     </a:lnT>
                     <a:lnB w="9525" cap="flat" cmpd="sng" algn="ctr">
                       <a:solidFill>
-                        <a:srgbClr val="9DBF5A"/>
+                        <a:srgbClr val="D0ED97"/>
                       </a:solidFill>
                       <a:prstDash val="solid"/>
                     </a:lnB>
                     <a:solidFill>
-                      <a:srgbClr val="9DBF5A"/>
+                      <a:srgbClr val="D0ED97"/>
                     </a:solidFill>
                   </a:tcPr>
                 </a:tc>
@@ -3647,7 +3765,7 @@
                       <a:r>
                         <a:rPr sz="1600" b="1">
                           <a:solidFill>
-                            <a:srgbClr val="FFFFFF"/>
+                            <a:srgbClr val="26231F"/>
                           </a:solidFill>
                         </a:rPr>
                         <a:t>남편</a:t>
@@ -3657,30 +3775,30 @@
                   <a:tcPr anchor="ctr" marL="73152" marR="73152">
                     <a:lnL w="9525" cap="flat" cmpd="sng" algn="ctr">
                       <a:solidFill>
-                        <a:srgbClr val="9DBF5A"/>
+                        <a:srgbClr val="D0ED97"/>
                       </a:solidFill>
                       <a:prstDash val="solid"/>
                     </a:lnL>
                     <a:lnR w="9525" cap="flat" cmpd="sng" algn="ctr">
                       <a:solidFill>
-                        <a:srgbClr val="9DBF5A"/>
+                        <a:srgbClr val="D0ED97"/>
                       </a:solidFill>
                       <a:prstDash val="solid"/>
                     </a:lnR>
                     <a:lnT w="9525" cap="flat" cmpd="sng" algn="ctr">
                       <a:solidFill>
-                        <a:srgbClr val="9DBF5A"/>
+                        <a:srgbClr val="D0ED97"/>
                       </a:solidFill>
                       <a:prstDash val="solid"/>
                     </a:lnT>
                     <a:lnB w="9525" cap="flat" cmpd="sng" algn="ctr">
                       <a:solidFill>
-                        <a:srgbClr val="9DBF5A"/>
+                        <a:srgbClr val="D0ED97"/>
                       </a:solidFill>
                       <a:prstDash val="solid"/>
                     </a:lnB>
                     <a:solidFill>
-                      <a:srgbClr val="9DBF5A"/>
+                      <a:srgbClr val="D0ED97"/>
                     </a:solidFill>
                   </a:tcPr>
                 </a:tc>
@@ -3693,7 +3811,7 @@
                       <a:r>
                         <a:rPr sz="1600" b="1">
                           <a:solidFill>
-                            <a:srgbClr val="FFFFFF"/>
+                            <a:srgbClr val="26231F"/>
                           </a:solidFill>
                         </a:rPr>
                         <a:t>아내</a:t>
@@ -3703,30 +3821,30 @@
                   <a:tcPr anchor="ctr" marL="73152" marR="73152">
                     <a:lnL w="9525" cap="flat" cmpd="sng" algn="ctr">
                       <a:solidFill>
-                        <a:srgbClr val="9DBF5A"/>
+                        <a:srgbClr val="D0ED97"/>
                       </a:solidFill>
                       <a:prstDash val="solid"/>
                     </a:lnL>
                     <a:lnR w="9525" cap="flat" cmpd="sng" algn="ctr">
                       <a:solidFill>
-                        <a:srgbClr val="9DBF5A"/>
+                        <a:srgbClr val="D0ED97"/>
                       </a:solidFill>
                       <a:prstDash val="solid"/>
                     </a:lnR>
                     <a:lnT w="9525" cap="flat" cmpd="sng" algn="ctr">
                       <a:solidFill>
-                        <a:srgbClr val="9DBF5A"/>
+                        <a:srgbClr val="D0ED97"/>
                       </a:solidFill>
                       <a:prstDash val="solid"/>
                     </a:lnT>
                     <a:lnB w="9525" cap="flat" cmpd="sng" algn="ctr">
                       <a:solidFill>
-                        <a:srgbClr val="9DBF5A"/>
+                        <a:srgbClr val="D0ED97"/>
                       </a:solidFill>
                       <a:prstDash val="solid"/>
                     </a:lnB>
                     <a:solidFill>
-                      <a:srgbClr val="9DBF5A"/>
+                      <a:srgbClr val="D0ED97"/>
                     </a:solidFill>
                   </a:tcPr>
                 </a:tc>
@@ -3741,7 +3859,7 @@
                       <a:r>
                         <a:rPr sz="1600" b="1">
                           <a:solidFill>
-                            <a:srgbClr val="526728"/>
+                            <a:srgbClr val="3E4927"/>
                           </a:solidFill>
                         </a:rPr>
                         <a:t>이름</a:t>
@@ -3751,30 +3869,30 @@
                   <a:tcPr anchor="ctr" marL="73152" marR="73152">
                     <a:lnL w="9525" cap="flat" cmpd="sng" algn="ctr">
                       <a:solidFill>
-                        <a:srgbClr val="EBF7D4"/>
+                        <a:srgbClr val="ECFAD1"/>
                       </a:solidFill>
                       <a:prstDash val="solid"/>
                     </a:lnL>
                     <a:lnR w="9525" cap="flat" cmpd="sng" algn="ctr">
                       <a:solidFill>
-                        <a:srgbClr val="EBF7D4"/>
+                        <a:srgbClr val="ECFAD1"/>
                       </a:solidFill>
                       <a:prstDash val="solid"/>
                     </a:lnR>
                     <a:lnT w="9525" cap="flat" cmpd="sng" algn="ctr">
                       <a:solidFill>
-                        <a:srgbClr val="EBF7D4"/>
+                        <a:srgbClr val="ECFAD1"/>
                       </a:solidFill>
                       <a:prstDash val="solid"/>
                     </a:lnT>
                     <a:lnB w="9525" cap="flat" cmpd="sng" algn="ctr">
                       <a:solidFill>
-                        <a:srgbClr val="EBF7D4"/>
+                        <a:srgbClr val="ECFAD1"/>
                       </a:solidFill>
                       <a:prstDash val="solid"/>
                     </a:lnB>
                     <a:solidFill>
-                      <a:srgbClr val="EBF7D4"/>
+                      <a:srgbClr val="ECFAD1"/>
                     </a:solidFill>
                   </a:tcPr>
                 </a:tc>
@@ -3787,7 +3905,7 @@
                       <a:r>
                         <a:rPr sz="1600" b="0">
                           <a:solidFill>
-                            <a:srgbClr val="2B2B2B"/>
+                            <a:srgbClr val="26231F"/>
                           </a:solidFill>
                         </a:rPr>
                         <a:t/>
@@ -3797,25 +3915,25 @@
                   <a:tcPr anchor="ctr" marL="73152" marR="73152">
                     <a:lnL w="9525" cap="flat" cmpd="sng" algn="ctr">
                       <a:solidFill>
-                        <a:srgbClr val="EBF7D4"/>
+                        <a:srgbClr val="ECFAD1"/>
                       </a:solidFill>
                       <a:prstDash val="solid"/>
                     </a:lnL>
                     <a:lnR w="9525" cap="flat" cmpd="sng" algn="ctr">
                       <a:solidFill>
-                        <a:srgbClr val="EBF7D4"/>
+                        <a:srgbClr val="ECFAD1"/>
                       </a:solidFill>
                       <a:prstDash val="solid"/>
                     </a:lnR>
                     <a:lnT w="9525" cap="flat" cmpd="sng" algn="ctr">
                       <a:solidFill>
-                        <a:srgbClr val="EBF7D4"/>
+                        <a:srgbClr val="ECFAD1"/>
                       </a:solidFill>
                       <a:prstDash val="solid"/>
                     </a:lnT>
                     <a:lnB w="9525" cap="flat" cmpd="sng" algn="ctr">
                       <a:solidFill>
-                        <a:srgbClr val="EBF7D4"/>
+                        <a:srgbClr val="ECFAD1"/>
                       </a:solidFill>
                       <a:prstDash val="solid"/>
                     </a:lnB>
@@ -3833,7 +3951,7 @@
                       <a:r>
                         <a:rPr sz="1600" b="0">
                           <a:solidFill>
-                            <a:srgbClr val="2B2B2B"/>
+                            <a:srgbClr val="26231F"/>
                           </a:solidFill>
                         </a:rPr>
                         <a:t/>
@@ -3843,25 +3961,25 @@
                   <a:tcPr anchor="ctr" marL="73152" marR="73152">
                     <a:lnL w="9525" cap="flat" cmpd="sng" algn="ctr">
                       <a:solidFill>
-                        <a:srgbClr val="EBF7D4"/>
+                        <a:srgbClr val="ECFAD1"/>
                       </a:solidFill>
                       <a:prstDash val="solid"/>
                     </a:lnL>
                     <a:lnR w="9525" cap="flat" cmpd="sng" algn="ctr">
                       <a:solidFill>
-                        <a:srgbClr val="EBF7D4"/>
+                        <a:srgbClr val="ECFAD1"/>
                       </a:solidFill>
                       <a:prstDash val="solid"/>
                     </a:lnR>
                     <a:lnT w="9525" cap="flat" cmpd="sng" algn="ctr">
                       <a:solidFill>
-                        <a:srgbClr val="EBF7D4"/>
+                        <a:srgbClr val="ECFAD1"/>
                       </a:solidFill>
                       <a:prstDash val="solid"/>
                     </a:lnT>
                     <a:lnB w="9525" cap="flat" cmpd="sng" algn="ctr">
                       <a:solidFill>
-                        <a:srgbClr val="EBF7D4"/>
+                        <a:srgbClr val="ECFAD1"/>
                       </a:solidFill>
                       <a:prstDash val="solid"/>
                     </a:lnB>
@@ -3881,7 +3999,7 @@
                       <a:r>
                         <a:rPr sz="1600" b="1">
                           <a:solidFill>
-                            <a:srgbClr val="526728"/>
+                            <a:srgbClr val="3E4927"/>
                           </a:solidFill>
                         </a:rPr>
                         <a:t>나이</a:t>
@@ -3891,30 +4009,30 @@
                   <a:tcPr anchor="ctr" marL="73152" marR="73152">
                     <a:lnL w="9525" cap="flat" cmpd="sng" algn="ctr">
                       <a:solidFill>
-                        <a:srgbClr val="EBF7D4"/>
+                        <a:srgbClr val="ECFAD1"/>
                       </a:solidFill>
                       <a:prstDash val="solid"/>
                     </a:lnL>
                     <a:lnR w="9525" cap="flat" cmpd="sng" algn="ctr">
                       <a:solidFill>
-                        <a:srgbClr val="EBF7D4"/>
+                        <a:srgbClr val="ECFAD1"/>
                       </a:solidFill>
                       <a:prstDash val="solid"/>
                     </a:lnR>
                     <a:lnT w="9525" cap="flat" cmpd="sng" algn="ctr">
                       <a:solidFill>
-                        <a:srgbClr val="EBF7D4"/>
+                        <a:srgbClr val="ECFAD1"/>
                       </a:solidFill>
                       <a:prstDash val="solid"/>
                     </a:lnT>
                     <a:lnB w="9525" cap="flat" cmpd="sng" algn="ctr">
                       <a:solidFill>
-                        <a:srgbClr val="EBF7D4"/>
+                        <a:srgbClr val="ECFAD1"/>
                       </a:solidFill>
                       <a:prstDash val="solid"/>
                     </a:lnB>
                     <a:solidFill>
-                      <a:srgbClr val="EBF7D4"/>
+                      <a:srgbClr val="ECFAD1"/>
                     </a:solidFill>
                   </a:tcPr>
                 </a:tc>
@@ -3927,7 +4045,7 @@
                       <a:r>
                         <a:rPr sz="1600" b="0">
                           <a:solidFill>
-                            <a:srgbClr val="2B2B2B"/>
+                            <a:srgbClr val="26231F"/>
                           </a:solidFill>
                         </a:rPr>
                         <a:t/>
@@ -3937,30 +4055,30 @@
                   <a:tcPr anchor="ctr" marL="73152" marR="73152">
                     <a:lnL w="9525" cap="flat" cmpd="sng" algn="ctr">
                       <a:solidFill>
-                        <a:srgbClr val="EBF7D4"/>
+                        <a:srgbClr val="ECFAD1"/>
                       </a:solidFill>
                       <a:prstDash val="solid"/>
                     </a:lnL>
                     <a:lnR w="9525" cap="flat" cmpd="sng" algn="ctr">
                       <a:solidFill>
-                        <a:srgbClr val="EBF7D4"/>
+                        <a:srgbClr val="ECFAD1"/>
                       </a:solidFill>
                       <a:prstDash val="solid"/>
                     </a:lnR>
                     <a:lnT w="9525" cap="flat" cmpd="sng" algn="ctr">
                       <a:solidFill>
-                        <a:srgbClr val="EBF7D4"/>
+                        <a:srgbClr val="ECFAD1"/>
                       </a:solidFill>
                       <a:prstDash val="solid"/>
                     </a:lnT>
                     <a:lnB w="9525" cap="flat" cmpd="sng" algn="ctr">
                       <a:solidFill>
-                        <a:srgbClr val="EBF7D4"/>
+                        <a:srgbClr val="ECFAD1"/>
                       </a:solidFill>
                       <a:prstDash val="solid"/>
                     </a:lnB>
                     <a:solidFill>
-                      <a:srgbClr val="F9FCF3"/>
+                      <a:srgbClr val="F7FDEA"/>
                     </a:solidFill>
                   </a:tcPr>
                 </a:tc>
@@ -3973,7 +4091,7 @@
                       <a:r>
                         <a:rPr sz="1600" b="0">
                           <a:solidFill>
-                            <a:srgbClr val="2B2B2B"/>
+                            <a:srgbClr val="26231F"/>
                           </a:solidFill>
                         </a:rPr>
                         <a:t/>
@@ -3983,30 +4101,30 @@
                   <a:tcPr anchor="ctr" marL="73152" marR="73152">
                     <a:lnL w="9525" cap="flat" cmpd="sng" algn="ctr">
                       <a:solidFill>
-                        <a:srgbClr val="EBF7D4"/>
+                        <a:srgbClr val="ECFAD1"/>
                       </a:solidFill>
                       <a:prstDash val="solid"/>
                     </a:lnL>
                     <a:lnR w="9525" cap="flat" cmpd="sng" algn="ctr">
                       <a:solidFill>
-                        <a:srgbClr val="EBF7D4"/>
+                        <a:srgbClr val="ECFAD1"/>
                       </a:solidFill>
                       <a:prstDash val="solid"/>
                     </a:lnR>
                     <a:lnT w="9525" cap="flat" cmpd="sng" algn="ctr">
                       <a:solidFill>
-                        <a:srgbClr val="EBF7D4"/>
+                        <a:srgbClr val="ECFAD1"/>
                       </a:solidFill>
                       <a:prstDash val="solid"/>
                     </a:lnT>
                     <a:lnB w="9525" cap="flat" cmpd="sng" algn="ctr">
                       <a:solidFill>
-                        <a:srgbClr val="EBF7D4"/>
+                        <a:srgbClr val="ECFAD1"/>
                       </a:solidFill>
                       <a:prstDash val="solid"/>
                     </a:lnB>
                     <a:solidFill>
-                      <a:srgbClr val="F9FCF3"/>
+                      <a:srgbClr val="F7FDEA"/>
                     </a:solidFill>
                   </a:tcPr>
                 </a:tc>
@@ -4021,7 +4139,7 @@
                       <a:r>
                         <a:rPr sz="1600" b="1">
                           <a:solidFill>
-                            <a:srgbClr val="526728"/>
+                            <a:srgbClr val="3E4927"/>
                           </a:solidFill>
                         </a:rPr>
                         <a:t>직업</a:t>
@@ -4031,30 +4149,30 @@
                   <a:tcPr anchor="ctr" marL="73152" marR="73152">
                     <a:lnL w="9525" cap="flat" cmpd="sng" algn="ctr">
                       <a:solidFill>
-                        <a:srgbClr val="EBF7D4"/>
+                        <a:srgbClr val="ECFAD1"/>
                       </a:solidFill>
                       <a:prstDash val="solid"/>
                     </a:lnL>
                     <a:lnR w="9525" cap="flat" cmpd="sng" algn="ctr">
                       <a:solidFill>
-                        <a:srgbClr val="EBF7D4"/>
+                        <a:srgbClr val="ECFAD1"/>
                       </a:solidFill>
                       <a:prstDash val="solid"/>
                     </a:lnR>
                     <a:lnT w="9525" cap="flat" cmpd="sng" algn="ctr">
                       <a:solidFill>
-                        <a:srgbClr val="EBF7D4"/>
+                        <a:srgbClr val="ECFAD1"/>
                       </a:solidFill>
                       <a:prstDash val="solid"/>
                     </a:lnT>
                     <a:lnB w="9525" cap="flat" cmpd="sng" algn="ctr">
                       <a:solidFill>
-                        <a:srgbClr val="EBF7D4"/>
+                        <a:srgbClr val="ECFAD1"/>
                       </a:solidFill>
                       <a:prstDash val="solid"/>
                     </a:lnB>
                     <a:solidFill>
-                      <a:srgbClr val="EBF7D4"/>
+                      <a:srgbClr val="ECFAD1"/>
                     </a:solidFill>
                   </a:tcPr>
                 </a:tc>
@@ -4067,7 +4185,7 @@
                       <a:r>
                         <a:rPr sz="1600" b="0">
                           <a:solidFill>
-                            <a:srgbClr val="2B2B2B"/>
+                            <a:srgbClr val="26231F"/>
                           </a:solidFill>
                         </a:rPr>
                         <a:t/>
@@ -4077,25 +4195,25 @@
                   <a:tcPr anchor="ctr" marL="73152" marR="73152">
                     <a:lnL w="9525" cap="flat" cmpd="sng" algn="ctr">
                       <a:solidFill>
-                        <a:srgbClr val="EBF7D4"/>
+                        <a:srgbClr val="ECFAD1"/>
                       </a:solidFill>
                       <a:prstDash val="solid"/>
                     </a:lnL>
                     <a:lnR w="9525" cap="flat" cmpd="sng" algn="ctr">
                       <a:solidFill>
-                        <a:srgbClr val="EBF7D4"/>
+                        <a:srgbClr val="ECFAD1"/>
                       </a:solidFill>
                       <a:prstDash val="solid"/>
                     </a:lnR>
                     <a:lnT w="9525" cap="flat" cmpd="sng" algn="ctr">
                       <a:solidFill>
-                        <a:srgbClr val="EBF7D4"/>
+                        <a:srgbClr val="ECFAD1"/>
                       </a:solidFill>
                       <a:prstDash val="solid"/>
                     </a:lnT>
                     <a:lnB w="9525" cap="flat" cmpd="sng" algn="ctr">
                       <a:solidFill>
-                        <a:srgbClr val="EBF7D4"/>
+                        <a:srgbClr val="ECFAD1"/>
                       </a:solidFill>
                       <a:prstDash val="solid"/>
                     </a:lnB>
@@ -4113,7 +4231,7 @@
                       <a:r>
                         <a:rPr sz="1600" b="0">
                           <a:solidFill>
-                            <a:srgbClr val="2B2B2B"/>
+                            <a:srgbClr val="26231F"/>
                           </a:solidFill>
                         </a:rPr>
                         <a:t/>
@@ -4123,25 +4241,25 @@
                   <a:tcPr anchor="ctr" marL="73152" marR="73152">
                     <a:lnL w="9525" cap="flat" cmpd="sng" algn="ctr">
                       <a:solidFill>
-                        <a:srgbClr val="EBF7D4"/>
+                        <a:srgbClr val="ECFAD1"/>
                       </a:solidFill>
                       <a:prstDash val="solid"/>
                     </a:lnL>
                     <a:lnR w="9525" cap="flat" cmpd="sng" algn="ctr">
                       <a:solidFill>
-                        <a:srgbClr val="EBF7D4"/>
+                        <a:srgbClr val="ECFAD1"/>
                       </a:solidFill>
                       <a:prstDash val="solid"/>
                     </a:lnR>
                     <a:lnT w="9525" cap="flat" cmpd="sng" algn="ctr">
                       <a:solidFill>
-                        <a:srgbClr val="EBF7D4"/>
+                        <a:srgbClr val="ECFAD1"/>
                       </a:solidFill>
                       <a:prstDash val="solid"/>
                     </a:lnT>
                     <a:lnB w="9525" cap="flat" cmpd="sng" algn="ctr">
                       <a:solidFill>
-                        <a:srgbClr val="EBF7D4"/>
+                        <a:srgbClr val="ECFAD1"/>
                       </a:solidFill>
                       <a:prstDash val="solid"/>
                     </a:lnB>
@@ -4161,7 +4279,7 @@
                       <a:r>
                         <a:rPr sz="1600" b="1">
                           <a:solidFill>
-                            <a:srgbClr val="526728"/>
+                            <a:srgbClr val="3E4927"/>
                           </a:solidFill>
                         </a:rPr>
                         <a:t>건강 상태 메모</a:t>
@@ -4171,30 +4289,30 @@
                   <a:tcPr anchor="ctr" marL="73152" marR="73152">
                     <a:lnL w="9525" cap="flat" cmpd="sng" algn="ctr">
                       <a:solidFill>
-                        <a:srgbClr val="EBF7D4"/>
+                        <a:srgbClr val="ECFAD1"/>
                       </a:solidFill>
                       <a:prstDash val="solid"/>
                     </a:lnL>
                     <a:lnR w="9525" cap="flat" cmpd="sng" algn="ctr">
                       <a:solidFill>
-                        <a:srgbClr val="EBF7D4"/>
+                        <a:srgbClr val="ECFAD1"/>
                       </a:solidFill>
                       <a:prstDash val="solid"/>
                     </a:lnR>
                     <a:lnT w="9525" cap="flat" cmpd="sng" algn="ctr">
                       <a:solidFill>
-                        <a:srgbClr val="EBF7D4"/>
+                        <a:srgbClr val="ECFAD1"/>
                       </a:solidFill>
                       <a:prstDash val="solid"/>
                     </a:lnT>
                     <a:lnB w="9525" cap="flat" cmpd="sng" algn="ctr">
                       <a:solidFill>
-                        <a:srgbClr val="EBF7D4"/>
+                        <a:srgbClr val="ECFAD1"/>
                       </a:solidFill>
                       <a:prstDash val="solid"/>
                     </a:lnB>
                     <a:solidFill>
-                      <a:srgbClr val="EBF7D4"/>
+                      <a:srgbClr val="ECFAD1"/>
                     </a:solidFill>
                   </a:tcPr>
                 </a:tc>
@@ -4207,7 +4325,7 @@
                       <a:r>
                         <a:rPr sz="1600" b="0">
                           <a:solidFill>
-                            <a:srgbClr val="2B2B2B"/>
+                            <a:srgbClr val="26231F"/>
                           </a:solidFill>
                         </a:rPr>
                         <a:t/>
@@ -4217,30 +4335,30 @@
                   <a:tcPr anchor="ctr" marL="73152" marR="73152">
                     <a:lnL w="9525" cap="flat" cmpd="sng" algn="ctr">
                       <a:solidFill>
-                        <a:srgbClr val="EBF7D4"/>
+                        <a:srgbClr val="ECFAD1"/>
                       </a:solidFill>
                       <a:prstDash val="solid"/>
                     </a:lnL>
                     <a:lnR w="9525" cap="flat" cmpd="sng" algn="ctr">
                       <a:solidFill>
-                        <a:srgbClr val="EBF7D4"/>
+                        <a:srgbClr val="ECFAD1"/>
                       </a:solidFill>
                       <a:prstDash val="solid"/>
                     </a:lnR>
                     <a:lnT w="9525" cap="flat" cmpd="sng" algn="ctr">
                       <a:solidFill>
-                        <a:srgbClr val="EBF7D4"/>
+                        <a:srgbClr val="ECFAD1"/>
                       </a:solidFill>
                       <a:prstDash val="solid"/>
                     </a:lnT>
                     <a:lnB w="9525" cap="flat" cmpd="sng" algn="ctr">
                       <a:solidFill>
-                        <a:srgbClr val="EBF7D4"/>
+                        <a:srgbClr val="ECFAD1"/>
                       </a:solidFill>
                       <a:prstDash val="solid"/>
                     </a:lnB>
                     <a:solidFill>
-                      <a:srgbClr val="F9FCF3"/>
+                      <a:srgbClr val="F7FDEA"/>
                     </a:solidFill>
                   </a:tcPr>
                 </a:tc>
@@ -4253,7 +4371,7 @@
                       <a:r>
                         <a:rPr sz="1600" b="0">
                           <a:solidFill>
-                            <a:srgbClr val="2B2B2B"/>
+                            <a:srgbClr val="26231F"/>
                           </a:solidFill>
                         </a:rPr>
                         <a:t/>
@@ -4263,30 +4381,30 @@
                   <a:tcPr anchor="ctr" marL="73152" marR="73152">
                     <a:lnL w="9525" cap="flat" cmpd="sng" algn="ctr">
                       <a:solidFill>
-                        <a:srgbClr val="EBF7D4"/>
+                        <a:srgbClr val="ECFAD1"/>
                       </a:solidFill>
                       <a:prstDash val="solid"/>
                     </a:lnL>
                     <a:lnR w="9525" cap="flat" cmpd="sng" algn="ctr">
                       <a:solidFill>
-                        <a:srgbClr val="EBF7D4"/>
+                        <a:srgbClr val="ECFAD1"/>
                       </a:solidFill>
                       <a:prstDash val="solid"/>
                     </a:lnR>
                     <a:lnT w="9525" cap="flat" cmpd="sng" algn="ctr">
                       <a:solidFill>
-                        <a:srgbClr val="EBF7D4"/>
+                        <a:srgbClr val="ECFAD1"/>
                       </a:solidFill>
                       <a:prstDash val="solid"/>
                     </a:lnT>
                     <a:lnB w="9525" cap="flat" cmpd="sng" algn="ctr">
                       <a:solidFill>
-                        <a:srgbClr val="EBF7D4"/>
+                        <a:srgbClr val="ECFAD1"/>
                       </a:solidFill>
                       <a:prstDash val="solid"/>
                     </a:lnB>
                     <a:solidFill>
-                      <a:srgbClr val="F9FCF3"/>
+                      <a:srgbClr val="F7FDEA"/>
                     </a:solidFill>
                   </a:tcPr>
                 </a:tc>
@@ -4309,7 +4427,7 @@
     <p:bg>
       <p:bgPr>
         <a:solidFill>
-          <a:srgbClr val="F9FCF3"/>
+          <a:srgbClr val="FCFDFA"/>
         </a:solidFill>
         <a:effectLst/>
       </p:bgPr>
@@ -4323,20 +4441,20 @@
       <p:grpSpPr/>
       <p:sp>
         <p:nvSpPr>
-          <p:cNvPr id="3" name="장식"/>
+          <p:cNvPr id="3" name="포인트"/>
           <p:cNvSpPr/>
           <p:nvPr/>
         </p:nvSpPr>
         <p:spPr>
           <a:xfrm>
-            <a:off x="0" y="6035040"/>
-            <a:ext cx="1737360" cy="822960"/>
-          </a:xfrm>
-          <a:prstGeom prst="rtTriangle">
+            <a:off x="5958687" y="246888"/>
+            <a:ext cx="274320" cy="274320"/>
+          </a:xfrm>
+          <a:prstGeom prst="round2SameRect">
             <a:avLst/>
           </a:prstGeom>
           <a:solidFill>
-            <a:srgbClr val="EBF7D4"/>
+            <a:srgbClr val="D0ED97"/>
           </a:solidFill>
           <a:ln>
             <a:noFill/>
@@ -4358,14 +4476,14 @@
         </p:nvSpPr>
         <p:spPr>
           <a:xfrm>
-            <a:off x="0" y="6400800"/>
-            <a:ext cx="914400" cy="457200"/>
-          </a:xfrm>
-          <a:prstGeom prst="rtTriangle">
+            <a:off x="5684367" y="1572768"/>
+            <a:ext cx="822960" cy="22860"/>
+          </a:xfrm>
+          <a:prstGeom prst="rect">
             <a:avLst/>
           </a:prstGeom>
           <a:solidFill>
-            <a:srgbClr val="9DBF5A"/>
+            <a:srgbClr val="D0ED97"/>
           </a:solidFill>
           <a:ln>
             <a:noFill/>
@@ -4376,6 +4494,44 @@
           <a:lstStyle/>
           <a:p>
             <a:pPr algn="ctr"/>
+          </a:p>
+        </p:txBody>
+      </p:sp>
+      <p:sp>
+        <p:nvSpPr>
+          <p:cNvPr id="5" name="상단 라벨"/>
+          <p:cNvSpPr txBox="1"/>
+          <p:nvPr/>
+        </p:nvSpPr>
+        <p:spPr>
+          <a:xfrm>
+            <a:off x="640080" y="182880"/>
+            <a:ext cx="3657600" cy="274320"/>
+          </a:xfrm>
+          <a:prstGeom prst="rect">
+            <a:avLst/>
+          </a:prstGeom>
+          <a:noFill/>
+        </p:spPr>
+        <p:txBody>
+          <a:bodyPr wrap="square" lIns="54864" rIns="54864" tIns="27432" bIns="27432" anchor="ctr">
+            <a:noAutofit/>
+          </a:bodyPr>
+          <a:lstStyle/>
+          <a:p>
+            <a:pPr algn="l">
+              <a:lnSpc>
+                <a:spcPct val="115000"/>
+              </a:lnSpc>
+            </a:pPr>
+            <a:r>
+              <a:rPr sz="800" b="1" i="0" spc="250">
+                <a:solidFill>
+                  <a:srgbClr val="8E8780"/>
+                </a:solidFill>
+              </a:rPr>
+              <a:t>INSURANCE CHECK</a:t>
+            </a:r>
           </a:p>
         </p:txBody>
       </p:sp>
@@ -4391,8 +4547,8 @@
         </p:nvSpPr>
         <p:spPr>
           <a:xfrm>
-            <a:off x="640080" y="457200"/>
-            <a:ext cx="9722815" cy="868680"/>
+            <a:off x="1371600" y="640080"/>
+            <a:ext cx="9448495" cy="868680"/>
           </a:xfrm>
         </p:spPr>
         <p:txBody>
@@ -4401,7 +4557,7 @@
           </a:bodyPr>
           <a:lstStyle/>
           <a:p>
-            <a:pPr algn="l">
+            <a:pPr algn="ctr">
               <a:lnSpc>
                 <a:spcPct val="105000"/>
               </a:lnSpc>
@@ -4409,7 +4565,7 @@
             <a:r>
               <a:rPr sz="3000" b="1" i="0">
                 <a:solidFill>
-                  <a:srgbClr val="526728"/>
+                  <a:srgbClr val="26231F"/>
                 </a:solidFill>
               </a:rPr>
               <a:t>가입한 보험 목록</a:t>
@@ -4419,14 +4575,14 @@
       </p:sp>
       <p:graphicFrame>
         <p:nvGraphicFramePr>
-          <p:cNvPr id="5" name="표"/>
+          <p:cNvPr id="6" name="표"/>
           <p:cNvGraphicFramePr>
             <a:graphicFrameLocks noGrp="1"/>
           </p:cNvGraphicFramePr>
           <p:nvPr/>
         </p:nvGraphicFramePr>
         <p:xfrm>
-          <a:off x="640080" y="1600200"/>
+          <a:off x="640080" y="1783080"/>
           <a:ext cx="10911535" cy="4224528"/>
         </p:xfrm>
         <a:graphic>
@@ -4452,7 +4608,7 @@
                       <a:r>
                         <a:rPr sz="1400" b="1">
                           <a:solidFill>
-                            <a:srgbClr val="FFFFFF"/>
+                            <a:srgbClr val="26231F"/>
                           </a:solidFill>
                         </a:rPr>
                         <a:t>보험회사</a:t>
@@ -4462,30 +4618,30 @@
                   <a:tcPr anchor="ctr" marL="73152" marR="73152">
                     <a:lnL w="9525" cap="flat" cmpd="sng" algn="ctr">
                       <a:solidFill>
-                        <a:srgbClr val="9DBF5A"/>
+                        <a:srgbClr val="D0ED97"/>
                       </a:solidFill>
                       <a:prstDash val="solid"/>
                     </a:lnL>
                     <a:lnR w="9525" cap="flat" cmpd="sng" algn="ctr">
                       <a:solidFill>
-                        <a:srgbClr val="9DBF5A"/>
+                        <a:srgbClr val="D0ED97"/>
                       </a:solidFill>
                       <a:prstDash val="solid"/>
                     </a:lnR>
                     <a:lnT w="9525" cap="flat" cmpd="sng" algn="ctr">
                       <a:solidFill>
-                        <a:srgbClr val="9DBF5A"/>
+                        <a:srgbClr val="D0ED97"/>
                       </a:solidFill>
                       <a:prstDash val="solid"/>
                     </a:lnT>
                     <a:lnB w="9525" cap="flat" cmpd="sng" algn="ctr">
                       <a:solidFill>
-                        <a:srgbClr val="9DBF5A"/>
+                        <a:srgbClr val="D0ED97"/>
                       </a:solidFill>
                       <a:prstDash val="solid"/>
                     </a:lnB>
                     <a:solidFill>
-                      <a:srgbClr val="9DBF5A"/>
+                      <a:srgbClr val="D0ED97"/>
                     </a:solidFill>
                   </a:tcPr>
                 </a:tc>
@@ -4498,7 +4654,7 @@
                       <a:r>
                         <a:rPr sz="1400" b="1">
                           <a:solidFill>
-                            <a:srgbClr val="FFFFFF"/>
+                            <a:srgbClr val="26231F"/>
                           </a:solidFill>
                         </a:rPr>
                         <a:t>상품명</a:t>
@@ -4508,30 +4664,30 @@
                   <a:tcPr anchor="ctr" marL="73152" marR="73152">
                     <a:lnL w="9525" cap="flat" cmpd="sng" algn="ctr">
                       <a:solidFill>
-                        <a:srgbClr val="9DBF5A"/>
+                        <a:srgbClr val="D0ED97"/>
                       </a:solidFill>
                       <a:prstDash val="solid"/>
                     </a:lnL>
                     <a:lnR w="9525" cap="flat" cmpd="sng" algn="ctr">
                       <a:solidFill>
-                        <a:srgbClr val="9DBF5A"/>
+                        <a:srgbClr val="D0ED97"/>
                       </a:solidFill>
                       <a:prstDash val="solid"/>
                     </a:lnR>
                     <a:lnT w="9525" cap="flat" cmpd="sng" algn="ctr">
                       <a:solidFill>
-                        <a:srgbClr val="9DBF5A"/>
+                        <a:srgbClr val="D0ED97"/>
                       </a:solidFill>
                       <a:prstDash val="solid"/>
                     </a:lnT>
                     <a:lnB w="9525" cap="flat" cmpd="sng" algn="ctr">
                       <a:solidFill>
-                        <a:srgbClr val="9DBF5A"/>
+                        <a:srgbClr val="D0ED97"/>
                       </a:solidFill>
                       <a:prstDash val="solid"/>
                     </a:lnB>
                     <a:solidFill>
-                      <a:srgbClr val="9DBF5A"/>
+                      <a:srgbClr val="D0ED97"/>
                     </a:solidFill>
                   </a:tcPr>
                 </a:tc>
@@ -4544,7 +4700,7 @@
                       <a:r>
                         <a:rPr sz="1400" b="1">
                           <a:solidFill>
-                            <a:srgbClr val="FFFFFF"/>
+                            <a:srgbClr val="26231F"/>
                           </a:solidFill>
                         </a:rPr>
                         <a:t>종류</a:t>
@@ -4554,30 +4710,30 @@
                   <a:tcPr anchor="ctr" marL="73152" marR="73152">
                     <a:lnL w="9525" cap="flat" cmpd="sng" algn="ctr">
                       <a:solidFill>
-                        <a:srgbClr val="9DBF5A"/>
+                        <a:srgbClr val="D0ED97"/>
                       </a:solidFill>
                       <a:prstDash val="solid"/>
                     </a:lnL>
                     <a:lnR w="9525" cap="flat" cmpd="sng" algn="ctr">
                       <a:solidFill>
-                        <a:srgbClr val="9DBF5A"/>
+                        <a:srgbClr val="D0ED97"/>
                       </a:solidFill>
                       <a:prstDash val="solid"/>
                     </a:lnR>
                     <a:lnT w="9525" cap="flat" cmpd="sng" algn="ctr">
                       <a:solidFill>
-                        <a:srgbClr val="9DBF5A"/>
+                        <a:srgbClr val="D0ED97"/>
                       </a:solidFill>
                       <a:prstDash val="solid"/>
                     </a:lnT>
                     <a:lnB w="9525" cap="flat" cmpd="sng" algn="ctr">
                       <a:solidFill>
-                        <a:srgbClr val="9DBF5A"/>
+                        <a:srgbClr val="D0ED97"/>
                       </a:solidFill>
                       <a:prstDash val="solid"/>
                     </a:lnB>
                     <a:solidFill>
-                      <a:srgbClr val="9DBF5A"/>
+                      <a:srgbClr val="D0ED97"/>
                     </a:solidFill>
                   </a:tcPr>
                 </a:tc>
@@ -4590,7 +4746,7 @@
                       <a:r>
                         <a:rPr sz="1400" b="1">
                           <a:solidFill>
-                            <a:srgbClr val="FFFFFF"/>
+                            <a:srgbClr val="26231F"/>
                           </a:solidFill>
                         </a:rPr>
                         <a:t>만기일</a:t>
@@ -4600,30 +4756,30 @@
                   <a:tcPr anchor="ctr" marL="73152" marR="73152">
                     <a:lnL w="9525" cap="flat" cmpd="sng" algn="ctr">
                       <a:solidFill>
-                        <a:srgbClr val="9DBF5A"/>
+                        <a:srgbClr val="D0ED97"/>
                       </a:solidFill>
                       <a:prstDash val="solid"/>
                     </a:lnL>
                     <a:lnR w="9525" cap="flat" cmpd="sng" algn="ctr">
                       <a:solidFill>
-                        <a:srgbClr val="9DBF5A"/>
+                        <a:srgbClr val="D0ED97"/>
                       </a:solidFill>
                       <a:prstDash val="solid"/>
                     </a:lnR>
                     <a:lnT w="9525" cap="flat" cmpd="sng" algn="ctr">
                       <a:solidFill>
-                        <a:srgbClr val="9DBF5A"/>
+                        <a:srgbClr val="D0ED97"/>
                       </a:solidFill>
                       <a:prstDash val="solid"/>
                     </a:lnT>
                     <a:lnB w="9525" cap="flat" cmpd="sng" algn="ctr">
                       <a:solidFill>
-                        <a:srgbClr val="9DBF5A"/>
+                        <a:srgbClr val="D0ED97"/>
                       </a:solidFill>
                       <a:prstDash val="solid"/>
                     </a:lnB>
                     <a:solidFill>
-                      <a:srgbClr val="9DBF5A"/>
+                      <a:srgbClr val="D0ED97"/>
                     </a:solidFill>
                   </a:tcPr>
                 </a:tc>
@@ -4636,7 +4792,7 @@
                       <a:r>
                         <a:rPr sz="1400" b="1">
                           <a:solidFill>
-                            <a:srgbClr val="FFFFFF"/>
+                            <a:srgbClr val="26231F"/>
                           </a:solidFill>
                         </a:rPr>
                         <a:t>월 보험료</a:t>
@@ -4646,30 +4802,30 @@
                   <a:tcPr anchor="ctr" marL="73152" marR="73152">
                     <a:lnL w="9525" cap="flat" cmpd="sng" algn="ctr">
                       <a:solidFill>
-                        <a:srgbClr val="9DBF5A"/>
+                        <a:srgbClr val="D0ED97"/>
                       </a:solidFill>
                       <a:prstDash val="solid"/>
                     </a:lnL>
                     <a:lnR w="9525" cap="flat" cmpd="sng" algn="ctr">
                       <a:solidFill>
-                        <a:srgbClr val="9DBF5A"/>
+                        <a:srgbClr val="D0ED97"/>
                       </a:solidFill>
                       <a:prstDash val="solid"/>
                     </a:lnR>
                     <a:lnT w="9525" cap="flat" cmpd="sng" algn="ctr">
                       <a:solidFill>
-                        <a:srgbClr val="9DBF5A"/>
+                        <a:srgbClr val="D0ED97"/>
                       </a:solidFill>
                       <a:prstDash val="solid"/>
                     </a:lnT>
                     <a:lnB w="9525" cap="flat" cmpd="sng" algn="ctr">
                       <a:solidFill>
-                        <a:srgbClr val="9DBF5A"/>
+                        <a:srgbClr val="D0ED97"/>
                       </a:solidFill>
                       <a:prstDash val="solid"/>
                     </a:lnB>
                     <a:solidFill>
-                      <a:srgbClr val="9DBF5A"/>
+                      <a:srgbClr val="D0ED97"/>
                     </a:solidFill>
                   </a:tcPr>
                 </a:tc>
@@ -4684,7 +4840,7 @@
                       <a:r>
                         <a:rPr sz="1400" b="0">
                           <a:solidFill>
-                            <a:srgbClr val="2B2B2B"/>
+                            <a:srgbClr val="26231F"/>
                           </a:solidFill>
                         </a:rPr>
                         <a:t/>
@@ -4694,25 +4850,25 @@
                   <a:tcPr anchor="ctr" marL="73152" marR="73152">
                     <a:lnL w="9525" cap="flat" cmpd="sng" algn="ctr">
                       <a:solidFill>
-                        <a:srgbClr val="EBF7D4"/>
+                        <a:srgbClr val="ECFAD1"/>
                       </a:solidFill>
                       <a:prstDash val="solid"/>
                     </a:lnL>
                     <a:lnR w="9525" cap="flat" cmpd="sng" algn="ctr">
                       <a:solidFill>
-                        <a:srgbClr val="EBF7D4"/>
+                        <a:srgbClr val="ECFAD1"/>
                       </a:solidFill>
                       <a:prstDash val="solid"/>
                     </a:lnR>
                     <a:lnT w="9525" cap="flat" cmpd="sng" algn="ctr">
                       <a:solidFill>
-                        <a:srgbClr val="EBF7D4"/>
+                        <a:srgbClr val="ECFAD1"/>
                       </a:solidFill>
                       <a:prstDash val="solid"/>
                     </a:lnT>
                     <a:lnB w="9525" cap="flat" cmpd="sng" algn="ctr">
                       <a:solidFill>
-                        <a:srgbClr val="EBF7D4"/>
+                        <a:srgbClr val="ECFAD1"/>
                       </a:solidFill>
                       <a:prstDash val="solid"/>
                     </a:lnB>
@@ -4730,7 +4886,7 @@
                       <a:r>
                         <a:rPr sz="1400" b="0">
                           <a:solidFill>
-                            <a:srgbClr val="2B2B2B"/>
+                            <a:srgbClr val="26231F"/>
                           </a:solidFill>
                         </a:rPr>
                         <a:t/>
@@ -4740,25 +4896,25 @@
                   <a:tcPr anchor="ctr" marL="73152" marR="73152">
                     <a:lnL w="9525" cap="flat" cmpd="sng" algn="ctr">
                       <a:solidFill>
-                        <a:srgbClr val="EBF7D4"/>
+                        <a:srgbClr val="ECFAD1"/>
                       </a:solidFill>
                       <a:prstDash val="solid"/>
                     </a:lnL>
                     <a:lnR w="9525" cap="flat" cmpd="sng" algn="ctr">
                       <a:solidFill>
-                        <a:srgbClr val="EBF7D4"/>
+                        <a:srgbClr val="ECFAD1"/>
                       </a:solidFill>
                       <a:prstDash val="solid"/>
                     </a:lnR>
                     <a:lnT w="9525" cap="flat" cmpd="sng" algn="ctr">
                       <a:solidFill>
-                        <a:srgbClr val="EBF7D4"/>
+                        <a:srgbClr val="ECFAD1"/>
                       </a:solidFill>
                       <a:prstDash val="solid"/>
                     </a:lnT>
                     <a:lnB w="9525" cap="flat" cmpd="sng" algn="ctr">
                       <a:solidFill>
-                        <a:srgbClr val="EBF7D4"/>
+                        <a:srgbClr val="ECFAD1"/>
                       </a:solidFill>
                       <a:prstDash val="solid"/>
                     </a:lnB>
@@ -4776,7 +4932,7 @@
                       <a:r>
                         <a:rPr sz="1400" b="0">
                           <a:solidFill>
-                            <a:srgbClr val="2B2B2B"/>
+                            <a:srgbClr val="26231F"/>
                           </a:solidFill>
                         </a:rPr>
                         <a:t/>
@@ -4786,25 +4942,25 @@
                   <a:tcPr anchor="ctr" marL="73152" marR="73152">
                     <a:lnL w="9525" cap="flat" cmpd="sng" algn="ctr">
                       <a:solidFill>
-                        <a:srgbClr val="EBF7D4"/>
+                        <a:srgbClr val="ECFAD1"/>
                       </a:solidFill>
                       <a:prstDash val="solid"/>
                     </a:lnL>
                     <a:lnR w="9525" cap="flat" cmpd="sng" algn="ctr">
                       <a:solidFill>
-                        <a:srgbClr val="EBF7D4"/>
+                        <a:srgbClr val="ECFAD1"/>
                       </a:solidFill>
                       <a:prstDash val="solid"/>
                     </a:lnR>
                     <a:lnT w="9525" cap="flat" cmpd="sng" algn="ctr">
                       <a:solidFill>
-                        <a:srgbClr val="EBF7D4"/>
+                        <a:srgbClr val="ECFAD1"/>
                       </a:solidFill>
                       <a:prstDash val="solid"/>
                     </a:lnT>
                     <a:lnB w="9525" cap="flat" cmpd="sng" algn="ctr">
                       <a:solidFill>
-                        <a:srgbClr val="EBF7D4"/>
+                        <a:srgbClr val="ECFAD1"/>
                       </a:solidFill>
                       <a:prstDash val="solid"/>
                     </a:lnB>
@@ -4822,7 +4978,7 @@
                       <a:r>
                         <a:rPr sz="1400" b="0">
                           <a:solidFill>
-                            <a:srgbClr val="2B2B2B"/>
+                            <a:srgbClr val="26231F"/>
                           </a:solidFill>
                         </a:rPr>
                         <a:t/>
@@ -4832,25 +4988,25 @@
                   <a:tcPr anchor="ctr" marL="73152" marR="73152">
                     <a:lnL w="9525" cap="flat" cmpd="sng" algn="ctr">
                       <a:solidFill>
-                        <a:srgbClr val="EBF7D4"/>
+                        <a:srgbClr val="ECFAD1"/>
                       </a:solidFill>
                       <a:prstDash val="solid"/>
                     </a:lnL>
                     <a:lnR w="9525" cap="flat" cmpd="sng" algn="ctr">
                       <a:solidFill>
-                        <a:srgbClr val="EBF7D4"/>
+                        <a:srgbClr val="ECFAD1"/>
                       </a:solidFill>
                       <a:prstDash val="solid"/>
                     </a:lnR>
                     <a:lnT w="9525" cap="flat" cmpd="sng" algn="ctr">
                       <a:solidFill>
-                        <a:srgbClr val="EBF7D4"/>
+                        <a:srgbClr val="ECFAD1"/>
                       </a:solidFill>
                       <a:prstDash val="solid"/>
                     </a:lnT>
                     <a:lnB w="9525" cap="flat" cmpd="sng" algn="ctr">
                       <a:solidFill>
-                        <a:srgbClr val="EBF7D4"/>
+                        <a:srgbClr val="ECFAD1"/>
                       </a:solidFill>
                       <a:prstDash val="solid"/>
                     </a:lnB>
@@ -4868,7 +5024,7 @@
                       <a:r>
                         <a:rPr sz="1400" b="0">
                           <a:solidFill>
-                            <a:srgbClr val="2B2B2B"/>
+                            <a:srgbClr val="26231F"/>
                           </a:solidFill>
                         </a:rPr>
                         <a:t/>
@@ -4878,25 +5034,25 @@
                   <a:tcPr anchor="ctr" marL="73152" marR="73152">
                     <a:lnL w="9525" cap="flat" cmpd="sng" algn="ctr">
                       <a:solidFill>
-                        <a:srgbClr val="EBF7D4"/>
+                        <a:srgbClr val="ECFAD1"/>
                       </a:solidFill>
                       <a:prstDash val="solid"/>
                     </a:lnL>
                     <a:lnR w="9525" cap="flat" cmpd="sng" algn="ctr">
                       <a:solidFill>
-                        <a:srgbClr val="EBF7D4"/>
+                        <a:srgbClr val="ECFAD1"/>
                       </a:solidFill>
                       <a:prstDash val="solid"/>
                     </a:lnR>
                     <a:lnT w="9525" cap="flat" cmpd="sng" algn="ctr">
                       <a:solidFill>
-                        <a:srgbClr val="EBF7D4"/>
+                        <a:srgbClr val="ECFAD1"/>
                       </a:solidFill>
                       <a:prstDash val="solid"/>
                     </a:lnT>
                     <a:lnB w="9525" cap="flat" cmpd="sng" algn="ctr">
                       <a:solidFill>
-                        <a:srgbClr val="EBF7D4"/>
+                        <a:srgbClr val="ECFAD1"/>
                       </a:solidFill>
                       <a:prstDash val="solid"/>
                     </a:lnB>
@@ -4916,7 +5072,7 @@
                       <a:r>
                         <a:rPr sz="1400" b="0">
                           <a:solidFill>
-                            <a:srgbClr val="2B2B2B"/>
+                            <a:srgbClr val="26231F"/>
                           </a:solidFill>
                         </a:rPr>
                         <a:t/>
@@ -4926,30 +5082,30 @@
                   <a:tcPr anchor="ctr" marL="73152" marR="73152">
                     <a:lnL w="9525" cap="flat" cmpd="sng" algn="ctr">
                       <a:solidFill>
-                        <a:srgbClr val="EBF7D4"/>
+                        <a:srgbClr val="ECFAD1"/>
                       </a:solidFill>
                       <a:prstDash val="solid"/>
                     </a:lnL>
                     <a:lnR w="9525" cap="flat" cmpd="sng" algn="ctr">
                       <a:solidFill>
-                        <a:srgbClr val="EBF7D4"/>
+                        <a:srgbClr val="ECFAD1"/>
                       </a:solidFill>
                       <a:prstDash val="solid"/>
                     </a:lnR>
                     <a:lnT w="9525" cap="flat" cmpd="sng" algn="ctr">
                       <a:solidFill>
-                        <a:srgbClr val="EBF7D4"/>
+                        <a:srgbClr val="ECFAD1"/>
                       </a:solidFill>
                       <a:prstDash val="solid"/>
                     </a:lnT>
                     <a:lnB w="9525" cap="flat" cmpd="sng" algn="ctr">
                       <a:solidFill>
-                        <a:srgbClr val="EBF7D4"/>
+                        <a:srgbClr val="ECFAD1"/>
                       </a:solidFill>
                       <a:prstDash val="solid"/>
                     </a:lnB>
                     <a:solidFill>
-                      <a:srgbClr val="F9FCF3"/>
+                      <a:srgbClr val="F7FDEA"/>
                     </a:solidFill>
                   </a:tcPr>
                 </a:tc>
@@ -4962,7 +5118,7 @@
                       <a:r>
                         <a:rPr sz="1400" b="0">
                           <a:solidFill>
-                            <a:srgbClr val="2B2B2B"/>
+                            <a:srgbClr val="26231F"/>
                           </a:solidFill>
                         </a:rPr>
                         <a:t/>
@@ -4972,30 +5128,30 @@
                   <a:tcPr anchor="ctr" marL="73152" marR="73152">
                     <a:lnL w="9525" cap="flat" cmpd="sng" algn="ctr">
                       <a:solidFill>
-                        <a:srgbClr val="EBF7D4"/>
+                        <a:srgbClr val="ECFAD1"/>
                       </a:solidFill>
                       <a:prstDash val="solid"/>
                     </a:lnL>
                     <a:lnR w="9525" cap="flat" cmpd="sng" algn="ctr">
                       <a:solidFill>
-                        <a:srgbClr val="EBF7D4"/>
+                        <a:srgbClr val="ECFAD1"/>
                       </a:solidFill>
                       <a:prstDash val="solid"/>
                     </a:lnR>
                     <a:lnT w="9525" cap="flat" cmpd="sng" algn="ctr">
                       <a:solidFill>
-                        <a:srgbClr val="EBF7D4"/>
+                        <a:srgbClr val="ECFAD1"/>
                       </a:solidFill>
                       <a:prstDash val="solid"/>
                     </a:lnT>
                     <a:lnB w="9525" cap="flat" cmpd="sng" algn="ctr">
                       <a:solidFill>
-                        <a:srgbClr val="EBF7D4"/>
+                        <a:srgbClr val="ECFAD1"/>
                       </a:solidFill>
                       <a:prstDash val="solid"/>
                     </a:lnB>
                     <a:solidFill>
-                      <a:srgbClr val="F9FCF3"/>
+                      <a:srgbClr val="F7FDEA"/>
                     </a:solidFill>
                   </a:tcPr>
                 </a:tc>
@@ -5008,7 +5164,7 @@
                       <a:r>
                         <a:rPr sz="1400" b="0">
                           <a:solidFill>
-                            <a:srgbClr val="2B2B2B"/>
+                            <a:srgbClr val="26231F"/>
                           </a:solidFill>
                         </a:rPr>
                         <a:t/>
@@ -5018,30 +5174,30 @@
                   <a:tcPr anchor="ctr" marL="73152" marR="73152">
                     <a:lnL w="9525" cap="flat" cmpd="sng" algn="ctr">
                       <a:solidFill>
-                        <a:srgbClr val="EBF7D4"/>
+                        <a:srgbClr val="ECFAD1"/>
                       </a:solidFill>
                       <a:prstDash val="solid"/>
                     </a:lnL>
                     <a:lnR w="9525" cap="flat" cmpd="sng" algn="ctr">
                       <a:solidFill>
-                        <a:srgbClr val="EBF7D4"/>
+                        <a:srgbClr val="ECFAD1"/>
                       </a:solidFill>
                       <a:prstDash val="solid"/>
                     </a:lnR>
                     <a:lnT w="9525" cap="flat" cmpd="sng" algn="ctr">
                       <a:solidFill>
-                        <a:srgbClr val="EBF7D4"/>
+                        <a:srgbClr val="ECFAD1"/>
                       </a:solidFill>
                       <a:prstDash val="solid"/>
                     </a:lnT>
                     <a:lnB w="9525" cap="flat" cmpd="sng" algn="ctr">
                       <a:solidFill>
-                        <a:srgbClr val="EBF7D4"/>
+                        <a:srgbClr val="ECFAD1"/>
                       </a:solidFill>
                       <a:prstDash val="solid"/>
                     </a:lnB>
                     <a:solidFill>
-                      <a:srgbClr val="F9FCF3"/>
+                      <a:srgbClr val="F7FDEA"/>
                     </a:solidFill>
                   </a:tcPr>
                 </a:tc>
@@ -5054,7 +5210,7 @@
                       <a:r>
                         <a:rPr sz="1400" b="0">
                           <a:solidFill>
-                            <a:srgbClr val="2B2B2B"/>
+                            <a:srgbClr val="26231F"/>
                           </a:solidFill>
                         </a:rPr>
                         <a:t/>
@@ -5064,30 +5220,30 @@
                   <a:tcPr anchor="ctr" marL="73152" marR="73152">
                     <a:lnL w="9525" cap="flat" cmpd="sng" algn="ctr">
                       <a:solidFill>
-                        <a:srgbClr val="EBF7D4"/>
+                        <a:srgbClr val="ECFAD1"/>
                       </a:solidFill>
                       <a:prstDash val="solid"/>
                     </a:lnL>
                     <a:lnR w="9525" cap="flat" cmpd="sng" algn="ctr">
                       <a:solidFill>
-                        <a:srgbClr val="EBF7D4"/>
+                        <a:srgbClr val="ECFAD1"/>
                       </a:solidFill>
                       <a:prstDash val="solid"/>
                     </a:lnR>
                     <a:lnT w="9525" cap="flat" cmpd="sng" algn="ctr">
                       <a:solidFill>
-                        <a:srgbClr val="EBF7D4"/>
+                        <a:srgbClr val="ECFAD1"/>
                       </a:solidFill>
                       <a:prstDash val="solid"/>
                     </a:lnT>
                     <a:lnB w="9525" cap="flat" cmpd="sng" algn="ctr">
                       <a:solidFill>
-                        <a:srgbClr val="EBF7D4"/>
+                        <a:srgbClr val="ECFAD1"/>
                       </a:solidFill>
                       <a:prstDash val="solid"/>
                     </a:lnB>
                     <a:solidFill>
-                      <a:srgbClr val="F9FCF3"/>
+                      <a:srgbClr val="F7FDEA"/>
                     </a:solidFill>
                   </a:tcPr>
                 </a:tc>
@@ -5100,7 +5256,7 @@
                       <a:r>
                         <a:rPr sz="1400" b="0">
                           <a:solidFill>
-                            <a:srgbClr val="2B2B2B"/>
+                            <a:srgbClr val="26231F"/>
                           </a:solidFill>
                         </a:rPr>
                         <a:t/>
@@ -5110,30 +5266,30 @@
                   <a:tcPr anchor="ctr" marL="73152" marR="73152">
                     <a:lnL w="9525" cap="flat" cmpd="sng" algn="ctr">
                       <a:solidFill>
-                        <a:srgbClr val="EBF7D4"/>
+                        <a:srgbClr val="ECFAD1"/>
                       </a:solidFill>
                       <a:prstDash val="solid"/>
                     </a:lnL>
                     <a:lnR w="9525" cap="flat" cmpd="sng" algn="ctr">
                       <a:solidFill>
-                        <a:srgbClr val="EBF7D4"/>
+                        <a:srgbClr val="ECFAD1"/>
                       </a:solidFill>
                       <a:prstDash val="solid"/>
                     </a:lnR>
                     <a:lnT w="9525" cap="flat" cmpd="sng" algn="ctr">
                       <a:solidFill>
-                        <a:srgbClr val="EBF7D4"/>
+                        <a:srgbClr val="ECFAD1"/>
                       </a:solidFill>
                       <a:prstDash val="solid"/>
                     </a:lnT>
                     <a:lnB w="9525" cap="flat" cmpd="sng" algn="ctr">
                       <a:solidFill>
-                        <a:srgbClr val="EBF7D4"/>
+                        <a:srgbClr val="ECFAD1"/>
                       </a:solidFill>
                       <a:prstDash val="solid"/>
                     </a:lnB>
                     <a:solidFill>
-                      <a:srgbClr val="F9FCF3"/>
+                      <a:srgbClr val="F7FDEA"/>
                     </a:solidFill>
                   </a:tcPr>
                 </a:tc>
@@ -5148,7 +5304,7 @@
                       <a:r>
                         <a:rPr sz="1400" b="0">
                           <a:solidFill>
-                            <a:srgbClr val="2B2B2B"/>
+                            <a:srgbClr val="26231F"/>
                           </a:solidFill>
                         </a:rPr>
                         <a:t/>
@@ -5158,25 +5314,25 @@
                   <a:tcPr anchor="ctr" marL="73152" marR="73152">
                     <a:lnL w="9525" cap="flat" cmpd="sng" algn="ctr">
                       <a:solidFill>
-                        <a:srgbClr val="EBF7D4"/>
+                        <a:srgbClr val="ECFAD1"/>
                       </a:solidFill>
                       <a:prstDash val="solid"/>
                     </a:lnL>
                     <a:lnR w="9525" cap="flat" cmpd="sng" algn="ctr">
                       <a:solidFill>
-                        <a:srgbClr val="EBF7D4"/>
+                        <a:srgbClr val="ECFAD1"/>
                       </a:solidFill>
                       <a:prstDash val="solid"/>
                     </a:lnR>
                     <a:lnT w="9525" cap="flat" cmpd="sng" algn="ctr">
                       <a:solidFill>
-                        <a:srgbClr val="EBF7D4"/>
+                        <a:srgbClr val="ECFAD1"/>
                       </a:solidFill>
                       <a:prstDash val="solid"/>
                     </a:lnT>
                     <a:lnB w="9525" cap="flat" cmpd="sng" algn="ctr">
                       <a:solidFill>
-                        <a:srgbClr val="EBF7D4"/>
+                        <a:srgbClr val="ECFAD1"/>
                       </a:solidFill>
                       <a:prstDash val="solid"/>
                     </a:lnB>
@@ -5194,7 +5350,7 @@
                       <a:r>
                         <a:rPr sz="1400" b="0">
                           <a:solidFill>
-                            <a:srgbClr val="2B2B2B"/>
+                            <a:srgbClr val="26231F"/>
                           </a:solidFill>
                         </a:rPr>
                         <a:t/>
@@ -5204,25 +5360,25 @@
                   <a:tcPr anchor="ctr" marL="73152" marR="73152">
                     <a:lnL w="9525" cap="flat" cmpd="sng" algn="ctr">
                       <a:solidFill>
-                        <a:srgbClr val="EBF7D4"/>
+                        <a:srgbClr val="ECFAD1"/>
                       </a:solidFill>
                       <a:prstDash val="solid"/>
                     </a:lnL>
                     <a:lnR w="9525" cap="flat" cmpd="sng" algn="ctr">
                       <a:solidFill>
-                        <a:srgbClr val="EBF7D4"/>
+                        <a:srgbClr val="ECFAD1"/>
                       </a:solidFill>
                       <a:prstDash val="solid"/>
                     </a:lnR>
                     <a:lnT w="9525" cap="flat" cmpd="sng" algn="ctr">
                       <a:solidFill>
-                        <a:srgbClr val="EBF7D4"/>
+                        <a:srgbClr val="ECFAD1"/>
                       </a:solidFill>
                       <a:prstDash val="solid"/>
                     </a:lnT>
                     <a:lnB w="9525" cap="flat" cmpd="sng" algn="ctr">
                       <a:solidFill>
-                        <a:srgbClr val="EBF7D4"/>
+                        <a:srgbClr val="ECFAD1"/>
                       </a:solidFill>
                       <a:prstDash val="solid"/>
                     </a:lnB>
@@ -5240,7 +5396,7 @@
                       <a:r>
                         <a:rPr sz="1400" b="0">
                           <a:solidFill>
-                            <a:srgbClr val="2B2B2B"/>
+                            <a:srgbClr val="26231F"/>
                           </a:solidFill>
                         </a:rPr>
                         <a:t/>
@@ -5250,25 +5406,25 @@
                   <a:tcPr anchor="ctr" marL="73152" marR="73152">
                     <a:lnL w="9525" cap="flat" cmpd="sng" algn="ctr">
                       <a:solidFill>
-                        <a:srgbClr val="EBF7D4"/>
+                        <a:srgbClr val="ECFAD1"/>
                       </a:solidFill>
                       <a:prstDash val="solid"/>
                     </a:lnL>
                     <a:lnR w="9525" cap="flat" cmpd="sng" algn="ctr">
                       <a:solidFill>
-                        <a:srgbClr val="EBF7D4"/>
+                        <a:srgbClr val="ECFAD1"/>
                       </a:solidFill>
                       <a:prstDash val="solid"/>
                     </a:lnR>
                     <a:lnT w="9525" cap="flat" cmpd="sng" algn="ctr">
                       <a:solidFill>
-                        <a:srgbClr val="EBF7D4"/>
+                        <a:srgbClr val="ECFAD1"/>
                       </a:solidFill>
                       <a:prstDash val="solid"/>
                     </a:lnT>
                     <a:lnB w="9525" cap="flat" cmpd="sng" algn="ctr">
                       <a:solidFill>
-                        <a:srgbClr val="EBF7D4"/>
+                        <a:srgbClr val="ECFAD1"/>
                       </a:solidFill>
                       <a:prstDash val="solid"/>
                     </a:lnB>
@@ -5286,7 +5442,7 @@
                       <a:r>
                         <a:rPr sz="1400" b="0">
                           <a:solidFill>
-                            <a:srgbClr val="2B2B2B"/>
+                            <a:srgbClr val="26231F"/>
                           </a:solidFill>
                         </a:rPr>
                         <a:t/>
@@ -5296,25 +5452,25 @@
                   <a:tcPr anchor="ctr" marL="73152" marR="73152">
                     <a:lnL w="9525" cap="flat" cmpd="sng" algn="ctr">
                       <a:solidFill>
-                        <a:srgbClr val="EBF7D4"/>
+                        <a:srgbClr val="ECFAD1"/>
                       </a:solidFill>
                       <a:prstDash val="solid"/>
                     </a:lnL>
                     <a:lnR w="9525" cap="flat" cmpd="sng" algn="ctr">
                       <a:solidFill>
-                        <a:srgbClr val="EBF7D4"/>
+                        <a:srgbClr val="ECFAD1"/>
                       </a:solidFill>
                       <a:prstDash val="solid"/>
                     </a:lnR>
                     <a:lnT w="9525" cap="flat" cmpd="sng" algn="ctr">
                       <a:solidFill>
-                        <a:srgbClr val="EBF7D4"/>
+                        <a:srgbClr val="ECFAD1"/>
                       </a:solidFill>
                       <a:prstDash val="solid"/>
                     </a:lnT>
                     <a:lnB w="9525" cap="flat" cmpd="sng" algn="ctr">
                       <a:solidFill>
-                        <a:srgbClr val="EBF7D4"/>
+                        <a:srgbClr val="ECFAD1"/>
                       </a:solidFill>
                       <a:prstDash val="solid"/>
                     </a:lnB>
@@ -5332,7 +5488,7 @@
                       <a:r>
                         <a:rPr sz="1400" b="0">
                           <a:solidFill>
-                            <a:srgbClr val="2B2B2B"/>
+                            <a:srgbClr val="26231F"/>
                           </a:solidFill>
                         </a:rPr>
                         <a:t/>
@@ -5342,25 +5498,25 @@
                   <a:tcPr anchor="ctr" marL="73152" marR="73152">
                     <a:lnL w="9525" cap="flat" cmpd="sng" algn="ctr">
                       <a:solidFill>
-                        <a:srgbClr val="EBF7D4"/>
+                        <a:srgbClr val="ECFAD1"/>
                       </a:solidFill>
                       <a:prstDash val="solid"/>
                     </a:lnL>
                     <a:lnR w="9525" cap="flat" cmpd="sng" algn="ctr">
                       <a:solidFill>
-                        <a:srgbClr val="EBF7D4"/>
+                        <a:srgbClr val="ECFAD1"/>
                       </a:solidFill>
                       <a:prstDash val="solid"/>
                     </a:lnR>
                     <a:lnT w="9525" cap="flat" cmpd="sng" algn="ctr">
                       <a:solidFill>
-                        <a:srgbClr val="EBF7D4"/>
+                        <a:srgbClr val="ECFAD1"/>
                       </a:solidFill>
                       <a:prstDash val="solid"/>
                     </a:lnT>
                     <a:lnB w="9525" cap="flat" cmpd="sng" algn="ctr">
                       <a:solidFill>
-                        <a:srgbClr val="EBF7D4"/>
+                        <a:srgbClr val="ECFAD1"/>
                       </a:solidFill>
                       <a:prstDash val="solid"/>
                     </a:lnB>
@@ -5380,7 +5536,7 @@
                       <a:r>
                         <a:rPr sz="1400" b="0">
                           <a:solidFill>
-                            <a:srgbClr val="2B2B2B"/>
+                            <a:srgbClr val="26231F"/>
                           </a:solidFill>
                         </a:rPr>
                         <a:t/>
@@ -5390,30 +5546,30 @@
                   <a:tcPr anchor="ctr" marL="73152" marR="73152">
                     <a:lnL w="9525" cap="flat" cmpd="sng" algn="ctr">
                       <a:solidFill>
-                        <a:srgbClr val="EBF7D4"/>
+                        <a:srgbClr val="ECFAD1"/>
                       </a:solidFill>
                       <a:prstDash val="solid"/>
                     </a:lnL>
                     <a:lnR w="9525" cap="flat" cmpd="sng" algn="ctr">
                       <a:solidFill>
-                        <a:srgbClr val="EBF7D4"/>
+                        <a:srgbClr val="ECFAD1"/>
                       </a:solidFill>
                       <a:prstDash val="solid"/>
                     </a:lnR>
                     <a:lnT w="9525" cap="flat" cmpd="sng" algn="ctr">
                       <a:solidFill>
-                        <a:srgbClr val="EBF7D4"/>
+                        <a:srgbClr val="ECFAD1"/>
                       </a:solidFill>
                       <a:prstDash val="solid"/>
                     </a:lnT>
                     <a:lnB w="9525" cap="flat" cmpd="sng" algn="ctr">
                       <a:solidFill>
-                        <a:srgbClr val="EBF7D4"/>
+                        <a:srgbClr val="ECFAD1"/>
                       </a:solidFill>
                       <a:prstDash val="solid"/>
                     </a:lnB>
                     <a:solidFill>
-                      <a:srgbClr val="F9FCF3"/>
+                      <a:srgbClr val="F7FDEA"/>
                     </a:solidFill>
                   </a:tcPr>
                 </a:tc>
@@ -5426,7 +5582,7 @@
                       <a:r>
                         <a:rPr sz="1400" b="0">
                           <a:solidFill>
-                            <a:srgbClr val="2B2B2B"/>
+                            <a:srgbClr val="26231F"/>
                           </a:solidFill>
                         </a:rPr>
                         <a:t/>
@@ -5436,30 +5592,30 @@
                   <a:tcPr anchor="ctr" marL="73152" marR="73152">
                     <a:lnL w="9525" cap="flat" cmpd="sng" algn="ctr">
                       <a:solidFill>
-                        <a:srgbClr val="EBF7D4"/>
+                        <a:srgbClr val="ECFAD1"/>
                       </a:solidFill>
                       <a:prstDash val="solid"/>
                     </a:lnL>
                     <a:lnR w="9525" cap="flat" cmpd="sng" algn="ctr">
                       <a:solidFill>
-                        <a:srgbClr val="EBF7D4"/>
+                        <a:srgbClr val="ECFAD1"/>
                       </a:solidFill>
                       <a:prstDash val="solid"/>
                     </a:lnR>
                     <a:lnT w="9525" cap="flat" cmpd="sng" algn="ctr">
                       <a:solidFill>
-                        <a:srgbClr val="EBF7D4"/>
+                        <a:srgbClr val="ECFAD1"/>
                       </a:solidFill>
                       <a:prstDash val="solid"/>
                     </a:lnT>
                     <a:lnB w="9525" cap="flat" cmpd="sng" algn="ctr">
                       <a:solidFill>
-                        <a:srgbClr val="EBF7D4"/>
+                        <a:srgbClr val="ECFAD1"/>
                       </a:solidFill>
                       <a:prstDash val="solid"/>
                     </a:lnB>
                     <a:solidFill>
-                      <a:srgbClr val="F9FCF3"/>
+                      <a:srgbClr val="F7FDEA"/>
                     </a:solidFill>
                   </a:tcPr>
                 </a:tc>
@@ -5472,7 +5628,7 @@
                       <a:r>
                         <a:rPr sz="1400" b="0">
                           <a:solidFill>
-                            <a:srgbClr val="2B2B2B"/>
+                            <a:srgbClr val="26231F"/>
                           </a:solidFill>
                         </a:rPr>
                         <a:t/>
@@ -5482,30 +5638,30 @@
                   <a:tcPr anchor="ctr" marL="73152" marR="73152">
                     <a:lnL w="9525" cap="flat" cmpd="sng" algn="ctr">
                       <a:solidFill>
-                        <a:srgbClr val="EBF7D4"/>
+                        <a:srgbClr val="ECFAD1"/>
                       </a:solidFill>
                       <a:prstDash val="solid"/>
                     </a:lnL>
                     <a:lnR w="9525" cap="flat" cmpd="sng" algn="ctr">
                       <a:solidFill>
-                        <a:srgbClr val="EBF7D4"/>
+                        <a:srgbClr val="ECFAD1"/>
                       </a:solidFill>
                       <a:prstDash val="solid"/>
                     </a:lnR>
                     <a:lnT w="9525" cap="flat" cmpd="sng" algn="ctr">
                       <a:solidFill>
-                        <a:srgbClr val="EBF7D4"/>
+                        <a:srgbClr val="ECFAD1"/>
                       </a:solidFill>
                       <a:prstDash val="solid"/>
                     </a:lnT>
                     <a:lnB w="9525" cap="flat" cmpd="sng" algn="ctr">
                       <a:solidFill>
-                        <a:srgbClr val="EBF7D4"/>
+                        <a:srgbClr val="ECFAD1"/>
                       </a:solidFill>
                       <a:prstDash val="solid"/>
                     </a:lnB>
                     <a:solidFill>
-                      <a:srgbClr val="F9FCF3"/>
+                      <a:srgbClr val="F7FDEA"/>
                     </a:solidFill>
                   </a:tcPr>
                 </a:tc>
@@ -5518,7 +5674,7 @@
                       <a:r>
                         <a:rPr sz="1400" b="0">
                           <a:solidFill>
-                            <a:srgbClr val="2B2B2B"/>
+                            <a:srgbClr val="26231F"/>
                           </a:solidFill>
                         </a:rPr>
                         <a:t/>
@@ -5528,30 +5684,30 @@
                   <a:tcPr anchor="ctr" marL="73152" marR="73152">
                     <a:lnL w="9525" cap="flat" cmpd="sng" algn="ctr">
                       <a:solidFill>
-                        <a:srgbClr val="EBF7D4"/>
+                        <a:srgbClr val="ECFAD1"/>
                       </a:solidFill>
                       <a:prstDash val="solid"/>
                     </a:lnL>
                     <a:lnR w="9525" cap="flat" cmpd="sng" algn="ctr">
                       <a:solidFill>
-                        <a:srgbClr val="EBF7D4"/>
+                        <a:srgbClr val="ECFAD1"/>
                       </a:solidFill>
                       <a:prstDash val="solid"/>
                     </a:lnR>
                     <a:lnT w="9525" cap="flat" cmpd="sng" algn="ctr">
                       <a:solidFill>
-                        <a:srgbClr val="EBF7D4"/>
+                        <a:srgbClr val="ECFAD1"/>
                       </a:solidFill>
                       <a:prstDash val="solid"/>
                     </a:lnT>
                     <a:lnB w="9525" cap="flat" cmpd="sng" algn="ctr">
                       <a:solidFill>
-                        <a:srgbClr val="EBF7D4"/>
+                        <a:srgbClr val="ECFAD1"/>
                       </a:solidFill>
                       <a:prstDash val="solid"/>
                     </a:lnB>
                     <a:solidFill>
-                      <a:srgbClr val="F9FCF3"/>
+                      <a:srgbClr val="F7FDEA"/>
                     </a:solidFill>
                   </a:tcPr>
                 </a:tc>
@@ -5564,7 +5720,7 @@
                       <a:r>
                         <a:rPr sz="1400" b="0">
                           <a:solidFill>
-                            <a:srgbClr val="2B2B2B"/>
+                            <a:srgbClr val="26231F"/>
                           </a:solidFill>
                         </a:rPr>
                         <a:t/>
@@ -5574,30 +5730,30 @@
                   <a:tcPr anchor="ctr" marL="73152" marR="73152">
                     <a:lnL w="9525" cap="flat" cmpd="sng" algn="ctr">
                       <a:solidFill>
-                        <a:srgbClr val="EBF7D4"/>
+                        <a:srgbClr val="ECFAD1"/>
                       </a:solidFill>
                       <a:prstDash val="solid"/>
                     </a:lnL>
                     <a:lnR w="9525" cap="flat" cmpd="sng" algn="ctr">
                       <a:solidFill>
-                        <a:srgbClr val="EBF7D4"/>
+                        <a:srgbClr val="ECFAD1"/>
                       </a:solidFill>
                       <a:prstDash val="solid"/>
                     </a:lnR>
                     <a:lnT w="9525" cap="flat" cmpd="sng" algn="ctr">
                       <a:solidFill>
-                        <a:srgbClr val="EBF7D4"/>
+                        <a:srgbClr val="ECFAD1"/>
                       </a:solidFill>
                       <a:prstDash val="solid"/>
                     </a:lnT>
                     <a:lnB w="9525" cap="flat" cmpd="sng" algn="ctr">
                       <a:solidFill>
-                        <a:srgbClr val="EBF7D4"/>
+                        <a:srgbClr val="ECFAD1"/>
                       </a:solidFill>
                       <a:prstDash val="solid"/>
                     </a:lnB>
                     <a:solidFill>
-                      <a:srgbClr val="F9FCF3"/>
+                      <a:srgbClr val="F7FDEA"/>
                     </a:solidFill>
                   </a:tcPr>
                 </a:tc>
@@ -5612,7 +5768,7 @@
                       <a:r>
                         <a:rPr sz="1400" b="0">
                           <a:solidFill>
-                            <a:srgbClr val="2B2B2B"/>
+                            <a:srgbClr val="26231F"/>
                           </a:solidFill>
                         </a:rPr>
                         <a:t/>
@@ -5622,25 +5778,25 @@
                   <a:tcPr anchor="ctr" marL="73152" marR="73152">
                     <a:lnL w="9525" cap="flat" cmpd="sng" algn="ctr">
                       <a:solidFill>
-                        <a:srgbClr val="EBF7D4"/>
+                        <a:srgbClr val="ECFAD1"/>
                       </a:solidFill>
                       <a:prstDash val="solid"/>
                     </a:lnL>
                     <a:lnR w="9525" cap="flat" cmpd="sng" algn="ctr">
                       <a:solidFill>
-                        <a:srgbClr val="EBF7D4"/>
+                        <a:srgbClr val="ECFAD1"/>
                       </a:solidFill>
                       <a:prstDash val="solid"/>
                     </a:lnR>
                     <a:lnT w="9525" cap="flat" cmpd="sng" algn="ctr">
                       <a:solidFill>
-                        <a:srgbClr val="EBF7D4"/>
+                        <a:srgbClr val="ECFAD1"/>
                       </a:solidFill>
                       <a:prstDash val="solid"/>
                     </a:lnT>
                     <a:lnB w="9525" cap="flat" cmpd="sng" algn="ctr">
                       <a:solidFill>
-                        <a:srgbClr val="EBF7D4"/>
+                        <a:srgbClr val="ECFAD1"/>
                       </a:solidFill>
                       <a:prstDash val="solid"/>
                     </a:lnB>
@@ -5658,7 +5814,7 @@
                       <a:r>
                         <a:rPr sz="1400" b="0">
                           <a:solidFill>
-                            <a:srgbClr val="2B2B2B"/>
+                            <a:srgbClr val="26231F"/>
                           </a:solidFill>
                         </a:rPr>
                         <a:t/>
@@ -5668,25 +5824,25 @@
                   <a:tcPr anchor="ctr" marL="73152" marR="73152">
                     <a:lnL w="9525" cap="flat" cmpd="sng" algn="ctr">
                       <a:solidFill>
-                        <a:srgbClr val="EBF7D4"/>
+                        <a:srgbClr val="ECFAD1"/>
                       </a:solidFill>
                       <a:prstDash val="solid"/>
                     </a:lnL>
                     <a:lnR w="9525" cap="flat" cmpd="sng" algn="ctr">
                       <a:solidFill>
-                        <a:srgbClr val="EBF7D4"/>
+                        <a:srgbClr val="ECFAD1"/>
                       </a:solidFill>
                       <a:prstDash val="solid"/>
                     </a:lnR>
                     <a:lnT w="9525" cap="flat" cmpd="sng" algn="ctr">
                       <a:solidFill>
-                        <a:srgbClr val="EBF7D4"/>
+                        <a:srgbClr val="ECFAD1"/>
                       </a:solidFill>
                       <a:prstDash val="solid"/>
                     </a:lnT>
                     <a:lnB w="9525" cap="flat" cmpd="sng" algn="ctr">
                       <a:solidFill>
-                        <a:srgbClr val="EBF7D4"/>
+                        <a:srgbClr val="ECFAD1"/>
                       </a:solidFill>
                       <a:prstDash val="solid"/>
                     </a:lnB>
@@ -5704,7 +5860,7 @@
                       <a:r>
                         <a:rPr sz="1400" b="0">
                           <a:solidFill>
-                            <a:srgbClr val="2B2B2B"/>
+                            <a:srgbClr val="26231F"/>
                           </a:solidFill>
                         </a:rPr>
                         <a:t/>
@@ -5714,25 +5870,25 @@
                   <a:tcPr anchor="ctr" marL="73152" marR="73152">
                     <a:lnL w="9525" cap="flat" cmpd="sng" algn="ctr">
                       <a:solidFill>
-                        <a:srgbClr val="EBF7D4"/>
+                        <a:srgbClr val="ECFAD1"/>
                       </a:solidFill>
                       <a:prstDash val="solid"/>
                     </a:lnL>
                     <a:lnR w="9525" cap="flat" cmpd="sng" algn="ctr">
                       <a:solidFill>
-                        <a:srgbClr val="EBF7D4"/>
+                        <a:srgbClr val="ECFAD1"/>
                       </a:solidFill>
                       <a:prstDash val="solid"/>
                     </a:lnR>
                     <a:lnT w="9525" cap="flat" cmpd="sng" algn="ctr">
                       <a:solidFill>
-                        <a:srgbClr val="EBF7D4"/>
+                        <a:srgbClr val="ECFAD1"/>
                       </a:solidFill>
                       <a:prstDash val="solid"/>
                     </a:lnT>
                     <a:lnB w="9525" cap="flat" cmpd="sng" algn="ctr">
                       <a:solidFill>
-                        <a:srgbClr val="EBF7D4"/>
+                        <a:srgbClr val="ECFAD1"/>
                       </a:solidFill>
                       <a:prstDash val="solid"/>
                     </a:lnB>
@@ -5750,7 +5906,7 @@
                       <a:r>
                         <a:rPr sz="1400" b="0">
                           <a:solidFill>
-                            <a:srgbClr val="2B2B2B"/>
+                            <a:srgbClr val="26231F"/>
                           </a:solidFill>
                         </a:rPr>
                         <a:t/>
@@ -5760,25 +5916,25 @@
                   <a:tcPr anchor="ctr" marL="73152" marR="73152">
                     <a:lnL w="9525" cap="flat" cmpd="sng" algn="ctr">
                       <a:solidFill>
-                        <a:srgbClr val="EBF7D4"/>
+                        <a:srgbClr val="ECFAD1"/>
                       </a:solidFill>
                       <a:prstDash val="solid"/>
                     </a:lnL>
                     <a:lnR w="9525" cap="flat" cmpd="sng" algn="ctr">
                       <a:solidFill>
-                        <a:srgbClr val="EBF7D4"/>
+                        <a:srgbClr val="ECFAD1"/>
                       </a:solidFill>
                       <a:prstDash val="solid"/>
                     </a:lnR>
                     <a:lnT w="9525" cap="flat" cmpd="sng" algn="ctr">
                       <a:solidFill>
-                        <a:srgbClr val="EBF7D4"/>
+                        <a:srgbClr val="ECFAD1"/>
                       </a:solidFill>
                       <a:prstDash val="solid"/>
                     </a:lnT>
                     <a:lnB w="9525" cap="flat" cmpd="sng" algn="ctr">
                       <a:solidFill>
-                        <a:srgbClr val="EBF7D4"/>
+                        <a:srgbClr val="ECFAD1"/>
                       </a:solidFill>
                       <a:prstDash val="solid"/>
                     </a:lnB>
@@ -5796,7 +5952,7 @@
                       <a:r>
                         <a:rPr sz="1400" b="0">
                           <a:solidFill>
-                            <a:srgbClr val="2B2B2B"/>
+                            <a:srgbClr val="26231F"/>
                           </a:solidFill>
                         </a:rPr>
                         <a:t/>
@@ -5806,25 +5962,25 @@
                   <a:tcPr anchor="ctr" marL="73152" marR="73152">
                     <a:lnL w="9525" cap="flat" cmpd="sng" algn="ctr">
                       <a:solidFill>
-                        <a:srgbClr val="EBF7D4"/>
+                        <a:srgbClr val="ECFAD1"/>
                       </a:solidFill>
                       <a:prstDash val="solid"/>
                     </a:lnL>
                     <a:lnR w="9525" cap="flat" cmpd="sng" algn="ctr">
                       <a:solidFill>
-                        <a:srgbClr val="EBF7D4"/>
+                        <a:srgbClr val="ECFAD1"/>
                       </a:solidFill>
                       <a:prstDash val="solid"/>
                     </a:lnR>
                     <a:lnT w="9525" cap="flat" cmpd="sng" algn="ctr">
                       <a:solidFill>
-                        <a:srgbClr val="EBF7D4"/>
+                        <a:srgbClr val="ECFAD1"/>
                       </a:solidFill>
                       <a:prstDash val="solid"/>
                     </a:lnT>
                     <a:lnB w="9525" cap="flat" cmpd="sng" algn="ctr">
                       <a:solidFill>
-                        <a:srgbClr val="EBF7D4"/>
+                        <a:srgbClr val="ECFAD1"/>
                       </a:solidFill>
                       <a:prstDash val="solid"/>
                     </a:lnB>
@@ -5844,7 +6000,7 @@
                       <a:r>
                         <a:rPr sz="1400" b="0">
                           <a:solidFill>
-                            <a:srgbClr val="2B2B2B"/>
+                            <a:srgbClr val="26231F"/>
                           </a:solidFill>
                         </a:rPr>
                         <a:t/>
@@ -5854,30 +6010,30 @@
                   <a:tcPr anchor="ctr" marL="73152" marR="73152">
                     <a:lnL w="9525" cap="flat" cmpd="sng" algn="ctr">
                       <a:solidFill>
-                        <a:srgbClr val="EBF7D4"/>
+                        <a:srgbClr val="ECFAD1"/>
                       </a:solidFill>
                       <a:prstDash val="solid"/>
                     </a:lnL>
                     <a:lnR w="9525" cap="flat" cmpd="sng" algn="ctr">
                       <a:solidFill>
-                        <a:srgbClr val="EBF7D4"/>
+                        <a:srgbClr val="ECFAD1"/>
                       </a:solidFill>
                       <a:prstDash val="solid"/>
                     </a:lnR>
                     <a:lnT w="9525" cap="flat" cmpd="sng" algn="ctr">
                       <a:solidFill>
-                        <a:srgbClr val="EBF7D4"/>
+                        <a:srgbClr val="ECFAD1"/>
                       </a:solidFill>
                       <a:prstDash val="solid"/>
                     </a:lnT>
                     <a:lnB w="9525" cap="flat" cmpd="sng" algn="ctr">
                       <a:solidFill>
-                        <a:srgbClr val="EBF7D4"/>
+                        <a:srgbClr val="ECFAD1"/>
                       </a:solidFill>
                       <a:prstDash val="solid"/>
                     </a:lnB>
                     <a:solidFill>
-                      <a:srgbClr val="F9FCF3"/>
+                      <a:srgbClr val="F7FDEA"/>
                     </a:solidFill>
                   </a:tcPr>
                 </a:tc>
@@ -5890,7 +6046,7 @@
                       <a:r>
                         <a:rPr sz="1400" b="0">
                           <a:solidFill>
-                            <a:srgbClr val="2B2B2B"/>
+                            <a:srgbClr val="26231F"/>
                           </a:solidFill>
                         </a:rPr>
                         <a:t/>
@@ -5900,30 +6056,30 @@
                   <a:tcPr anchor="ctr" marL="73152" marR="73152">
                     <a:lnL w="9525" cap="flat" cmpd="sng" algn="ctr">
                       <a:solidFill>
-                        <a:srgbClr val="EBF7D4"/>
+                        <a:srgbClr val="ECFAD1"/>
                       </a:solidFill>
                       <a:prstDash val="solid"/>
                     </a:lnL>
                     <a:lnR w="9525" cap="flat" cmpd="sng" algn="ctr">
                       <a:solidFill>
-                        <a:srgbClr val="EBF7D4"/>
+                        <a:srgbClr val="ECFAD1"/>
                       </a:solidFill>
                       <a:prstDash val="solid"/>
                     </a:lnR>
                     <a:lnT w="9525" cap="flat" cmpd="sng" algn="ctr">
                       <a:solidFill>
-                        <a:srgbClr val="EBF7D4"/>
+                        <a:srgbClr val="ECFAD1"/>
                       </a:solidFill>
                       <a:prstDash val="solid"/>
                     </a:lnT>
                     <a:lnB w="9525" cap="flat" cmpd="sng" algn="ctr">
                       <a:solidFill>
-                        <a:srgbClr val="EBF7D4"/>
+                        <a:srgbClr val="ECFAD1"/>
                       </a:solidFill>
                       <a:prstDash val="solid"/>
                     </a:lnB>
                     <a:solidFill>
-                      <a:srgbClr val="F9FCF3"/>
+                      <a:srgbClr val="F7FDEA"/>
                     </a:solidFill>
                   </a:tcPr>
                 </a:tc>
@@ -5936,7 +6092,7 @@
                       <a:r>
                         <a:rPr sz="1400" b="0">
                           <a:solidFill>
-                            <a:srgbClr val="2B2B2B"/>
+                            <a:srgbClr val="26231F"/>
                           </a:solidFill>
                         </a:rPr>
                         <a:t/>
@@ -5946,30 +6102,30 @@
                   <a:tcPr anchor="ctr" marL="73152" marR="73152">
                     <a:lnL w="9525" cap="flat" cmpd="sng" algn="ctr">
                       <a:solidFill>
-                        <a:srgbClr val="EBF7D4"/>
+                        <a:srgbClr val="ECFAD1"/>
                       </a:solidFill>
                       <a:prstDash val="solid"/>
                     </a:lnL>
                     <a:lnR w="9525" cap="flat" cmpd="sng" algn="ctr">
                       <a:solidFill>
-                        <a:srgbClr val="EBF7D4"/>
+                        <a:srgbClr val="ECFAD1"/>
                       </a:solidFill>
                       <a:prstDash val="solid"/>
                     </a:lnR>
                     <a:lnT w="9525" cap="flat" cmpd="sng" algn="ctr">
                       <a:solidFill>
-                        <a:srgbClr val="EBF7D4"/>
+                        <a:srgbClr val="ECFAD1"/>
                       </a:solidFill>
                       <a:prstDash val="solid"/>
                     </a:lnT>
                     <a:lnB w="9525" cap="flat" cmpd="sng" algn="ctr">
                       <a:solidFill>
-                        <a:srgbClr val="EBF7D4"/>
+                        <a:srgbClr val="ECFAD1"/>
                       </a:solidFill>
                       <a:prstDash val="solid"/>
                     </a:lnB>
                     <a:solidFill>
-                      <a:srgbClr val="F9FCF3"/>
+                      <a:srgbClr val="F7FDEA"/>
                     </a:solidFill>
                   </a:tcPr>
                 </a:tc>
@@ -5982,7 +6138,7 @@
                       <a:r>
                         <a:rPr sz="1400" b="0">
                           <a:solidFill>
-                            <a:srgbClr val="2B2B2B"/>
+                            <a:srgbClr val="26231F"/>
                           </a:solidFill>
                         </a:rPr>
                         <a:t/>
@@ -5992,30 +6148,30 @@
                   <a:tcPr anchor="ctr" marL="73152" marR="73152">
                     <a:lnL w="9525" cap="flat" cmpd="sng" algn="ctr">
                       <a:solidFill>
-                        <a:srgbClr val="EBF7D4"/>
+                        <a:srgbClr val="ECFAD1"/>
                       </a:solidFill>
                       <a:prstDash val="solid"/>
                     </a:lnL>
                     <a:lnR w="9525" cap="flat" cmpd="sng" algn="ctr">
                       <a:solidFill>
-                        <a:srgbClr val="EBF7D4"/>
+                        <a:srgbClr val="ECFAD1"/>
                       </a:solidFill>
                       <a:prstDash val="solid"/>
                     </a:lnR>
                     <a:lnT w="9525" cap="flat" cmpd="sng" algn="ctr">
                       <a:solidFill>
-                        <a:srgbClr val="EBF7D4"/>
+                        <a:srgbClr val="ECFAD1"/>
                       </a:solidFill>
                       <a:prstDash val="solid"/>
                     </a:lnT>
                     <a:lnB w="9525" cap="flat" cmpd="sng" algn="ctr">
                       <a:solidFill>
-                        <a:srgbClr val="EBF7D4"/>
+                        <a:srgbClr val="ECFAD1"/>
                       </a:solidFill>
                       <a:prstDash val="solid"/>
                     </a:lnB>
                     <a:solidFill>
-                      <a:srgbClr val="F9FCF3"/>
+                      <a:srgbClr val="F7FDEA"/>
                     </a:solidFill>
                   </a:tcPr>
                 </a:tc>
@@ -6028,7 +6184,7 @@
                       <a:r>
                         <a:rPr sz="1400" b="0">
                           <a:solidFill>
-                            <a:srgbClr val="2B2B2B"/>
+                            <a:srgbClr val="26231F"/>
                           </a:solidFill>
                         </a:rPr>
                         <a:t/>
@@ -6038,30 +6194,30 @@
                   <a:tcPr anchor="ctr" marL="73152" marR="73152">
                     <a:lnL w="9525" cap="flat" cmpd="sng" algn="ctr">
                       <a:solidFill>
-                        <a:srgbClr val="EBF7D4"/>
+                        <a:srgbClr val="ECFAD1"/>
                       </a:solidFill>
                       <a:prstDash val="solid"/>
                     </a:lnL>
                     <a:lnR w="9525" cap="flat" cmpd="sng" algn="ctr">
                       <a:solidFill>
-                        <a:srgbClr val="EBF7D4"/>
+                        <a:srgbClr val="ECFAD1"/>
                       </a:solidFill>
                       <a:prstDash val="solid"/>
                     </a:lnR>
                     <a:lnT w="9525" cap="flat" cmpd="sng" algn="ctr">
                       <a:solidFill>
-                        <a:srgbClr val="EBF7D4"/>
+                        <a:srgbClr val="ECFAD1"/>
                       </a:solidFill>
                       <a:prstDash val="solid"/>
                     </a:lnT>
                     <a:lnB w="9525" cap="flat" cmpd="sng" algn="ctr">
                       <a:solidFill>
-                        <a:srgbClr val="EBF7D4"/>
+                        <a:srgbClr val="ECFAD1"/>
                       </a:solidFill>
                       <a:prstDash val="solid"/>
                     </a:lnB>
                     <a:solidFill>
-                      <a:srgbClr val="F9FCF3"/>
+                      <a:srgbClr val="F7FDEA"/>
                     </a:solidFill>
                   </a:tcPr>
                 </a:tc>
@@ -6084,7 +6240,7 @@
     <p:bg>
       <p:bgPr>
         <a:solidFill>
-          <a:srgbClr val="F9FCF3"/>
+          <a:srgbClr val="FCFDFA"/>
         </a:solidFill>
         <a:effectLst/>
       </p:bgPr>
@@ -6098,20 +6254,20 @@
       <p:grpSpPr/>
       <p:sp>
         <p:nvSpPr>
-          <p:cNvPr id="3" name="장식"/>
+          <p:cNvPr id="3" name="포인트"/>
           <p:cNvSpPr/>
           <p:nvPr/>
         </p:nvSpPr>
         <p:spPr>
           <a:xfrm>
-            <a:off x="0" y="6035040"/>
-            <a:ext cx="1737360" cy="822960"/>
-          </a:xfrm>
-          <a:prstGeom prst="rtTriangle">
+            <a:off x="5958687" y="246888"/>
+            <a:ext cx="274320" cy="274320"/>
+          </a:xfrm>
+          <a:prstGeom prst="round2SameRect">
             <a:avLst/>
           </a:prstGeom>
           <a:solidFill>
-            <a:srgbClr val="EBF7D4"/>
+            <a:srgbClr val="D0ED97"/>
           </a:solidFill>
           <a:ln>
             <a:noFill/>
@@ -6133,14 +6289,14 @@
         </p:nvSpPr>
         <p:spPr>
           <a:xfrm>
-            <a:off x="0" y="6400800"/>
-            <a:ext cx="914400" cy="457200"/>
-          </a:xfrm>
-          <a:prstGeom prst="rtTriangle">
+            <a:off x="5684367" y="1572768"/>
+            <a:ext cx="822960" cy="22860"/>
+          </a:xfrm>
+          <a:prstGeom prst="rect">
             <a:avLst/>
           </a:prstGeom>
           <a:solidFill>
-            <a:srgbClr val="9DBF5A"/>
+            <a:srgbClr val="D0ED97"/>
           </a:solidFill>
           <a:ln>
             <a:noFill/>
@@ -6151,6 +6307,44 @@
           <a:lstStyle/>
           <a:p>
             <a:pPr algn="ctr"/>
+          </a:p>
+        </p:txBody>
+      </p:sp>
+      <p:sp>
+        <p:nvSpPr>
+          <p:cNvPr id="5" name="상단 라벨"/>
+          <p:cNvSpPr txBox="1"/>
+          <p:nvPr/>
+        </p:nvSpPr>
+        <p:spPr>
+          <a:xfrm>
+            <a:off x="640080" y="182880"/>
+            <a:ext cx="3657600" cy="274320"/>
+          </a:xfrm>
+          <a:prstGeom prst="rect">
+            <a:avLst/>
+          </a:prstGeom>
+          <a:noFill/>
+        </p:spPr>
+        <p:txBody>
+          <a:bodyPr wrap="square" lIns="54864" rIns="54864" tIns="27432" bIns="27432" anchor="ctr">
+            <a:noAutofit/>
+          </a:bodyPr>
+          <a:lstStyle/>
+          <a:p>
+            <a:pPr algn="l">
+              <a:lnSpc>
+                <a:spcPct val="115000"/>
+              </a:lnSpc>
+            </a:pPr>
+            <a:r>
+              <a:rPr sz="800" b="1" i="0" spc="250">
+                <a:solidFill>
+                  <a:srgbClr val="8E8780"/>
+                </a:solidFill>
+              </a:rPr>
+              <a:t>INSURANCE CHECK</a:t>
+            </a:r>
           </a:p>
         </p:txBody>
       </p:sp>
@@ -6166,8 +6360,8 @@
         </p:nvSpPr>
         <p:spPr>
           <a:xfrm>
-            <a:off x="640080" y="457200"/>
-            <a:ext cx="9722815" cy="868680"/>
+            <a:off x="1371600" y="640080"/>
+            <a:ext cx="9448495" cy="868680"/>
           </a:xfrm>
         </p:spPr>
         <p:txBody>
@@ -6176,7 +6370,7 @@
           </a:bodyPr>
           <a:lstStyle/>
           <a:p>
-            <a:pPr algn="l">
+            <a:pPr algn="ctr">
               <a:lnSpc>
                 <a:spcPct val="105000"/>
               </a:lnSpc>
@@ -6184,7 +6378,7 @@
             <a:r>
               <a:rPr sz="3000" b="1" i="0">
                 <a:solidFill>
-                  <a:srgbClr val="526728"/>
+                  <a:srgbClr val="26231F"/>
                 </a:solidFill>
               </a:rPr>
               <a:t>보장 항목 체크</a:t>
@@ -6194,14 +6388,14 @@
       </p:sp>
       <p:graphicFrame>
         <p:nvGraphicFramePr>
-          <p:cNvPr id="5" name="표"/>
+          <p:cNvPr id="6" name="표"/>
           <p:cNvGraphicFramePr>
             <a:graphicFrameLocks noGrp="1"/>
           </p:cNvGraphicFramePr>
           <p:nvPr/>
         </p:nvGraphicFramePr>
         <p:xfrm>
-          <a:off x="640080" y="1600200"/>
+          <a:off x="640080" y="1783080"/>
           <a:ext cx="10911534" cy="4773168"/>
         </p:xfrm>
         <a:graphic>
@@ -6226,7 +6420,7 @@
                       <a:r>
                         <a:rPr sz="1400" b="1">
                           <a:solidFill>
-                            <a:srgbClr val="FFFFFF"/>
+                            <a:srgbClr val="26231F"/>
                           </a:solidFill>
                         </a:rPr>
                         <a:t>보장 항목</a:t>
@@ -6236,30 +6430,30 @@
                   <a:tcPr anchor="ctr" marL="73152" marR="73152">
                     <a:lnL w="9525" cap="flat" cmpd="sng" algn="ctr">
                       <a:solidFill>
-                        <a:srgbClr val="9DBF5A"/>
+                        <a:srgbClr val="D0ED97"/>
                       </a:solidFill>
                       <a:prstDash val="solid"/>
                     </a:lnL>
                     <a:lnR w="9525" cap="flat" cmpd="sng" algn="ctr">
                       <a:solidFill>
-                        <a:srgbClr val="9DBF5A"/>
+                        <a:srgbClr val="D0ED97"/>
                       </a:solidFill>
                       <a:prstDash val="solid"/>
                     </a:lnR>
                     <a:lnT w="9525" cap="flat" cmpd="sng" algn="ctr">
                       <a:solidFill>
-                        <a:srgbClr val="9DBF5A"/>
+                        <a:srgbClr val="D0ED97"/>
                       </a:solidFill>
                       <a:prstDash val="solid"/>
                     </a:lnT>
                     <a:lnB w="9525" cap="flat" cmpd="sng" algn="ctr">
                       <a:solidFill>
-                        <a:srgbClr val="9DBF5A"/>
+                        <a:srgbClr val="D0ED97"/>
                       </a:solidFill>
                       <a:prstDash val="solid"/>
                     </a:lnB>
                     <a:solidFill>
-                      <a:srgbClr val="9DBF5A"/>
+                      <a:srgbClr val="D0ED97"/>
                     </a:solidFill>
                   </a:tcPr>
                 </a:tc>
@@ -6272,7 +6466,7 @@
                       <a:r>
                         <a:rPr sz="1400" b="1">
                           <a:solidFill>
-                            <a:srgbClr val="FFFFFF"/>
+                            <a:srgbClr val="26231F"/>
                           </a:solidFill>
                         </a:rPr>
                         <a:t>가입 확인</a:t>
@@ -6282,30 +6476,30 @@
                   <a:tcPr anchor="ctr" marL="73152" marR="73152">
                     <a:lnL w="9525" cap="flat" cmpd="sng" algn="ctr">
                       <a:solidFill>
-                        <a:srgbClr val="9DBF5A"/>
+                        <a:srgbClr val="D0ED97"/>
                       </a:solidFill>
                       <a:prstDash val="solid"/>
                     </a:lnL>
                     <a:lnR w="9525" cap="flat" cmpd="sng" algn="ctr">
                       <a:solidFill>
-                        <a:srgbClr val="9DBF5A"/>
+                        <a:srgbClr val="D0ED97"/>
                       </a:solidFill>
                       <a:prstDash val="solid"/>
                     </a:lnR>
                     <a:lnT w="9525" cap="flat" cmpd="sng" algn="ctr">
                       <a:solidFill>
-                        <a:srgbClr val="9DBF5A"/>
+                        <a:srgbClr val="D0ED97"/>
                       </a:solidFill>
                       <a:prstDash val="solid"/>
                     </a:lnT>
                     <a:lnB w="9525" cap="flat" cmpd="sng" algn="ctr">
                       <a:solidFill>
-                        <a:srgbClr val="9DBF5A"/>
+                        <a:srgbClr val="D0ED97"/>
                       </a:solidFill>
                       <a:prstDash val="solid"/>
                     </a:lnB>
                     <a:solidFill>
-                      <a:srgbClr val="9DBF5A"/>
+                      <a:srgbClr val="D0ED97"/>
                     </a:solidFill>
                   </a:tcPr>
                 </a:tc>
@@ -6318,7 +6512,7 @@
                       <a:r>
                         <a:rPr sz="1400" b="1">
                           <a:solidFill>
-                            <a:srgbClr val="FFFFFF"/>
+                            <a:srgbClr val="26231F"/>
                           </a:solidFill>
                         </a:rPr>
                         <a:t>확인 필요</a:t>
@@ -6328,30 +6522,30 @@
                   <a:tcPr anchor="ctr" marL="73152" marR="73152">
                     <a:lnL w="9525" cap="flat" cmpd="sng" algn="ctr">
                       <a:solidFill>
-                        <a:srgbClr val="9DBF5A"/>
+                        <a:srgbClr val="D0ED97"/>
                       </a:solidFill>
                       <a:prstDash val="solid"/>
                     </a:lnL>
                     <a:lnR w="9525" cap="flat" cmpd="sng" algn="ctr">
                       <a:solidFill>
-                        <a:srgbClr val="9DBF5A"/>
+                        <a:srgbClr val="D0ED97"/>
                       </a:solidFill>
                       <a:prstDash val="solid"/>
                     </a:lnR>
                     <a:lnT w="9525" cap="flat" cmpd="sng" algn="ctr">
                       <a:solidFill>
-                        <a:srgbClr val="9DBF5A"/>
+                        <a:srgbClr val="D0ED97"/>
                       </a:solidFill>
                       <a:prstDash val="solid"/>
                     </a:lnT>
                     <a:lnB w="9525" cap="flat" cmpd="sng" algn="ctr">
                       <a:solidFill>
-                        <a:srgbClr val="9DBF5A"/>
+                        <a:srgbClr val="D0ED97"/>
                       </a:solidFill>
                       <a:prstDash val="solid"/>
                     </a:lnB>
                     <a:solidFill>
-                      <a:srgbClr val="9DBF5A"/>
+                      <a:srgbClr val="D0ED97"/>
                     </a:solidFill>
                   </a:tcPr>
                 </a:tc>
@@ -6364,7 +6558,7 @@
                       <a:r>
                         <a:rPr sz="1400" b="1">
                           <a:solidFill>
-                            <a:srgbClr val="FFFFFF"/>
+                            <a:srgbClr val="26231F"/>
                           </a:solidFill>
                         </a:rPr>
                         <a:t>해당 없음</a:t>
@@ -6374,30 +6568,30 @@
                   <a:tcPr anchor="ctr" marL="73152" marR="73152">
                     <a:lnL w="9525" cap="flat" cmpd="sng" algn="ctr">
                       <a:solidFill>
-                        <a:srgbClr val="9DBF5A"/>
+                        <a:srgbClr val="D0ED97"/>
                       </a:solidFill>
                       <a:prstDash val="solid"/>
                     </a:lnL>
                     <a:lnR w="9525" cap="flat" cmpd="sng" algn="ctr">
                       <a:solidFill>
-                        <a:srgbClr val="9DBF5A"/>
+                        <a:srgbClr val="D0ED97"/>
                       </a:solidFill>
                       <a:prstDash val="solid"/>
                     </a:lnR>
                     <a:lnT w="9525" cap="flat" cmpd="sng" algn="ctr">
                       <a:solidFill>
-                        <a:srgbClr val="9DBF5A"/>
+                        <a:srgbClr val="D0ED97"/>
                       </a:solidFill>
                       <a:prstDash val="solid"/>
                     </a:lnT>
                     <a:lnB w="9525" cap="flat" cmpd="sng" algn="ctr">
                       <a:solidFill>
-                        <a:srgbClr val="9DBF5A"/>
+                        <a:srgbClr val="D0ED97"/>
                       </a:solidFill>
                       <a:prstDash val="solid"/>
                     </a:lnB>
                     <a:solidFill>
-                      <a:srgbClr val="9DBF5A"/>
+                      <a:srgbClr val="D0ED97"/>
                     </a:solidFill>
                   </a:tcPr>
                 </a:tc>
@@ -6412,7 +6606,7 @@
                       <a:r>
                         <a:rPr sz="1400" b="1">
                           <a:solidFill>
-                            <a:srgbClr val="526728"/>
+                            <a:srgbClr val="3E4927"/>
                           </a:solidFill>
                         </a:rPr>
                         <a:t>사망·재해</a:t>
@@ -6422,30 +6616,30 @@
                   <a:tcPr anchor="ctr" marL="73152" marR="73152">
                     <a:lnL w="9525" cap="flat" cmpd="sng" algn="ctr">
                       <a:solidFill>
-                        <a:srgbClr val="EBF7D4"/>
+                        <a:srgbClr val="ECFAD1"/>
                       </a:solidFill>
                       <a:prstDash val="solid"/>
                     </a:lnL>
                     <a:lnR w="9525" cap="flat" cmpd="sng" algn="ctr">
                       <a:solidFill>
-                        <a:srgbClr val="EBF7D4"/>
+                        <a:srgbClr val="ECFAD1"/>
                       </a:solidFill>
                       <a:prstDash val="solid"/>
                     </a:lnR>
                     <a:lnT w="9525" cap="flat" cmpd="sng" algn="ctr">
                       <a:solidFill>
-                        <a:srgbClr val="EBF7D4"/>
+                        <a:srgbClr val="ECFAD1"/>
                       </a:solidFill>
                       <a:prstDash val="solid"/>
                     </a:lnT>
                     <a:lnB w="9525" cap="flat" cmpd="sng" algn="ctr">
                       <a:solidFill>
-                        <a:srgbClr val="EBF7D4"/>
+                        <a:srgbClr val="ECFAD1"/>
                       </a:solidFill>
                       <a:prstDash val="solid"/>
                     </a:lnB>
                     <a:solidFill>
-                      <a:srgbClr val="EBF7D4"/>
+                      <a:srgbClr val="ECFAD1"/>
                     </a:solidFill>
                   </a:tcPr>
                 </a:tc>
@@ -6458,7 +6652,7 @@
                       <a:r>
                         <a:rPr sz="1400" b="0">
                           <a:solidFill>
-                            <a:srgbClr val="2B2B2B"/>
+                            <a:srgbClr val="26231F"/>
                           </a:solidFill>
                         </a:rPr>
                         <a:t>□</a:t>
@@ -6468,25 +6662,25 @@
                   <a:tcPr anchor="ctr" marL="73152" marR="73152">
                     <a:lnL w="9525" cap="flat" cmpd="sng" algn="ctr">
                       <a:solidFill>
-                        <a:srgbClr val="EBF7D4"/>
+                        <a:srgbClr val="ECFAD1"/>
                       </a:solidFill>
                       <a:prstDash val="solid"/>
                     </a:lnL>
                     <a:lnR w="9525" cap="flat" cmpd="sng" algn="ctr">
                       <a:solidFill>
-                        <a:srgbClr val="EBF7D4"/>
+                        <a:srgbClr val="ECFAD1"/>
                       </a:solidFill>
                       <a:prstDash val="solid"/>
                     </a:lnR>
                     <a:lnT w="9525" cap="flat" cmpd="sng" algn="ctr">
                       <a:solidFill>
-                        <a:srgbClr val="EBF7D4"/>
+                        <a:srgbClr val="ECFAD1"/>
                       </a:solidFill>
                       <a:prstDash val="solid"/>
                     </a:lnT>
                     <a:lnB w="9525" cap="flat" cmpd="sng" algn="ctr">
                       <a:solidFill>
-                        <a:srgbClr val="EBF7D4"/>
+                        <a:srgbClr val="ECFAD1"/>
                       </a:solidFill>
                       <a:prstDash val="solid"/>
                     </a:lnB>
@@ -6504,7 +6698,7 @@
                       <a:r>
                         <a:rPr sz="1400" b="0">
                           <a:solidFill>
-                            <a:srgbClr val="2B2B2B"/>
+                            <a:srgbClr val="26231F"/>
                           </a:solidFill>
                         </a:rPr>
                         <a:t>□</a:t>
@@ -6514,25 +6708,25 @@
                   <a:tcPr anchor="ctr" marL="73152" marR="73152">
                     <a:lnL w="9525" cap="flat" cmpd="sng" algn="ctr">
                       <a:solidFill>
-                        <a:srgbClr val="EBF7D4"/>
+                        <a:srgbClr val="ECFAD1"/>
                       </a:solidFill>
                       <a:prstDash val="solid"/>
                     </a:lnL>
                     <a:lnR w="9525" cap="flat" cmpd="sng" algn="ctr">
                       <a:solidFill>
-                        <a:srgbClr val="EBF7D4"/>
+                        <a:srgbClr val="ECFAD1"/>
                       </a:solidFill>
                       <a:prstDash val="solid"/>
                     </a:lnR>
                     <a:lnT w="9525" cap="flat" cmpd="sng" algn="ctr">
                       <a:solidFill>
-                        <a:srgbClr val="EBF7D4"/>
+                        <a:srgbClr val="ECFAD1"/>
                       </a:solidFill>
                       <a:prstDash val="solid"/>
                     </a:lnT>
                     <a:lnB w="9525" cap="flat" cmpd="sng" algn="ctr">
                       <a:solidFill>
-                        <a:srgbClr val="EBF7D4"/>
+                        <a:srgbClr val="ECFAD1"/>
                       </a:solidFill>
                       <a:prstDash val="solid"/>
                     </a:lnB>
@@ -6550,7 +6744,7 @@
                       <a:r>
                         <a:rPr sz="1400" b="0">
                           <a:solidFill>
-                            <a:srgbClr val="2B2B2B"/>
+                            <a:srgbClr val="26231F"/>
                           </a:solidFill>
                         </a:rPr>
                         <a:t>□</a:t>
@@ -6560,25 +6754,25 @@
                   <a:tcPr anchor="ctr" marL="73152" marR="73152">
                     <a:lnL w="9525" cap="flat" cmpd="sng" algn="ctr">
                       <a:solidFill>
-                        <a:srgbClr val="EBF7D4"/>
+                        <a:srgbClr val="ECFAD1"/>
                       </a:solidFill>
                       <a:prstDash val="solid"/>
                     </a:lnL>
                     <a:lnR w="9525" cap="flat" cmpd="sng" algn="ctr">
                       <a:solidFill>
-                        <a:srgbClr val="EBF7D4"/>
+                        <a:srgbClr val="ECFAD1"/>
                       </a:solidFill>
                       <a:prstDash val="solid"/>
                     </a:lnR>
                     <a:lnT w="9525" cap="flat" cmpd="sng" algn="ctr">
                       <a:solidFill>
-                        <a:srgbClr val="EBF7D4"/>
+                        <a:srgbClr val="ECFAD1"/>
                       </a:solidFill>
                       <a:prstDash val="solid"/>
                     </a:lnT>
                     <a:lnB w="9525" cap="flat" cmpd="sng" algn="ctr">
                       <a:solidFill>
-                        <a:srgbClr val="EBF7D4"/>
+                        <a:srgbClr val="ECFAD1"/>
                       </a:solidFill>
                       <a:prstDash val="solid"/>
                     </a:lnB>
@@ -6598,7 +6792,7 @@
                       <a:r>
                         <a:rPr sz="1400" b="1">
                           <a:solidFill>
-                            <a:srgbClr val="526728"/>
+                            <a:srgbClr val="3E4927"/>
                           </a:solidFill>
                         </a:rPr>
                         <a:t>질병 진단</a:t>
@@ -6608,30 +6802,30 @@
                   <a:tcPr anchor="ctr" marL="73152" marR="73152">
                     <a:lnL w="9525" cap="flat" cmpd="sng" algn="ctr">
                       <a:solidFill>
-                        <a:srgbClr val="EBF7D4"/>
+                        <a:srgbClr val="ECFAD1"/>
                       </a:solidFill>
                       <a:prstDash val="solid"/>
                     </a:lnL>
                     <a:lnR w="9525" cap="flat" cmpd="sng" algn="ctr">
                       <a:solidFill>
-                        <a:srgbClr val="EBF7D4"/>
+                        <a:srgbClr val="ECFAD1"/>
                       </a:solidFill>
                       <a:prstDash val="solid"/>
                     </a:lnR>
                     <a:lnT w="9525" cap="flat" cmpd="sng" algn="ctr">
                       <a:solidFill>
-                        <a:srgbClr val="EBF7D4"/>
+                        <a:srgbClr val="ECFAD1"/>
                       </a:solidFill>
                       <a:prstDash val="solid"/>
                     </a:lnT>
                     <a:lnB w="9525" cap="flat" cmpd="sng" algn="ctr">
                       <a:solidFill>
-                        <a:srgbClr val="EBF7D4"/>
+                        <a:srgbClr val="ECFAD1"/>
                       </a:solidFill>
                       <a:prstDash val="solid"/>
                     </a:lnB>
                     <a:solidFill>
-                      <a:srgbClr val="EBF7D4"/>
+                      <a:srgbClr val="ECFAD1"/>
                     </a:solidFill>
                   </a:tcPr>
                 </a:tc>
@@ -6644,7 +6838,7 @@
                       <a:r>
                         <a:rPr sz="1400" b="0">
                           <a:solidFill>
-                            <a:srgbClr val="2B2B2B"/>
+                            <a:srgbClr val="26231F"/>
                           </a:solidFill>
                         </a:rPr>
                         <a:t>□</a:t>
@@ -6654,30 +6848,30 @@
                   <a:tcPr anchor="ctr" marL="73152" marR="73152">
                     <a:lnL w="9525" cap="flat" cmpd="sng" algn="ctr">
                       <a:solidFill>
-                        <a:srgbClr val="EBF7D4"/>
+                        <a:srgbClr val="ECFAD1"/>
                       </a:solidFill>
                       <a:prstDash val="solid"/>
                     </a:lnL>
                     <a:lnR w="9525" cap="flat" cmpd="sng" algn="ctr">
                       <a:solidFill>
-                        <a:srgbClr val="EBF7D4"/>
+                        <a:srgbClr val="ECFAD1"/>
                       </a:solidFill>
                       <a:prstDash val="solid"/>
                     </a:lnR>
                     <a:lnT w="9525" cap="flat" cmpd="sng" algn="ctr">
                       <a:solidFill>
-                        <a:srgbClr val="EBF7D4"/>
+                        <a:srgbClr val="ECFAD1"/>
                       </a:solidFill>
                       <a:prstDash val="solid"/>
                     </a:lnT>
                     <a:lnB w="9525" cap="flat" cmpd="sng" algn="ctr">
                       <a:solidFill>
-                        <a:srgbClr val="EBF7D4"/>
+                        <a:srgbClr val="ECFAD1"/>
                       </a:solidFill>
                       <a:prstDash val="solid"/>
                     </a:lnB>
                     <a:solidFill>
-                      <a:srgbClr val="F9FCF3"/>
+                      <a:srgbClr val="F7FDEA"/>
                     </a:solidFill>
                   </a:tcPr>
                 </a:tc>
@@ -6690,7 +6884,7 @@
                       <a:r>
                         <a:rPr sz="1400" b="0">
                           <a:solidFill>
-                            <a:srgbClr val="2B2B2B"/>
+                            <a:srgbClr val="26231F"/>
                           </a:solidFill>
                         </a:rPr>
                         <a:t>□</a:t>
@@ -6700,30 +6894,30 @@
                   <a:tcPr anchor="ctr" marL="73152" marR="73152">
                     <a:lnL w="9525" cap="flat" cmpd="sng" algn="ctr">
                       <a:solidFill>
-                        <a:srgbClr val="EBF7D4"/>
+                        <a:srgbClr val="ECFAD1"/>
                       </a:solidFill>
                       <a:prstDash val="solid"/>
                     </a:lnL>
                     <a:lnR w="9525" cap="flat" cmpd="sng" algn="ctr">
                       <a:solidFill>
-                        <a:srgbClr val="EBF7D4"/>
+                        <a:srgbClr val="ECFAD1"/>
                       </a:solidFill>
                       <a:prstDash val="solid"/>
                     </a:lnR>
                     <a:lnT w="9525" cap="flat" cmpd="sng" algn="ctr">
                       <a:solidFill>
-                        <a:srgbClr val="EBF7D4"/>
+                        <a:srgbClr val="ECFAD1"/>
                       </a:solidFill>
                       <a:prstDash val="solid"/>
                     </a:lnT>
                     <a:lnB w="9525" cap="flat" cmpd="sng" algn="ctr">
                       <a:solidFill>
-                        <a:srgbClr val="EBF7D4"/>
+                        <a:srgbClr val="ECFAD1"/>
                       </a:solidFill>
                       <a:prstDash val="solid"/>
                     </a:lnB>
                     <a:solidFill>
-                      <a:srgbClr val="F9FCF3"/>
+                      <a:srgbClr val="F7FDEA"/>
                     </a:solidFill>
                   </a:tcPr>
                 </a:tc>
@@ -6736,7 +6930,7 @@
                       <a:r>
                         <a:rPr sz="1400" b="0">
                           <a:solidFill>
-                            <a:srgbClr val="2B2B2B"/>
+                            <a:srgbClr val="26231F"/>
                           </a:solidFill>
                         </a:rPr>
                         <a:t>□</a:t>
@@ -6746,30 +6940,30 @@
                   <a:tcPr anchor="ctr" marL="73152" marR="73152">
                     <a:lnL w="9525" cap="flat" cmpd="sng" algn="ctr">
                       <a:solidFill>
-                        <a:srgbClr val="EBF7D4"/>
+                        <a:srgbClr val="ECFAD1"/>
                       </a:solidFill>
                       <a:prstDash val="solid"/>
                     </a:lnL>
                     <a:lnR w="9525" cap="flat" cmpd="sng" algn="ctr">
                       <a:solidFill>
-                        <a:srgbClr val="EBF7D4"/>
+                        <a:srgbClr val="ECFAD1"/>
                       </a:solidFill>
                       <a:prstDash val="solid"/>
                     </a:lnR>
                     <a:lnT w="9525" cap="flat" cmpd="sng" algn="ctr">
                       <a:solidFill>
-                        <a:srgbClr val="EBF7D4"/>
+                        <a:srgbClr val="ECFAD1"/>
                       </a:solidFill>
                       <a:prstDash val="solid"/>
                     </a:lnT>
                     <a:lnB w="9525" cap="flat" cmpd="sng" algn="ctr">
                       <a:solidFill>
-                        <a:srgbClr val="EBF7D4"/>
+                        <a:srgbClr val="ECFAD1"/>
                       </a:solidFill>
                       <a:prstDash val="solid"/>
                     </a:lnB>
                     <a:solidFill>
-                      <a:srgbClr val="F9FCF3"/>
+                      <a:srgbClr val="F7FDEA"/>
                     </a:solidFill>
                   </a:tcPr>
                 </a:tc>
@@ -6784,7 +6978,7 @@
                       <a:r>
                         <a:rPr sz="1400" b="1">
                           <a:solidFill>
-                            <a:srgbClr val="526728"/>
+                            <a:srgbClr val="3E4927"/>
                           </a:solidFill>
                         </a:rPr>
                         <a:t>암</a:t>
@@ -6794,30 +6988,30 @@
                   <a:tcPr anchor="ctr" marL="73152" marR="73152">
                     <a:lnL w="9525" cap="flat" cmpd="sng" algn="ctr">
                       <a:solidFill>
-                        <a:srgbClr val="EBF7D4"/>
+                        <a:srgbClr val="ECFAD1"/>
                       </a:solidFill>
                       <a:prstDash val="solid"/>
                     </a:lnL>
                     <a:lnR w="9525" cap="flat" cmpd="sng" algn="ctr">
                       <a:solidFill>
-                        <a:srgbClr val="EBF7D4"/>
+                        <a:srgbClr val="ECFAD1"/>
                       </a:solidFill>
                       <a:prstDash val="solid"/>
                     </a:lnR>
                     <a:lnT w="9525" cap="flat" cmpd="sng" algn="ctr">
                       <a:solidFill>
-                        <a:srgbClr val="EBF7D4"/>
+                        <a:srgbClr val="ECFAD1"/>
                       </a:solidFill>
                       <a:prstDash val="solid"/>
                     </a:lnT>
                     <a:lnB w="9525" cap="flat" cmpd="sng" algn="ctr">
                       <a:solidFill>
-                        <a:srgbClr val="EBF7D4"/>
+                        <a:srgbClr val="ECFAD1"/>
                       </a:solidFill>
                       <a:prstDash val="solid"/>
                     </a:lnB>
                     <a:solidFill>
-                      <a:srgbClr val="EBF7D4"/>
+                      <a:srgbClr val="ECFAD1"/>
                     </a:solidFill>
                   </a:tcPr>
                 </a:tc>
@@ -6830,7 +7024,7 @@
                       <a:r>
                         <a:rPr sz="1400" b="0">
                           <a:solidFill>
-                            <a:srgbClr val="2B2B2B"/>
+                            <a:srgbClr val="26231F"/>
                           </a:solidFill>
                         </a:rPr>
                         <a:t>□</a:t>
@@ -6840,25 +7034,25 @@
                   <a:tcPr anchor="ctr" marL="73152" marR="73152">
                     <a:lnL w="9525" cap="flat" cmpd="sng" algn="ctr">
                       <a:solidFill>
-                        <a:srgbClr val="EBF7D4"/>
+                        <a:srgbClr val="ECFAD1"/>
                       </a:solidFill>
                       <a:prstDash val="solid"/>
                     </a:lnL>
                     <a:lnR w="9525" cap="flat" cmpd="sng" algn="ctr">
                       <a:solidFill>
-                        <a:srgbClr val="EBF7D4"/>
+                        <a:srgbClr val="ECFAD1"/>
                       </a:solidFill>
                       <a:prstDash val="solid"/>
                     </a:lnR>
                     <a:lnT w="9525" cap="flat" cmpd="sng" algn="ctr">
                       <a:solidFill>
-                        <a:srgbClr val="EBF7D4"/>
+                        <a:srgbClr val="ECFAD1"/>
                       </a:solidFill>
                       <a:prstDash val="solid"/>
                     </a:lnT>
                     <a:lnB w="9525" cap="flat" cmpd="sng" algn="ctr">
                       <a:solidFill>
-                        <a:srgbClr val="EBF7D4"/>
+                        <a:srgbClr val="ECFAD1"/>
                       </a:solidFill>
                       <a:prstDash val="solid"/>
                     </a:lnB>
@@ -6876,7 +7070,7 @@
                       <a:r>
                         <a:rPr sz="1400" b="0">
                           <a:solidFill>
-                            <a:srgbClr val="2B2B2B"/>
+                            <a:srgbClr val="26231F"/>
                           </a:solidFill>
                         </a:rPr>
                         <a:t>□</a:t>
@@ -6886,25 +7080,25 @@
                   <a:tcPr anchor="ctr" marL="73152" marR="73152">
                     <a:lnL w="9525" cap="flat" cmpd="sng" algn="ctr">
                       <a:solidFill>
-                        <a:srgbClr val="EBF7D4"/>
+                        <a:srgbClr val="ECFAD1"/>
                       </a:solidFill>
                       <a:prstDash val="solid"/>
                     </a:lnL>
                     <a:lnR w="9525" cap="flat" cmpd="sng" algn="ctr">
                       <a:solidFill>
-                        <a:srgbClr val="EBF7D4"/>
+                        <a:srgbClr val="ECFAD1"/>
                       </a:solidFill>
                       <a:prstDash val="solid"/>
                     </a:lnR>
                     <a:lnT w="9525" cap="flat" cmpd="sng" algn="ctr">
                       <a:solidFill>
-                        <a:srgbClr val="EBF7D4"/>
+                        <a:srgbClr val="ECFAD1"/>
                       </a:solidFill>
                       <a:prstDash val="solid"/>
                     </a:lnT>
                     <a:lnB w="9525" cap="flat" cmpd="sng" algn="ctr">
                       <a:solidFill>
-                        <a:srgbClr val="EBF7D4"/>
+                        <a:srgbClr val="ECFAD1"/>
                       </a:solidFill>
                       <a:prstDash val="solid"/>
                     </a:lnB>
@@ -6922,7 +7116,7 @@
                       <a:r>
                         <a:rPr sz="1400" b="0">
                           <a:solidFill>
-                            <a:srgbClr val="2B2B2B"/>
+                            <a:srgbClr val="26231F"/>
                           </a:solidFill>
                         </a:rPr>
                         <a:t>□</a:t>
@@ -6932,25 +7126,25 @@
                   <a:tcPr anchor="ctr" marL="73152" marR="73152">
                     <a:lnL w="9525" cap="flat" cmpd="sng" algn="ctr">
                       <a:solidFill>
-                        <a:srgbClr val="EBF7D4"/>
+                        <a:srgbClr val="ECFAD1"/>
                       </a:solidFill>
                       <a:prstDash val="solid"/>
                     </a:lnL>
                     <a:lnR w="9525" cap="flat" cmpd="sng" algn="ctr">
                       <a:solidFill>
-                        <a:srgbClr val="EBF7D4"/>
+                        <a:srgbClr val="ECFAD1"/>
                       </a:solidFill>
                       <a:prstDash val="solid"/>
                     </a:lnR>
                     <a:lnT w="9525" cap="flat" cmpd="sng" algn="ctr">
                       <a:solidFill>
-                        <a:srgbClr val="EBF7D4"/>
+                        <a:srgbClr val="ECFAD1"/>
                       </a:solidFill>
                       <a:prstDash val="solid"/>
                     </a:lnT>
                     <a:lnB w="9525" cap="flat" cmpd="sng" algn="ctr">
                       <a:solidFill>
-                        <a:srgbClr val="EBF7D4"/>
+                        <a:srgbClr val="ECFAD1"/>
                       </a:solidFill>
                       <a:prstDash val="solid"/>
                     </a:lnB>
@@ -6970,7 +7164,7 @@
                       <a:r>
                         <a:rPr sz="1400" b="1">
                           <a:solidFill>
-                            <a:srgbClr val="526728"/>
+                            <a:srgbClr val="3E4927"/>
                           </a:solidFill>
                         </a:rPr>
                         <a:t>뇌·심장</a:t>
@@ -6980,30 +7174,30 @@
                   <a:tcPr anchor="ctr" marL="73152" marR="73152">
                     <a:lnL w="9525" cap="flat" cmpd="sng" algn="ctr">
                       <a:solidFill>
-                        <a:srgbClr val="EBF7D4"/>
+                        <a:srgbClr val="ECFAD1"/>
                       </a:solidFill>
                       <a:prstDash val="solid"/>
                     </a:lnL>
                     <a:lnR w="9525" cap="flat" cmpd="sng" algn="ctr">
                       <a:solidFill>
-                        <a:srgbClr val="EBF7D4"/>
+                        <a:srgbClr val="ECFAD1"/>
                       </a:solidFill>
                       <a:prstDash val="solid"/>
                     </a:lnR>
                     <a:lnT w="9525" cap="flat" cmpd="sng" algn="ctr">
                       <a:solidFill>
-                        <a:srgbClr val="EBF7D4"/>
+                        <a:srgbClr val="ECFAD1"/>
                       </a:solidFill>
                       <a:prstDash val="solid"/>
                     </a:lnT>
                     <a:lnB w="9525" cap="flat" cmpd="sng" algn="ctr">
                       <a:solidFill>
-                        <a:srgbClr val="EBF7D4"/>
+                        <a:srgbClr val="ECFAD1"/>
                       </a:solidFill>
                       <a:prstDash val="solid"/>
                     </a:lnB>
                     <a:solidFill>
-                      <a:srgbClr val="EBF7D4"/>
+                      <a:srgbClr val="ECFAD1"/>
                     </a:solidFill>
                   </a:tcPr>
                 </a:tc>
@@ -7016,7 +7210,7 @@
                       <a:r>
                         <a:rPr sz="1400" b="0">
                           <a:solidFill>
-                            <a:srgbClr val="2B2B2B"/>
+                            <a:srgbClr val="26231F"/>
                           </a:solidFill>
                         </a:rPr>
                         <a:t>□</a:t>
@@ -7026,30 +7220,30 @@
                   <a:tcPr anchor="ctr" marL="73152" marR="73152">
                     <a:lnL w="9525" cap="flat" cmpd="sng" algn="ctr">
                       <a:solidFill>
-                        <a:srgbClr val="EBF7D4"/>
+                        <a:srgbClr val="ECFAD1"/>
                       </a:solidFill>
                       <a:prstDash val="solid"/>
                     </a:lnL>
                     <a:lnR w="9525" cap="flat" cmpd="sng" algn="ctr">
                       <a:solidFill>
-                        <a:srgbClr val="EBF7D4"/>
+                        <a:srgbClr val="ECFAD1"/>
                       </a:solidFill>
                       <a:prstDash val="solid"/>
                     </a:lnR>
                     <a:lnT w="9525" cap="flat" cmpd="sng" algn="ctr">
                       <a:solidFill>
-                        <a:srgbClr val="EBF7D4"/>
+                        <a:srgbClr val="ECFAD1"/>
                       </a:solidFill>
                       <a:prstDash val="solid"/>
                     </a:lnT>
                     <a:lnB w="9525" cap="flat" cmpd="sng" algn="ctr">
                       <a:solidFill>
-                        <a:srgbClr val="EBF7D4"/>
+                        <a:srgbClr val="ECFAD1"/>
                       </a:solidFill>
                       <a:prstDash val="solid"/>
                     </a:lnB>
                     <a:solidFill>
-                      <a:srgbClr val="F9FCF3"/>
+                      <a:srgbClr val="F7FDEA"/>
                     </a:solidFill>
                   </a:tcPr>
                 </a:tc>
@@ -7062,7 +7256,7 @@
                       <a:r>
                         <a:rPr sz="1400" b="0">
                           <a:solidFill>
-                            <a:srgbClr val="2B2B2B"/>
+                            <a:srgbClr val="26231F"/>
                           </a:solidFill>
                         </a:rPr>
                         <a:t>□</a:t>
@@ -7072,30 +7266,30 @@
                   <a:tcPr anchor="ctr" marL="73152" marR="73152">
                     <a:lnL w="9525" cap="flat" cmpd="sng" algn="ctr">
                       <a:solidFill>
-                        <a:srgbClr val="EBF7D4"/>
+                        <a:srgbClr val="ECFAD1"/>
                       </a:solidFill>
                       <a:prstDash val="solid"/>
                     </a:lnL>
                     <a:lnR w="9525" cap="flat" cmpd="sng" algn="ctr">
                       <a:solidFill>
-                        <a:srgbClr val="EBF7D4"/>
+                        <a:srgbClr val="ECFAD1"/>
                       </a:solidFill>
                       <a:prstDash val="solid"/>
                     </a:lnR>
                     <a:lnT w="9525" cap="flat" cmpd="sng" algn="ctr">
                       <a:solidFill>
-                        <a:srgbClr val="EBF7D4"/>
+                        <a:srgbClr val="ECFAD1"/>
                       </a:solidFill>
                       <a:prstDash val="solid"/>
                     </a:lnT>
                     <a:lnB w="9525" cap="flat" cmpd="sng" algn="ctr">
                       <a:solidFill>
-                        <a:srgbClr val="EBF7D4"/>
+                        <a:srgbClr val="ECFAD1"/>
                       </a:solidFill>
                       <a:prstDash val="solid"/>
                     </a:lnB>
                     <a:solidFill>
-                      <a:srgbClr val="F9FCF3"/>
+                      <a:srgbClr val="F7FDEA"/>
                     </a:solidFill>
                   </a:tcPr>
                 </a:tc>
@@ -7108,7 +7302,7 @@
                       <a:r>
                         <a:rPr sz="1400" b="0">
                           <a:solidFill>
-                            <a:srgbClr val="2B2B2B"/>
+                            <a:srgbClr val="26231F"/>
                           </a:solidFill>
                         </a:rPr>
                         <a:t>□</a:t>
@@ -7118,30 +7312,30 @@
                   <a:tcPr anchor="ctr" marL="73152" marR="73152">
                     <a:lnL w="9525" cap="flat" cmpd="sng" algn="ctr">
                       <a:solidFill>
-                        <a:srgbClr val="EBF7D4"/>
+                        <a:srgbClr val="ECFAD1"/>
                       </a:solidFill>
                       <a:prstDash val="solid"/>
                     </a:lnL>
                     <a:lnR w="9525" cap="flat" cmpd="sng" algn="ctr">
                       <a:solidFill>
-                        <a:srgbClr val="EBF7D4"/>
+                        <a:srgbClr val="ECFAD1"/>
                       </a:solidFill>
                       <a:prstDash val="solid"/>
                     </a:lnR>
                     <a:lnT w="9525" cap="flat" cmpd="sng" algn="ctr">
                       <a:solidFill>
-                        <a:srgbClr val="EBF7D4"/>
+                        <a:srgbClr val="ECFAD1"/>
                       </a:solidFill>
                       <a:prstDash val="solid"/>
                     </a:lnT>
                     <a:lnB w="9525" cap="flat" cmpd="sng" algn="ctr">
                       <a:solidFill>
-                        <a:srgbClr val="EBF7D4"/>
+                        <a:srgbClr val="ECFAD1"/>
                       </a:solidFill>
                       <a:prstDash val="solid"/>
                     </a:lnB>
                     <a:solidFill>
-                      <a:srgbClr val="F9FCF3"/>
+                      <a:srgbClr val="F7FDEA"/>
                     </a:solidFill>
                   </a:tcPr>
                 </a:tc>
@@ -7156,7 +7350,7 @@
                       <a:r>
                         <a:rPr sz="1400" b="1">
                           <a:solidFill>
-                            <a:srgbClr val="526728"/>
+                            <a:srgbClr val="3E4927"/>
                           </a:solidFill>
                         </a:rPr>
                         <a:t>입원·수술</a:t>
@@ -7166,30 +7360,30 @@
                   <a:tcPr anchor="ctr" marL="73152" marR="73152">
                     <a:lnL w="9525" cap="flat" cmpd="sng" algn="ctr">
                       <a:solidFill>
-                        <a:srgbClr val="EBF7D4"/>
+                        <a:srgbClr val="ECFAD1"/>
                       </a:solidFill>
                       <a:prstDash val="solid"/>
                     </a:lnL>
                     <a:lnR w="9525" cap="flat" cmpd="sng" algn="ctr">
                       <a:solidFill>
-                        <a:srgbClr val="EBF7D4"/>
+                        <a:srgbClr val="ECFAD1"/>
                       </a:solidFill>
                       <a:prstDash val="solid"/>
                     </a:lnR>
                     <a:lnT w="9525" cap="flat" cmpd="sng" algn="ctr">
                       <a:solidFill>
-                        <a:srgbClr val="EBF7D4"/>
+                        <a:srgbClr val="ECFAD1"/>
                       </a:solidFill>
                       <a:prstDash val="solid"/>
                     </a:lnT>
                     <a:lnB w="9525" cap="flat" cmpd="sng" algn="ctr">
                       <a:solidFill>
-                        <a:srgbClr val="EBF7D4"/>
+                        <a:srgbClr val="ECFAD1"/>
                       </a:solidFill>
                       <a:prstDash val="solid"/>
                     </a:lnB>
                     <a:solidFill>
-                      <a:srgbClr val="EBF7D4"/>
+                      <a:srgbClr val="ECFAD1"/>
                     </a:solidFill>
                   </a:tcPr>
                 </a:tc>
@@ -7202,7 +7396,7 @@
                       <a:r>
                         <a:rPr sz="1400" b="0">
                           <a:solidFill>
-                            <a:srgbClr val="2B2B2B"/>
+                            <a:srgbClr val="26231F"/>
                           </a:solidFill>
                         </a:rPr>
                         <a:t>□</a:t>
@@ -7212,25 +7406,25 @@
                   <a:tcPr anchor="ctr" marL="73152" marR="73152">
                     <a:lnL w="9525" cap="flat" cmpd="sng" algn="ctr">
                       <a:solidFill>
-                        <a:srgbClr val="EBF7D4"/>
+                        <a:srgbClr val="ECFAD1"/>
                       </a:solidFill>
                       <a:prstDash val="solid"/>
                     </a:lnL>
                     <a:lnR w="9525" cap="flat" cmpd="sng" algn="ctr">
                       <a:solidFill>
-                        <a:srgbClr val="EBF7D4"/>
+                        <a:srgbClr val="ECFAD1"/>
                       </a:solidFill>
                       <a:prstDash val="solid"/>
                     </a:lnR>
                     <a:lnT w="9525" cap="flat" cmpd="sng" algn="ctr">
                       <a:solidFill>
-                        <a:srgbClr val="EBF7D4"/>
+                        <a:srgbClr val="ECFAD1"/>
                       </a:solidFill>
                       <a:prstDash val="solid"/>
                     </a:lnT>
                     <a:lnB w="9525" cap="flat" cmpd="sng" algn="ctr">
                       <a:solidFill>
-                        <a:srgbClr val="EBF7D4"/>
+                        <a:srgbClr val="ECFAD1"/>
                       </a:solidFill>
                       <a:prstDash val="solid"/>
                     </a:lnB>
@@ -7248,7 +7442,7 @@
                       <a:r>
                         <a:rPr sz="1400" b="0">
                           <a:solidFill>
-                            <a:srgbClr val="2B2B2B"/>
+                            <a:srgbClr val="26231F"/>
                           </a:solidFill>
                         </a:rPr>
                         <a:t>□</a:t>
@@ -7258,25 +7452,25 @@
                   <a:tcPr anchor="ctr" marL="73152" marR="73152">
                     <a:lnL w="9525" cap="flat" cmpd="sng" algn="ctr">
                       <a:solidFill>
-                        <a:srgbClr val="EBF7D4"/>
+                        <a:srgbClr val="ECFAD1"/>
                       </a:solidFill>
                       <a:prstDash val="solid"/>
                     </a:lnL>
                     <a:lnR w="9525" cap="flat" cmpd="sng" algn="ctr">
                       <a:solidFill>
-                        <a:srgbClr val="EBF7D4"/>
+                        <a:srgbClr val="ECFAD1"/>
                       </a:solidFill>
                       <a:prstDash val="solid"/>
                     </a:lnR>
                     <a:lnT w="9525" cap="flat" cmpd="sng" algn="ctr">
                       <a:solidFill>
-                        <a:srgbClr val="EBF7D4"/>
+                        <a:srgbClr val="ECFAD1"/>
                       </a:solidFill>
                       <a:prstDash val="solid"/>
                     </a:lnT>
                     <a:lnB w="9525" cap="flat" cmpd="sng" algn="ctr">
                       <a:solidFill>
-                        <a:srgbClr val="EBF7D4"/>
+                        <a:srgbClr val="ECFAD1"/>
                       </a:solidFill>
                       <a:prstDash val="solid"/>
                     </a:lnB>
@@ -7294,7 +7488,7 @@
                       <a:r>
                         <a:rPr sz="1400" b="0">
                           <a:solidFill>
-                            <a:srgbClr val="2B2B2B"/>
+                            <a:srgbClr val="26231F"/>
                           </a:solidFill>
                         </a:rPr>
                         <a:t>□</a:t>
@@ -7304,25 +7498,25 @@
                   <a:tcPr anchor="ctr" marL="73152" marR="73152">
                     <a:lnL w="9525" cap="flat" cmpd="sng" algn="ctr">
                       <a:solidFill>
-                        <a:srgbClr val="EBF7D4"/>
+                        <a:srgbClr val="ECFAD1"/>
                       </a:solidFill>
                       <a:prstDash val="solid"/>
                     </a:lnL>
                     <a:lnR w="9525" cap="flat" cmpd="sng" algn="ctr">
                       <a:solidFill>
-                        <a:srgbClr val="EBF7D4"/>
+                        <a:srgbClr val="ECFAD1"/>
                       </a:solidFill>
                       <a:prstDash val="solid"/>
                     </a:lnR>
                     <a:lnT w="9525" cap="flat" cmpd="sng" algn="ctr">
                       <a:solidFill>
-                        <a:srgbClr val="EBF7D4"/>
+                        <a:srgbClr val="ECFAD1"/>
                       </a:solidFill>
                       <a:prstDash val="solid"/>
                     </a:lnT>
                     <a:lnB w="9525" cap="flat" cmpd="sng" algn="ctr">
                       <a:solidFill>
-                        <a:srgbClr val="EBF7D4"/>
+                        <a:srgbClr val="ECFAD1"/>
                       </a:solidFill>
                       <a:prstDash val="solid"/>
                     </a:lnB>
@@ -7342,7 +7536,7 @@
                       <a:r>
                         <a:rPr sz="1400" b="1">
                           <a:solidFill>
-                            <a:srgbClr val="526728"/>
+                            <a:srgbClr val="3E4927"/>
                           </a:solidFill>
                         </a:rPr>
                         <a:t>상해</a:t>
@@ -7352,30 +7546,30 @@
                   <a:tcPr anchor="ctr" marL="73152" marR="73152">
                     <a:lnL w="9525" cap="flat" cmpd="sng" algn="ctr">
                       <a:solidFill>
-                        <a:srgbClr val="EBF7D4"/>
+                        <a:srgbClr val="ECFAD1"/>
                       </a:solidFill>
                       <a:prstDash val="solid"/>
                     </a:lnL>
                     <a:lnR w="9525" cap="flat" cmpd="sng" algn="ctr">
                       <a:solidFill>
-                        <a:srgbClr val="EBF7D4"/>
+                        <a:srgbClr val="ECFAD1"/>
                       </a:solidFill>
                       <a:prstDash val="solid"/>
                     </a:lnR>
                     <a:lnT w="9525" cap="flat" cmpd="sng" algn="ctr">
                       <a:solidFill>
-                        <a:srgbClr val="EBF7D4"/>
+                        <a:srgbClr val="ECFAD1"/>
                       </a:solidFill>
                       <a:prstDash val="solid"/>
                     </a:lnT>
                     <a:lnB w="9525" cap="flat" cmpd="sng" algn="ctr">
                       <a:solidFill>
-                        <a:srgbClr val="EBF7D4"/>
+                        <a:srgbClr val="ECFAD1"/>
                       </a:solidFill>
                       <a:prstDash val="solid"/>
                     </a:lnB>
                     <a:solidFill>
-                      <a:srgbClr val="EBF7D4"/>
+                      <a:srgbClr val="ECFAD1"/>
                     </a:solidFill>
                   </a:tcPr>
                 </a:tc>
@@ -7388,7 +7582,7 @@
                       <a:r>
                         <a:rPr sz="1400" b="0">
                           <a:solidFill>
-                            <a:srgbClr val="2B2B2B"/>
+                            <a:srgbClr val="26231F"/>
                           </a:solidFill>
                         </a:rPr>
                         <a:t>□</a:t>
@@ -7398,30 +7592,30 @@
                   <a:tcPr anchor="ctr" marL="73152" marR="73152">
                     <a:lnL w="9525" cap="flat" cmpd="sng" algn="ctr">
                       <a:solidFill>
-                        <a:srgbClr val="EBF7D4"/>
+                        <a:srgbClr val="ECFAD1"/>
                       </a:solidFill>
                       <a:prstDash val="solid"/>
                     </a:lnL>
                     <a:lnR w="9525" cap="flat" cmpd="sng" algn="ctr">
                       <a:solidFill>
-                        <a:srgbClr val="EBF7D4"/>
+                        <a:srgbClr val="ECFAD1"/>
                       </a:solidFill>
                       <a:prstDash val="solid"/>
                     </a:lnR>
                     <a:lnT w="9525" cap="flat" cmpd="sng" algn="ctr">
                       <a:solidFill>
-                        <a:srgbClr val="EBF7D4"/>
+                        <a:srgbClr val="ECFAD1"/>
                       </a:solidFill>
                       <a:prstDash val="solid"/>
                     </a:lnT>
                     <a:lnB w="9525" cap="flat" cmpd="sng" algn="ctr">
                       <a:solidFill>
-                        <a:srgbClr val="EBF7D4"/>
+                        <a:srgbClr val="ECFAD1"/>
                       </a:solidFill>
                       <a:prstDash val="solid"/>
                     </a:lnB>
                     <a:solidFill>
-                      <a:srgbClr val="F9FCF3"/>
+                      <a:srgbClr val="F7FDEA"/>
                     </a:solidFill>
                   </a:tcPr>
                 </a:tc>
@@ -7434,7 +7628,7 @@
                       <a:r>
                         <a:rPr sz="1400" b="0">
                           <a:solidFill>
-                            <a:srgbClr val="2B2B2B"/>
+                            <a:srgbClr val="26231F"/>
                           </a:solidFill>
                         </a:rPr>
                         <a:t>□</a:t>
@@ -7444,30 +7638,30 @@
                   <a:tcPr anchor="ctr" marL="73152" marR="73152">
                     <a:lnL w="9525" cap="flat" cmpd="sng" algn="ctr">
                       <a:solidFill>
-                        <a:srgbClr val="EBF7D4"/>
+                        <a:srgbClr val="ECFAD1"/>
                       </a:solidFill>
                       <a:prstDash val="solid"/>
                     </a:lnL>
                     <a:lnR w="9525" cap="flat" cmpd="sng" algn="ctr">
                       <a:solidFill>
-                        <a:srgbClr val="EBF7D4"/>
+                        <a:srgbClr val="ECFAD1"/>
                       </a:solidFill>
                       <a:prstDash val="solid"/>
                     </a:lnR>
                     <a:lnT w="9525" cap="flat" cmpd="sng" algn="ctr">
                       <a:solidFill>
-                        <a:srgbClr val="EBF7D4"/>
+                        <a:srgbClr val="ECFAD1"/>
                       </a:solidFill>
                       <a:prstDash val="solid"/>
                     </a:lnT>
                     <a:lnB w="9525" cap="flat" cmpd="sng" algn="ctr">
                       <a:solidFill>
-                        <a:srgbClr val="EBF7D4"/>
+                        <a:srgbClr val="ECFAD1"/>
                       </a:solidFill>
                       <a:prstDash val="solid"/>
                     </a:lnB>
                     <a:solidFill>
-                      <a:srgbClr val="F9FCF3"/>
+                      <a:srgbClr val="F7FDEA"/>
                     </a:solidFill>
                   </a:tcPr>
                 </a:tc>
@@ -7480,7 +7674,7 @@
                       <a:r>
                         <a:rPr sz="1400" b="0">
                           <a:solidFill>
-                            <a:srgbClr val="2B2B2B"/>
+                            <a:srgbClr val="26231F"/>
                           </a:solidFill>
                         </a:rPr>
                         <a:t>□</a:t>
@@ -7490,30 +7684,30 @@
                   <a:tcPr anchor="ctr" marL="73152" marR="73152">
                     <a:lnL w="9525" cap="flat" cmpd="sng" algn="ctr">
                       <a:solidFill>
-                        <a:srgbClr val="EBF7D4"/>
+                        <a:srgbClr val="ECFAD1"/>
                       </a:solidFill>
                       <a:prstDash val="solid"/>
                     </a:lnL>
                     <a:lnR w="9525" cap="flat" cmpd="sng" algn="ctr">
                       <a:solidFill>
-                        <a:srgbClr val="EBF7D4"/>
+                        <a:srgbClr val="ECFAD1"/>
                       </a:solidFill>
                       <a:prstDash val="solid"/>
                     </a:lnR>
                     <a:lnT w="9525" cap="flat" cmpd="sng" algn="ctr">
                       <a:solidFill>
-                        <a:srgbClr val="EBF7D4"/>
+                        <a:srgbClr val="ECFAD1"/>
                       </a:solidFill>
                       <a:prstDash val="solid"/>
                     </a:lnT>
                     <a:lnB w="9525" cap="flat" cmpd="sng" algn="ctr">
                       <a:solidFill>
-                        <a:srgbClr val="EBF7D4"/>
+                        <a:srgbClr val="ECFAD1"/>
                       </a:solidFill>
                       <a:prstDash val="solid"/>
                     </a:lnB>
                     <a:solidFill>
-                      <a:srgbClr val="F9FCF3"/>
+                      <a:srgbClr val="F7FDEA"/>
                     </a:solidFill>
                   </a:tcPr>
                 </a:tc>
@@ -7528,7 +7722,7 @@
                       <a:r>
                         <a:rPr sz="1400" b="1">
                           <a:solidFill>
-                            <a:srgbClr val="526728"/>
+                            <a:srgbClr val="3E4927"/>
                           </a:solidFill>
                         </a:rPr>
                         <a:t>실손의료</a:t>
@@ -7538,30 +7732,30 @@
                   <a:tcPr anchor="ctr" marL="73152" marR="73152">
                     <a:lnL w="9525" cap="flat" cmpd="sng" algn="ctr">
                       <a:solidFill>
-                        <a:srgbClr val="EBF7D4"/>
+                        <a:srgbClr val="ECFAD1"/>
                       </a:solidFill>
                       <a:prstDash val="solid"/>
                     </a:lnL>
                     <a:lnR w="9525" cap="flat" cmpd="sng" algn="ctr">
                       <a:solidFill>
-                        <a:srgbClr val="EBF7D4"/>
+                        <a:srgbClr val="ECFAD1"/>
                       </a:solidFill>
                       <a:prstDash val="solid"/>
                     </a:lnR>
                     <a:lnT w="9525" cap="flat" cmpd="sng" algn="ctr">
                       <a:solidFill>
-                        <a:srgbClr val="EBF7D4"/>
+                        <a:srgbClr val="ECFAD1"/>
                       </a:solidFill>
                       <a:prstDash val="solid"/>
                     </a:lnT>
                     <a:lnB w="9525" cap="flat" cmpd="sng" algn="ctr">
                       <a:solidFill>
-                        <a:srgbClr val="EBF7D4"/>
+                        <a:srgbClr val="ECFAD1"/>
                       </a:solidFill>
                       <a:prstDash val="solid"/>
                     </a:lnB>
                     <a:solidFill>
-                      <a:srgbClr val="EBF7D4"/>
+                      <a:srgbClr val="ECFAD1"/>
                     </a:solidFill>
                   </a:tcPr>
                 </a:tc>
@@ -7574,7 +7768,7 @@
                       <a:r>
                         <a:rPr sz="1400" b="0">
                           <a:solidFill>
-                            <a:srgbClr val="2B2B2B"/>
+                            <a:srgbClr val="26231F"/>
                           </a:solidFill>
                         </a:rPr>
                         <a:t>□</a:t>
@@ -7584,25 +7778,25 @@
                   <a:tcPr anchor="ctr" marL="73152" marR="73152">
                     <a:lnL w="9525" cap="flat" cmpd="sng" algn="ctr">
                       <a:solidFill>
-                        <a:srgbClr val="EBF7D4"/>
+                        <a:srgbClr val="ECFAD1"/>
                       </a:solidFill>
                       <a:prstDash val="solid"/>
                     </a:lnL>
                     <a:lnR w="9525" cap="flat" cmpd="sng" algn="ctr">
                       <a:solidFill>
-                        <a:srgbClr val="EBF7D4"/>
+                        <a:srgbClr val="ECFAD1"/>
                       </a:solidFill>
                       <a:prstDash val="solid"/>
                     </a:lnR>
                     <a:lnT w="9525" cap="flat" cmpd="sng" algn="ctr">
                       <a:solidFill>
-                        <a:srgbClr val="EBF7D4"/>
+                        <a:srgbClr val="ECFAD1"/>
                       </a:solidFill>
                       <a:prstDash val="solid"/>
                     </a:lnT>
                     <a:lnB w="9525" cap="flat" cmpd="sng" algn="ctr">
                       <a:solidFill>
-                        <a:srgbClr val="EBF7D4"/>
+                        <a:srgbClr val="ECFAD1"/>
                       </a:solidFill>
                       <a:prstDash val="solid"/>
                     </a:lnB>
@@ -7620,7 +7814,7 @@
                       <a:r>
                         <a:rPr sz="1400" b="0">
                           <a:solidFill>
-                            <a:srgbClr val="2B2B2B"/>
+                            <a:srgbClr val="26231F"/>
                           </a:solidFill>
                         </a:rPr>
                         <a:t>□</a:t>
@@ -7630,25 +7824,25 @@
                   <a:tcPr anchor="ctr" marL="73152" marR="73152">
                     <a:lnL w="9525" cap="flat" cmpd="sng" algn="ctr">
                       <a:solidFill>
-                        <a:srgbClr val="EBF7D4"/>
+                        <a:srgbClr val="ECFAD1"/>
                       </a:solidFill>
                       <a:prstDash val="solid"/>
                     </a:lnL>
                     <a:lnR w="9525" cap="flat" cmpd="sng" algn="ctr">
                       <a:solidFill>
-                        <a:srgbClr val="EBF7D4"/>
+                        <a:srgbClr val="ECFAD1"/>
                       </a:solidFill>
                       <a:prstDash val="solid"/>
                     </a:lnR>
                     <a:lnT w="9525" cap="flat" cmpd="sng" algn="ctr">
                       <a:solidFill>
-                        <a:srgbClr val="EBF7D4"/>
+                        <a:srgbClr val="ECFAD1"/>
                       </a:solidFill>
                       <a:prstDash val="solid"/>
                     </a:lnT>
                     <a:lnB w="9525" cap="flat" cmpd="sng" algn="ctr">
                       <a:solidFill>
-                        <a:srgbClr val="EBF7D4"/>
+                        <a:srgbClr val="ECFAD1"/>
                       </a:solidFill>
                       <a:prstDash val="solid"/>
                     </a:lnB>
@@ -7666,7 +7860,7 @@
                       <a:r>
                         <a:rPr sz="1400" b="0">
                           <a:solidFill>
-                            <a:srgbClr val="2B2B2B"/>
+                            <a:srgbClr val="26231F"/>
                           </a:solidFill>
                         </a:rPr>
                         <a:t>□</a:t>
@@ -7676,25 +7870,25 @@
                   <a:tcPr anchor="ctr" marL="73152" marR="73152">
                     <a:lnL w="9525" cap="flat" cmpd="sng" algn="ctr">
                       <a:solidFill>
-                        <a:srgbClr val="EBF7D4"/>
+                        <a:srgbClr val="ECFAD1"/>
                       </a:solidFill>
                       <a:prstDash val="solid"/>
                     </a:lnL>
                     <a:lnR w="9525" cap="flat" cmpd="sng" algn="ctr">
                       <a:solidFill>
-                        <a:srgbClr val="EBF7D4"/>
+                        <a:srgbClr val="ECFAD1"/>
                       </a:solidFill>
                       <a:prstDash val="solid"/>
                     </a:lnR>
                     <a:lnT w="9525" cap="flat" cmpd="sng" algn="ctr">
                       <a:solidFill>
-                        <a:srgbClr val="EBF7D4"/>
+                        <a:srgbClr val="ECFAD1"/>
                       </a:solidFill>
                       <a:prstDash val="solid"/>
                     </a:lnT>
                     <a:lnB w="9525" cap="flat" cmpd="sng" algn="ctr">
                       <a:solidFill>
-                        <a:srgbClr val="EBF7D4"/>
+                        <a:srgbClr val="ECFAD1"/>
                       </a:solidFill>
                       <a:prstDash val="solid"/>
                     </a:lnB>
@@ -7714,7 +7908,7 @@
                       <a:r>
                         <a:rPr sz="1400" b="1">
                           <a:solidFill>
-                            <a:srgbClr val="526728"/>
+                            <a:srgbClr val="3E4927"/>
                           </a:solidFill>
                         </a:rPr>
                         <a:t>연금·노후자금</a:t>
@@ -7724,30 +7918,30 @@
                   <a:tcPr anchor="ctr" marL="73152" marR="73152">
                     <a:lnL w="9525" cap="flat" cmpd="sng" algn="ctr">
                       <a:solidFill>
-                        <a:srgbClr val="EBF7D4"/>
+                        <a:srgbClr val="ECFAD1"/>
                       </a:solidFill>
                       <a:prstDash val="solid"/>
                     </a:lnL>
                     <a:lnR w="9525" cap="flat" cmpd="sng" algn="ctr">
                       <a:solidFill>
-                        <a:srgbClr val="EBF7D4"/>
+                        <a:srgbClr val="ECFAD1"/>
                       </a:solidFill>
                       <a:prstDash val="solid"/>
                     </a:lnR>
                     <a:lnT w="9525" cap="flat" cmpd="sng" algn="ctr">
                       <a:solidFill>
-                        <a:srgbClr val="EBF7D4"/>
+                        <a:srgbClr val="ECFAD1"/>
                       </a:solidFill>
                       <a:prstDash val="solid"/>
                     </a:lnT>
                     <a:lnB w="9525" cap="flat" cmpd="sng" algn="ctr">
                       <a:solidFill>
-                        <a:srgbClr val="EBF7D4"/>
+                        <a:srgbClr val="ECFAD1"/>
                       </a:solidFill>
                       <a:prstDash val="solid"/>
                     </a:lnB>
                     <a:solidFill>
-                      <a:srgbClr val="EBF7D4"/>
+                      <a:srgbClr val="ECFAD1"/>
                     </a:solidFill>
                   </a:tcPr>
                 </a:tc>
@@ -7760,7 +7954,7 @@
                       <a:r>
                         <a:rPr sz="1400" b="0">
                           <a:solidFill>
-                            <a:srgbClr val="2B2B2B"/>
+                            <a:srgbClr val="26231F"/>
                           </a:solidFill>
                         </a:rPr>
                         <a:t>□</a:t>
@@ -7770,30 +7964,30 @@
                   <a:tcPr anchor="ctr" marL="73152" marR="73152">
                     <a:lnL w="9525" cap="flat" cmpd="sng" algn="ctr">
                       <a:solidFill>
-                        <a:srgbClr val="EBF7D4"/>
+                        <a:srgbClr val="ECFAD1"/>
                       </a:solidFill>
                       <a:prstDash val="solid"/>
                     </a:lnL>
                     <a:lnR w="9525" cap="flat" cmpd="sng" algn="ctr">
                       <a:solidFill>
-                        <a:srgbClr val="EBF7D4"/>
+                        <a:srgbClr val="ECFAD1"/>
                       </a:solidFill>
                       <a:prstDash val="solid"/>
                     </a:lnR>
                     <a:lnT w="9525" cap="flat" cmpd="sng" algn="ctr">
                       <a:solidFill>
-                        <a:srgbClr val="EBF7D4"/>
+                        <a:srgbClr val="ECFAD1"/>
                       </a:solidFill>
                       <a:prstDash val="solid"/>
                     </a:lnT>
                     <a:lnB w="9525" cap="flat" cmpd="sng" algn="ctr">
                       <a:solidFill>
-                        <a:srgbClr val="EBF7D4"/>
+                        <a:srgbClr val="ECFAD1"/>
                       </a:solidFill>
                       <a:prstDash val="solid"/>
                     </a:lnB>
                     <a:solidFill>
-                      <a:srgbClr val="F9FCF3"/>
+                      <a:srgbClr val="F7FDEA"/>
                     </a:solidFill>
                   </a:tcPr>
                 </a:tc>
@@ -7806,7 +8000,7 @@
                       <a:r>
                         <a:rPr sz="1400" b="0">
                           <a:solidFill>
-                            <a:srgbClr val="2B2B2B"/>
+                            <a:srgbClr val="26231F"/>
                           </a:solidFill>
                         </a:rPr>
                         <a:t>□</a:t>
@@ -7816,30 +8010,30 @@
                   <a:tcPr anchor="ctr" marL="73152" marR="73152">
                     <a:lnL w="9525" cap="flat" cmpd="sng" algn="ctr">
                       <a:solidFill>
-                        <a:srgbClr val="EBF7D4"/>
+                        <a:srgbClr val="ECFAD1"/>
                       </a:solidFill>
                       <a:prstDash val="solid"/>
                     </a:lnL>
                     <a:lnR w="9525" cap="flat" cmpd="sng" algn="ctr">
                       <a:solidFill>
-                        <a:srgbClr val="EBF7D4"/>
+                        <a:srgbClr val="ECFAD1"/>
                       </a:solidFill>
                       <a:prstDash val="solid"/>
                     </a:lnR>
                     <a:lnT w="9525" cap="flat" cmpd="sng" algn="ctr">
                       <a:solidFill>
-                        <a:srgbClr val="EBF7D4"/>
+                        <a:srgbClr val="ECFAD1"/>
                       </a:solidFill>
                       <a:prstDash val="solid"/>
                     </a:lnT>
                     <a:lnB w="9525" cap="flat" cmpd="sng" algn="ctr">
                       <a:solidFill>
-                        <a:srgbClr val="EBF7D4"/>
+                        <a:srgbClr val="ECFAD1"/>
                       </a:solidFill>
                       <a:prstDash val="solid"/>
                     </a:lnB>
                     <a:solidFill>
-                      <a:srgbClr val="F9FCF3"/>
+                      <a:srgbClr val="F7FDEA"/>
                     </a:solidFill>
                   </a:tcPr>
                 </a:tc>
@@ -7852,7 +8046,7 @@
                       <a:r>
                         <a:rPr sz="1400" b="0">
                           <a:solidFill>
-                            <a:srgbClr val="2B2B2B"/>
+                            <a:srgbClr val="26231F"/>
                           </a:solidFill>
                         </a:rPr>
                         <a:t>□</a:t>
@@ -7862,30 +8056,30 @@
                   <a:tcPr anchor="ctr" marL="73152" marR="73152">
                     <a:lnL w="9525" cap="flat" cmpd="sng" algn="ctr">
                       <a:solidFill>
-                        <a:srgbClr val="EBF7D4"/>
+                        <a:srgbClr val="ECFAD1"/>
                       </a:solidFill>
                       <a:prstDash val="solid"/>
                     </a:lnL>
                     <a:lnR w="9525" cap="flat" cmpd="sng" algn="ctr">
                       <a:solidFill>
-                        <a:srgbClr val="EBF7D4"/>
+                        <a:srgbClr val="ECFAD1"/>
                       </a:solidFill>
                       <a:prstDash val="solid"/>
                     </a:lnR>
                     <a:lnT w="9525" cap="flat" cmpd="sng" algn="ctr">
                       <a:solidFill>
-                        <a:srgbClr val="EBF7D4"/>
+                        <a:srgbClr val="ECFAD1"/>
                       </a:solidFill>
                       <a:prstDash val="solid"/>
                     </a:lnT>
                     <a:lnB w="9525" cap="flat" cmpd="sng" algn="ctr">
                       <a:solidFill>
-                        <a:srgbClr val="EBF7D4"/>
+                        <a:srgbClr val="ECFAD1"/>
                       </a:solidFill>
                       <a:prstDash val="solid"/>
                     </a:lnB>
                     <a:solidFill>
-                      <a:srgbClr val="F9FCF3"/>
+                      <a:srgbClr val="F7FDEA"/>
                     </a:solidFill>
                   </a:tcPr>
                 </a:tc>
@@ -7908,7 +8102,7 @@
     <p:bg>
       <p:bgPr>
         <a:solidFill>
-          <a:srgbClr val="F9FCF3"/>
+          <a:srgbClr val="FCFDFA"/>
         </a:solidFill>
         <a:effectLst/>
       </p:bgPr>
@@ -7922,20 +8116,20 @@
       <p:grpSpPr/>
       <p:sp>
         <p:nvSpPr>
-          <p:cNvPr id="3" name="장식"/>
+          <p:cNvPr id="3" name="포인트"/>
           <p:cNvSpPr/>
           <p:nvPr/>
         </p:nvSpPr>
         <p:spPr>
           <a:xfrm>
-            <a:off x="0" y="6035040"/>
-            <a:ext cx="1737360" cy="822960"/>
-          </a:xfrm>
-          <a:prstGeom prst="rtTriangle">
+            <a:off x="5958687" y="246888"/>
+            <a:ext cx="274320" cy="274320"/>
+          </a:xfrm>
+          <a:prstGeom prst="round2SameRect">
             <a:avLst/>
           </a:prstGeom>
           <a:solidFill>
-            <a:srgbClr val="EBF7D4"/>
+            <a:srgbClr val="D0ED97"/>
           </a:solidFill>
           <a:ln>
             <a:noFill/>
@@ -7957,14 +8151,14 @@
         </p:nvSpPr>
         <p:spPr>
           <a:xfrm>
-            <a:off x="0" y="6400800"/>
-            <a:ext cx="914400" cy="457200"/>
-          </a:xfrm>
-          <a:prstGeom prst="rtTriangle">
+            <a:off x="5684367" y="1572768"/>
+            <a:ext cx="822960" cy="22860"/>
+          </a:xfrm>
+          <a:prstGeom prst="rect">
             <a:avLst/>
           </a:prstGeom>
           <a:solidFill>
-            <a:srgbClr val="9DBF5A"/>
+            <a:srgbClr val="D0ED97"/>
           </a:solidFill>
           <a:ln>
             <a:noFill/>
@@ -7975,6 +8169,44 @@
           <a:lstStyle/>
           <a:p>
             <a:pPr algn="ctr"/>
+          </a:p>
+        </p:txBody>
+      </p:sp>
+      <p:sp>
+        <p:nvSpPr>
+          <p:cNvPr id="5" name="상단 라벨"/>
+          <p:cNvSpPr txBox="1"/>
+          <p:nvPr/>
+        </p:nvSpPr>
+        <p:spPr>
+          <a:xfrm>
+            <a:off x="640080" y="182880"/>
+            <a:ext cx="3657600" cy="274320"/>
+          </a:xfrm>
+          <a:prstGeom prst="rect">
+            <a:avLst/>
+          </a:prstGeom>
+          <a:noFill/>
+        </p:spPr>
+        <p:txBody>
+          <a:bodyPr wrap="square" lIns="54864" rIns="54864" tIns="27432" bIns="27432" anchor="ctr">
+            <a:noAutofit/>
+          </a:bodyPr>
+          <a:lstStyle/>
+          <a:p>
+            <a:pPr algn="l">
+              <a:lnSpc>
+                <a:spcPct val="115000"/>
+              </a:lnSpc>
+            </a:pPr>
+            <a:r>
+              <a:rPr sz="800" b="1" i="0" spc="250">
+                <a:solidFill>
+                  <a:srgbClr val="8E8780"/>
+                </a:solidFill>
+              </a:rPr>
+              <a:t>INSURANCE CHECK</a:t>
+            </a:r>
           </a:p>
         </p:txBody>
       </p:sp>
@@ -7990,8 +8222,8 @@
         </p:nvSpPr>
         <p:spPr>
           <a:xfrm>
-            <a:off x="640080" y="457200"/>
-            <a:ext cx="9722815" cy="868680"/>
+            <a:off x="1371600" y="640080"/>
+            <a:ext cx="9448495" cy="868680"/>
           </a:xfrm>
         </p:spPr>
         <p:txBody>
@@ -8000,7 +8232,7 @@
           </a:bodyPr>
           <a:lstStyle/>
           <a:p>
-            <a:pPr algn="l">
+            <a:pPr algn="ctr">
               <a:lnSpc>
                 <a:spcPct val="105000"/>
               </a:lnSpc>
@@ -8008,7 +8240,7 @@
             <a:r>
               <a:rPr sz="3000" b="1" i="0">
                 <a:solidFill>
-                  <a:srgbClr val="526728"/>
+                  <a:srgbClr val="26231F"/>
                 </a:solidFill>
               </a:rPr>
               <a:t>월 보험료 한눈에</a:t>
@@ -8018,26 +8250,24 @@
       </p:sp>
       <p:sp>
         <p:nvSpPr>
-          <p:cNvPr id="5" name="카드 1"/>
+          <p:cNvPr id="6" name="카드 1"/>
           <p:cNvSpPr/>
           <p:nvPr/>
         </p:nvSpPr>
         <p:spPr>
           <a:xfrm>
-            <a:off x="640080" y="1600200"/>
+            <a:off x="640080" y="1783080"/>
             <a:ext cx="3484778" cy="2926080"/>
           </a:xfrm>
           <a:prstGeom prst="roundRect">
             <a:avLst>
-              <a:gd name="adj" fmla="val 8000"/>
+              <a:gd name="adj" fmla="val 7000"/>
             </a:avLst>
           </a:prstGeom>
-          <a:solidFill>
-            <a:srgbClr val="F9FCF3"/>
-          </a:solidFill>
+          <a:noFill/>
           <a:ln w="15875">
             <a:solidFill>
-              <a:srgbClr val="EBF7D4"/>
+              <a:srgbClr val="D0ED97"/>
             </a:solidFill>
           </a:ln>
         </p:spPr>
@@ -8051,56 +8281,51 @@
       </p:sp>
       <p:sp>
         <p:nvSpPr>
-          <p:cNvPr id="6" name="번호 1"/>
-          <p:cNvSpPr/>
+          <p:cNvPr id="7" name="번호 1"/>
+          <p:cNvSpPr txBox="1"/>
           <p:nvPr/>
         </p:nvSpPr>
         <p:spPr>
           <a:xfrm>
-            <a:off x="822959" y="1783080"/>
-            <a:ext cx="457200" cy="457200"/>
-          </a:xfrm>
-          <a:prstGeom prst="ellipse">
+            <a:off x="731519" y="1920240"/>
+            <a:ext cx="914400" cy="548640"/>
+          </a:xfrm>
+          <a:prstGeom prst="rect">
             <a:avLst/>
           </a:prstGeom>
-          <a:solidFill>
-            <a:srgbClr val="9DBF5A"/>
-          </a:solidFill>
-          <a:ln>
-            <a:noFill/>
-          </a:ln>
-        </p:spPr>
-        <p:txBody>
-          <a:bodyPr rtlCol="0" anchor="ctr" wrap="square" lIns="54864" rIns="54864" tIns="27432" bIns="27432">
+          <a:noFill/>
+        </p:spPr>
+        <p:txBody>
+          <a:bodyPr wrap="square" lIns="54864" rIns="54864" tIns="27432" bIns="27432" anchor="ctr">
             <a:noAutofit/>
           </a:bodyPr>
           <a:lstStyle/>
           <a:p>
-            <a:pPr algn="ctr">
+            <a:pPr algn="l">
               <a:lnSpc>
-                <a:spcPct val="100000"/>
+                <a:spcPct val="115000"/>
               </a:lnSpc>
             </a:pPr>
             <a:r>
-              <a:rPr sz="1600" b="1" i="0">
+              <a:rPr sz="2400" b="1" i="0">
                 <a:solidFill>
-                  <a:srgbClr val="FFFFFF"/>
+                  <a:srgbClr val="D0ED97"/>
                 </a:solidFill>
               </a:rPr>
-              <a:t>1</a:t>
+              <a:t>01</a:t>
             </a:r>
           </a:p>
         </p:txBody>
       </p:sp>
       <p:sp>
         <p:nvSpPr>
-          <p:cNvPr id="7" name="TextBox 6"/>
+          <p:cNvPr id="8" name="TextBox 7"/>
           <p:cNvSpPr txBox="1"/>
           <p:nvPr/>
         </p:nvSpPr>
         <p:spPr>
           <a:xfrm>
-            <a:off x="777240" y="2377440"/>
+            <a:off x="777240" y="2560320"/>
             <a:ext cx="3210458" cy="640080"/>
           </a:xfrm>
           <a:prstGeom prst="rect">
@@ -8122,7 +8347,7 @@
             <a:r>
               <a:rPr sz="1700" b="1" i="0">
                 <a:solidFill>
-                  <a:srgbClr val="526728"/>
+                  <a:srgbClr val="3E4927"/>
                 </a:solidFill>
               </a:rPr>
               <a:t>월 보험료 합계</a:t>
@@ -8132,13 +8357,13 @@
       </p:sp>
       <p:sp>
         <p:nvSpPr>
-          <p:cNvPr id="8" name="TextBox 7"/>
+          <p:cNvPr id="9" name="TextBox 8"/>
           <p:cNvSpPr txBox="1"/>
           <p:nvPr/>
         </p:nvSpPr>
         <p:spPr>
           <a:xfrm>
-            <a:off x="777240" y="3063240"/>
+            <a:off x="777240" y="3246120"/>
             <a:ext cx="3210458" cy="1325880"/>
           </a:xfrm>
           <a:prstGeom prst="rect">
@@ -8160,7 +8385,7 @@
             <a:r>
               <a:rPr sz="3000" b="0" i="0">
                 <a:solidFill>
-                  <a:srgbClr val="2B2B2B"/>
+                  <a:srgbClr val="26231F"/>
                 </a:solidFill>
               </a:rPr>
               <a:t>0원</a:t>
@@ -8170,26 +8395,24 @@
       </p:sp>
       <p:sp>
         <p:nvSpPr>
-          <p:cNvPr id="9" name="카드 2"/>
+          <p:cNvPr id="10" name="카드 2"/>
           <p:cNvSpPr/>
           <p:nvPr/>
         </p:nvSpPr>
         <p:spPr>
           <a:xfrm>
-            <a:off x="4353458" y="1600200"/>
+            <a:off x="4353458" y="1783080"/>
             <a:ext cx="3484778" cy="2926080"/>
           </a:xfrm>
           <a:prstGeom prst="roundRect">
             <a:avLst>
-              <a:gd name="adj" fmla="val 8000"/>
+              <a:gd name="adj" fmla="val 7000"/>
             </a:avLst>
           </a:prstGeom>
-          <a:solidFill>
-            <a:srgbClr val="F9FCF3"/>
-          </a:solidFill>
+          <a:noFill/>
           <a:ln w="15875">
             <a:solidFill>
-              <a:srgbClr val="EBF7D4"/>
+              <a:srgbClr val="D0ED97"/>
             </a:solidFill>
           </a:ln>
         </p:spPr>
@@ -8203,56 +8426,51 @@
       </p:sp>
       <p:sp>
         <p:nvSpPr>
-          <p:cNvPr id="10" name="번호 2"/>
-          <p:cNvSpPr/>
+          <p:cNvPr id="11" name="번호 2"/>
+          <p:cNvSpPr txBox="1"/>
           <p:nvPr/>
         </p:nvSpPr>
         <p:spPr>
           <a:xfrm>
-            <a:off x="4536338" y="1783080"/>
-            <a:ext cx="457200" cy="457200"/>
-          </a:xfrm>
-          <a:prstGeom prst="ellipse">
+            <a:off x="4444898" y="1920240"/>
+            <a:ext cx="914400" cy="548640"/>
+          </a:xfrm>
+          <a:prstGeom prst="rect">
             <a:avLst/>
           </a:prstGeom>
-          <a:solidFill>
-            <a:srgbClr val="9DBF5A"/>
-          </a:solidFill>
-          <a:ln>
-            <a:noFill/>
-          </a:ln>
-        </p:spPr>
-        <p:txBody>
-          <a:bodyPr rtlCol="0" anchor="ctr" wrap="square" lIns="54864" rIns="54864" tIns="27432" bIns="27432">
+          <a:noFill/>
+        </p:spPr>
+        <p:txBody>
+          <a:bodyPr wrap="square" lIns="54864" rIns="54864" tIns="27432" bIns="27432" anchor="ctr">
             <a:noAutofit/>
           </a:bodyPr>
           <a:lstStyle/>
           <a:p>
-            <a:pPr algn="ctr">
+            <a:pPr algn="l">
               <a:lnSpc>
-                <a:spcPct val="100000"/>
+                <a:spcPct val="115000"/>
               </a:lnSpc>
             </a:pPr>
             <a:r>
-              <a:rPr sz="1600" b="1" i="0">
+              <a:rPr sz="2400" b="1" i="0">
                 <a:solidFill>
-                  <a:srgbClr val="FFFFFF"/>
+                  <a:srgbClr val="D0ED97"/>
                 </a:solidFill>
               </a:rPr>
-              <a:t>2</a:t>
+              <a:t>02</a:t>
             </a:r>
           </a:p>
         </p:txBody>
       </p:sp>
       <p:sp>
         <p:nvSpPr>
-          <p:cNvPr id="11" name="TextBox 10"/>
+          <p:cNvPr id="12" name="TextBox 11"/>
           <p:cNvSpPr txBox="1"/>
           <p:nvPr/>
         </p:nvSpPr>
         <p:spPr>
           <a:xfrm>
-            <a:off x="4490618" y="2377440"/>
+            <a:off x="4490618" y="2560320"/>
             <a:ext cx="3210458" cy="640080"/>
           </a:xfrm>
           <a:prstGeom prst="rect">
@@ -8274,7 +8492,7 @@
             <a:r>
               <a:rPr sz="1700" b="1" i="0">
                 <a:solidFill>
-                  <a:srgbClr val="526728"/>
+                  <a:srgbClr val="3E4927"/>
                 </a:solidFill>
               </a:rPr>
               <a:t>연 보험료 합계</a:t>
@@ -8284,13 +8502,13 @@
       </p:sp>
       <p:sp>
         <p:nvSpPr>
-          <p:cNvPr id="12" name="TextBox 11"/>
+          <p:cNvPr id="13" name="TextBox 12"/>
           <p:cNvSpPr txBox="1"/>
           <p:nvPr/>
         </p:nvSpPr>
         <p:spPr>
           <a:xfrm>
-            <a:off x="4490618" y="3063240"/>
+            <a:off x="4490618" y="3246120"/>
             <a:ext cx="3210458" cy="1325880"/>
           </a:xfrm>
           <a:prstGeom prst="rect">
@@ -8312,7 +8530,7 @@
             <a:r>
               <a:rPr sz="3000" b="0" i="0">
                 <a:solidFill>
-                  <a:srgbClr val="2B2B2B"/>
+                  <a:srgbClr val="26231F"/>
                 </a:solidFill>
               </a:rPr>
               <a:t>0원</a:t>
@@ -8322,26 +8540,24 @@
       </p:sp>
       <p:sp>
         <p:nvSpPr>
-          <p:cNvPr id="13" name="카드 3"/>
+          <p:cNvPr id="14" name="카드 3"/>
           <p:cNvSpPr/>
           <p:nvPr/>
         </p:nvSpPr>
         <p:spPr>
           <a:xfrm>
-            <a:off x="8066836" y="1600200"/>
+            <a:off x="8066836" y="1783080"/>
             <a:ext cx="3484778" cy="2926080"/>
           </a:xfrm>
           <a:prstGeom prst="roundRect">
             <a:avLst>
-              <a:gd name="adj" fmla="val 8000"/>
+              <a:gd name="adj" fmla="val 7000"/>
             </a:avLst>
           </a:prstGeom>
-          <a:solidFill>
-            <a:srgbClr val="F9FCF3"/>
-          </a:solidFill>
+          <a:noFill/>
           <a:ln w="15875">
             <a:solidFill>
-              <a:srgbClr val="EBF7D4"/>
+              <a:srgbClr val="D0ED97"/>
             </a:solidFill>
           </a:ln>
         </p:spPr>
@@ -8355,56 +8571,51 @@
       </p:sp>
       <p:sp>
         <p:nvSpPr>
-          <p:cNvPr id="14" name="번호 3"/>
-          <p:cNvSpPr/>
+          <p:cNvPr id="15" name="번호 3"/>
+          <p:cNvSpPr txBox="1"/>
           <p:nvPr/>
         </p:nvSpPr>
         <p:spPr>
           <a:xfrm>
-            <a:off x="8249716" y="1783080"/>
-            <a:ext cx="457200" cy="457200"/>
-          </a:xfrm>
-          <a:prstGeom prst="ellipse">
+            <a:off x="8158276" y="1920240"/>
+            <a:ext cx="914400" cy="548640"/>
+          </a:xfrm>
+          <a:prstGeom prst="rect">
             <a:avLst/>
           </a:prstGeom>
-          <a:solidFill>
-            <a:srgbClr val="9DBF5A"/>
-          </a:solidFill>
-          <a:ln>
-            <a:noFill/>
-          </a:ln>
-        </p:spPr>
-        <p:txBody>
-          <a:bodyPr rtlCol="0" anchor="ctr" wrap="square" lIns="54864" rIns="54864" tIns="27432" bIns="27432">
+          <a:noFill/>
+        </p:spPr>
+        <p:txBody>
+          <a:bodyPr wrap="square" lIns="54864" rIns="54864" tIns="27432" bIns="27432" anchor="ctr">
             <a:noAutofit/>
           </a:bodyPr>
           <a:lstStyle/>
           <a:p>
-            <a:pPr algn="ctr">
+            <a:pPr algn="l">
               <a:lnSpc>
-                <a:spcPct val="100000"/>
+                <a:spcPct val="115000"/>
               </a:lnSpc>
             </a:pPr>
             <a:r>
-              <a:rPr sz="1600" b="1" i="0">
+              <a:rPr sz="2400" b="1" i="0">
                 <a:solidFill>
-                  <a:srgbClr val="FFFFFF"/>
+                  <a:srgbClr val="D0ED97"/>
                 </a:solidFill>
               </a:rPr>
-              <a:t>3</a:t>
+              <a:t>03</a:t>
             </a:r>
           </a:p>
         </p:txBody>
       </p:sp>
       <p:sp>
         <p:nvSpPr>
-          <p:cNvPr id="15" name="TextBox 14"/>
+          <p:cNvPr id="16" name="TextBox 15"/>
           <p:cNvSpPr txBox="1"/>
           <p:nvPr/>
         </p:nvSpPr>
         <p:spPr>
           <a:xfrm>
-            <a:off x="8203996" y="2377440"/>
+            <a:off x="8203996" y="2560320"/>
             <a:ext cx="3210458" cy="640080"/>
           </a:xfrm>
           <a:prstGeom prst="rect">
@@ -8426,7 +8637,7 @@
             <a:r>
               <a:rPr sz="1700" b="1" i="0">
                 <a:solidFill>
-                  <a:srgbClr val="526728"/>
+                  <a:srgbClr val="3E4927"/>
                 </a:solidFill>
               </a:rPr>
               <a:t>월 소득 대비</a:t>
@@ -8436,13 +8647,13 @@
       </p:sp>
       <p:sp>
         <p:nvSpPr>
-          <p:cNvPr id="16" name="TextBox 15"/>
+          <p:cNvPr id="17" name="TextBox 16"/>
           <p:cNvSpPr txBox="1"/>
           <p:nvPr/>
         </p:nvSpPr>
         <p:spPr>
           <a:xfrm>
-            <a:off x="8203996" y="3063240"/>
+            <a:off x="8203996" y="3246120"/>
             <a:ext cx="3210458" cy="1325880"/>
           </a:xfrm>
           <a:prstGeom prst="rect">
@@ -8464,7 +8675,7 @@
             <a:r>
               <a:rPr sz="3000" b="0" i="0">
                 <a:solidFill>
-                  <a:srgbClr val="2B2B2B"/>
+                  <a:srgbClr val="26231F"/>
                 </a:solidFill>
               </a:rPr>
               <a:t>0 %</a:t>
@@ -8474,13 +8685,13 @@
       </p:sp>
       <p:sp>
         <p:nvSpPr>
-          <p:cNvPr id="17" name="안내"/>
+          <p:cNvPr id="18" name="안내"/>
           <p:cNvSpPr txBox="1"/>
           <p:nvPr/>
         </p:nvSpPr>
         <p:spPr>
           <a:xfrm>
-            <a:off x="640080" y="4709160"/>
+            <a:off x="640080" y="4892040"/>
             <a:ext cx="10911535" cy="365760"/>
           </a:xfrm>
           <a:prstGeom prst="rect">
@@ -8524,7 +8735,7 @@
     <p:bg>
       <p:bgPr>
         <a:solidFill>
-          <a:srgbClr val="F9FCF3"/>
+          <a:srgbClr val="FCFDFA"/>
         </a:solidFill>
         <a:effectLst/>
       </p:bgPr>
@@ -8538,20 +8749,20 @@
       <p:grpSpPr/>
       <p:sp>
         <p:nvSpPr>
-          <p:cNvPr id="3" name="장식"/>
+          <p:cNvPr id="3" name="포인트"/>
           <p:cNvSpPr/>
           <p:nvPr/>
         </p:nvSpPr>
         <p:spPr>
           <a:xfrm>
-            <a:off x="0" y="6035040"/>
-            <a:ext cx="1737360" cy="822960"/>
-          </a:xfrm>
-          <a:prstGeom prst="rtTriangle">
+            <a:off x="5958687" y="246888"/>
+            <a:ext cx="274320" cy="274320"/>
+          </a:xfrm>
+          <a:prstGeom prst="round2SameRect">
             <a:avLst/>
           </a:prstGeom>
           <a:solidFill>
-            <a:srgbClr val="EBF7D4"/>
+            <a:srgbClr val="D0ED97"/>
           </a:solidFill>
           <a:ln>
             <a:noFill/>
@@ -8573,14 +8784,14 @@
         </p:nvSpPr>
         <p:spPr>
           <a:xfrm>
-            <a:off x="0" y="6400800"/>
-            <a:ext cx="914400" cy="457200"/>
-          </a:xfrm>
-          <a:prstGeom prst="rtTriangle">
+            <a:off x="5684367" y="1572768"/>
+            <a:ext cx="822960" cy="22860"/>
+          </a:xfrm>
+          <a:prstGeom prst="rect">
             <a:avLst/>
           </a:prstGeom>
           <a:solidFill>
-            <a:srgbClr val="9DBF5A"/>
+            <a:srgbClr val="D0ED97"/>
           </a:solidFill>
           <a:ln>
             <a:noFill/>
@@ -8591,6 +8802,44 @@
           <a:lstStyle/>
           <a:p>
             <a:pPr algn="ctr"/>
+          </a:p>
+        </p:txBody>
+      </p:sp>
+      <p:sp>
+        <p:nvSpPr>
+          <p:cNvPr id="5" name="상단 라벨"/>
+          <p:cNvSpPr txBox="1"/>
+          <p:nvPr/>
+        </p:nvSpPr>
+        <p:spPr>
+          <a:xfrm>
+            <a:off x="640080" y="182880"/>
+            <a:ext cx="3657600" cy="274320"/>
+          </a:xfrm>
+          <a:prstGeom prst="rect">
+            <a:avLst/>
+          </a:prstGeom>
+          <a:noFill/>
+        </p:spPr>
+        <p:txBody>
+          <a:bodyPr wrap="square" lIns="54864" rIns="54864" tIns="27432" bIns="27432" anchor="ctr">
+            <a:noAutofit/>
+          </a:bodyPr>
+          <a:lstStyle/>
+          <a:p>
+            <a:pPr algn="l">
+              <a:lnSpc>
+                <a:spcPct val="115000"/>
+              </a:lnSpc>
+            </a:pPr>
+            <a:r>
+              <a:rPr sz="800" b="1" i="0" spc="250">
+                <a:solidFill>
+                  <a:srgbClr val="8E8780"/>
+                </a:solidFill>
+              </a:rPr>
+              <a:t>INSURANCE CHECK</a:t>
+            </a:r>
           </a:p>
         </p:txBody>
       </p:sp>
@@ -8606,8 +8855,8 @@
         </p:nvSpPr>
         <p:spPr>
           <a:xfrm>
-            <a:off x="640080" y="457200"/>
-            <a:ext cx="9722815" cy="868680"/>
+            <a:off x="1371600" y="640080"/>
+            <a:ext cx="9448495" cy="868680"/>
           </a:xfrm>
         </p:spPr>
         <p:txBody>
@@ -8616,7 +8865,7 @@
           </a:bodyPr>
           <a:lstStyle/>
           <a:p>
-            <a:pPr algn="l">
+            <a:pPr algn="ctr">
               <a:lnSpc>
                 <a:spcPct val="105000"/>
               </a:lnSpc>
@@ -8624,7 +8873,7 @@
             <a:r>
               <a:rPr sz="3000" b="1" i="0">
                 <a:solidFill>
-                  <a:srgbClr val="526728"/>
+                  <a:srgbClr val="26231F"/>
                 </a:solidFill>
               </a:rPr>
               <a:t>점검 메모와 다음 할 일</a:t>
@@ -8634,26 +8883,24 @@
       </p:sp>
       <p:sp>
         <p:nvSpPr>
-          <p:cNvPr id="5" name="카드 1"/>
+          <p:cNvPr id="6" name="카드 1"/>
           <p:cNvSpPr/>
           <p:nvPr/>
         </p:nvSpPr>
         <p:spPr>
           <a:xfrm>
-            <a:off x="640080" y="1600200"/>
-            <a:ext cx="3484778" cy="4160520"/>
+            <a:off x="640080" y="1783080"/>
+            <a:ext cx="3484778" cy="3931920"/>
           </a:xfrm>
           <a:prstGeom prst="roundRect">
             <a:avLst>
-              <a:gd name="adj" fmla="val 8000"/>
+              <a:gd name="adj" fmla="val 7000"/>
             </a:avLst>
           </a:prstGeom>
-          <a:solidFill>
-            <a:srgbClr val="F9FCF3"/>
-          </a:solidFill>
+          <a:noFill/>
           <a:ln w="15875">
             <a:solidFill>
-              <a:srgbClr val="EBF7D4"/>
+              <a:srgbClr val="D0ED97"/>
             </a:solidFill>
           </a:ln>
         </p:spPr>
@@ -8667,56 +8914,51 @@
       </p:sp>
       <p:sp>
         <p:nvSpPr>
-          <p:cNvPr id="6" name="번호 1"/>
-          <p:cNvSpPr/>
+          <p:cNvPr id="7" name="번호 1"/>
+          <p:cNvSpPr txBox="1"/>
           <p:nvPr/>
         </p:nvSpPr>
         <p:spPr>
           <a:xfrm>
-            <a:off x="822959" y="1783080"/>
-            <a:ext cx="457200" cy="457200"/>
-          </a:xfrm>
-          <a:prstGeom prst="ellipse">
+            <a:off x="731519" y="1920240"/>
+            <a:ext cx="914400" cy="548640"/>
+          </a:xfrm>
+          <a:prstGeom prst="rect">
             <a:avLst/>
           </a:prstGeom>
-          <a:solidFill>
-            <a:srgbClr val="9DBF5A"/>
-          </a:solidFill>
-          <a:ln>
-            <a:noFill/>
-          </a:ln>
-        </p:spPr>
-        <p:txBody>
-          <a:bodyPr rtlCol="0" anchor="ctr" wrap="square" lIns="54864" rIns="54864" tIns="27432" bIns="27432">
+          <a:noFill/>
+        </p:spPr>
+        <p:txBody>
+          <a:bodyPr wrap="square" lIns="54864" rIns="54864" tIns="27432" bIns="27432" anchor="ctr">
             <a:noAutofit/>
           </a:bodyPr>
           <a:lstStyle/>
           <a:p>
-            <a:pPr algn="ctr">
+            <a:pPr algn="l">
               <a:lnSpc>
-                <a:spcPct val="100000"/>
+                <a:spcPct val="115000"/>
               </a:lnSpc>
             </a:pPr>
             <a:r>
-              <a:rPr sz="1600" b="1" i="0">
+              <a:rPr sz="2400" b="1" i="0">
                 <a:solidFill>
-                  <a:srgbClr val="FFFFFF"/>
+                  <a:srgbClr val="D0ED97"/>
                 </a:solidFill>
               </a:rPr>
-              <a:t>1</a:t>
+              <a:t>01</a:t>
             </a:r>
           </a:p>
         </p:txBody>
       </p:sp>
       <p:sp>
         <p:nvSpPr>
-          <p:cNvPr id="7" name="TextBox 6"/>
+          <p:cNvPr id="8" name="TextBox 7"/>
           <p:cNvSpPr txBox="1"/>
           <p:nvPr/>
         </p:nvSpPr>
         <p:spPr>
           <a:xfrm>
-            <a:off x="777240" y="2377440"/>
+            <a:off x="777240" y="2560320"/>
             <a:ext cx="3210458" cy="640080"/>
           </a:xfrm>
           <a:prstGeom prst="rect">
@@ -8738,7 +8980,7 @@
             <a:r>
               <a:rPr sz="1800" b="1" i="0">
                 <a:solidFill>
-                  <a:srgbClr val="526728"/>
+                  <a:srgbClr val="3E4927"/>
                 </a:solidFill>
               </a:rPr>
               <a:t>확인할 것</a:t>
@@ -8748,14 +8990,14 @@
       </p:sp>
       <p:sp>
         <p:nvSpPr>
-          <p:cNvPr id="8" name="TextBox 7"/>
+          <p:cNvPr id="9" name="TextBox 8"/>
           <p:cNvSpPr txBox="1"/>
           <p:nvPr/>
         </p:nvSpPr>
         <p:spPr>
           <a:xfrm>
-            <a:off x="777240" y="3063240"/>
-            <a:ext cx="3210458" cy="2560320"/>
+            <a:off x="777240" y="3246120"/>
+            <a:ext cx="3210458" cy="2331720"/>
           </a:xfrm>
           <a:prstGeom prst="rect">
             <a:avLst/>
@@ -8776,7 +9018,7 @@
             <a:r>
               <a:rPr sz="1500" b="0" i="0">
                 <a:solidFill>
-                  <a:srgbClr val="2B2B2B"/>
+                  <a:srgbClr val="26231F"/>
                 </a:solidFill>
               </a:rPr>
               <a:t>내용을 입력하세요</a:t>
@@ -8786,26 +9028,24 @@
       </p:sp>
       <p:sp>
         <p:nvSpPr>
-          <p:cNvPr id="9" name="카드 2"/>
+          <p:cNvPr id="10" name="카드 2"/>
           <p:cNvSpPr/>
           <p:nvPr/>
         </p:nvSpPr>
         <p:spPr>
           <a:xfrm>
-            <a:off x="4353458" y="1600200"/>
-            <a:ext cx="3484778" cy="4160520"/>
+            <a:off x="4353458" y="1783080"/>
+            <a:ext cx="3484778" cy="3931920"/>
           </a:xfrm>
           <a:prstGeom prst="roundRect">
             <a:avLst>
-              <a:gd name="adj" fmla="val 8000"/>
+              <a:gd name="adj" fmla="val 7000"/>
             </a:avLst>
           </a:prstGeom>
-          <a:solidFill>
-            <a:srgbClr val="F9FCF3"/>
-          </a:solidFill>
+          <a:noFill/>
           <a:ln w="15875">
             <a:solidFill>
-              <a:srgbClr val="EBF7D4"/>
+              <a:srgbClr val="D0ED97"/>
             </a:solidFill>
           </a:ln>
         </p:spPr>
@@ -8819,56 +9059,51 @@
       </p:sp>
       <p:sp>
         <p:nvSpPr>
-          <p:cNvPr id="10" name="번호 2"/>
-          <p:cNvSpPr/>
+          <p:cNvPr id="11" name="번호 2"/>
+          <p:cNvSpPr txBox="1"/>
           <p:nvPr/>
         </p:nvSpPr>
         <p:spPr>
           <a:xfrm>
-            <a:off x="4536338" y="1783080"/>
-            <a:ext cx="457200" cy="457200"/>
-          </a:xfrm>
-          <a:prstGeom prst="ellipse">
+            <a:off x="4444898" y="1920240"/>
+            <a:ext cx="914400" cy="548640"/>
+          </a:xfrm>
+          <a:prstGeom prst="rect">
             <a:avLst/>
           </a:prstGeom>
-          <a:solidFill>
-            <a:srgbClr val="9DBF5A"/>
-          </a:solidFill>
-          <a:ln>
-            <a:noFill/>
-          </a:ln>
-        </p:spPr>
-        <p:txBody>
-          <a:bodyPr rtlCol="0" anchor="ctr" wrap="square" lIns="54864" rIns="54864" tIns="27432" bIns="27432">
+          <a:noFill/>
+        </p:spPr>
+        <p:txBody>
+          <a:bodyPr wrap="square" lIns="54864" rIns="54864" tIns="27432" bIns="27432" anchor="ctr">
             <a:noAutofit/>
           </a:bodyPr>
           <a:lstStyle/>
           <a:p>
-            <a:pPr algn="ctr">
+            <a:pPr algn="l">
               <a:lnSpc>
-                <a:spcPct val="100000"/>
+                <a:spcPct val="115000"/>
               </a:lnSpc>
             </a:pPr>
             <a:r>
-              <a:rPr sz="1600" b="1" i="0">
+              <a:rPr sz="2400" b="1" i="0">
                 <a:solidFill>
-                  <a:srgbClr val="FFFFFF"/>
+                  <a:srgbClr val="D0ED97"/>
                 </a:solidFill>
               </a:rPr>
-              <a:t>2</a:t>
+              <a:t>02</a:t>
             </a:r>
           </a:p>
         </p:txBody>
       </p:sp>
       <p:sp>
         <p:nvSpPr>
-          <p:cNvPr id="11" name="TextBox 10"/>
+          <p:cNvPr id="12" name="TextBox 11"/>
           <p:cNvSpPr txBox="1"/>
           <p:nvPr/>
         </p:nvSpPr>
         <p:spPr>
           <a:xfrm>
-            <a:off x="4490618" y="2377440"/>
+            <a:off x="4490618" y="2560320"/>
             <a:ext cx="3210458" cy="640080"/>
           </a:xfrm>
           <a:prstGeom prst="rect">
@@ -8890,7 +9125,7 @@
             <a:r>
               <a:rPr sz="1800" b="1" i="0">
                 <a:solidFill>
-                  <a:srgbClr val="526728"/>
+                  <a:srgbClr val="3E4927"/>
                 </a:solidFill>
               </a:rPr>
               <a:t>문의할 것</a:t>
@@ -8900,14 +9135,14 @@
       </p:sp>
       <p:sp>
         <p:nvSpPr>
-          <p:cNvPr id="12" name="TextBox 11"/>
+          <p:cNvPr id="13" name="TextBox 12"/>
           <p:cNvSpPr txBox="1"/>
           <p:nvPr/>
         </p:nvSpPr>
         <p:spPr>
           <a:xfrm>
-            <a:off x="4490618" y="3063240"/>
-            <a:ext cx="3210458" cy="2560320"/>
+            <a:off x="4490618" y="3246120"/>
+            <a:ext cx="3210458" cy="2331720"/>
           </a:xfrm>
           <a:prstGeom prst="rect">
             <a:avLst/>
@@ -8928,7 +9163,7 @@
             <a:r>
               <a:rPr sz="1500" b="0" i="0">
                 <a:solidFill>
-                  <a:srgbClr val="2B2B2B"/>
+                  <a:srgbClr val="26231F"/>
                 </a:solidFill>
               </a:rPr>
               <a:t>내용을 입력하세요</a:t>
@@ -8938,26 +9173,24 @@
       </p:sp>
       <p:sp>
         <p:nvSpPr>
-          <p:cNvPr id="13" name="카드 3"/>
+          <p:cNvPr id="14" name="카드 3"/>
           <p:cNvSpPr/>
           <p:nvPr/>
         </p:nvSpPr>
         <p:spPr>
           <a:xfrm>
-            <a:off x="8066836" y="1600200"/>
-            <a:ext cx="3484778" cy="4160520"/>
+            <a:off x="8066836" y="1783080"/>
+            <a:ext cx="3484778" cy="3931920"/>
           </a:xfrm>
           <a:prstGeom prst="roundRect">
             <a:avLst>
-              <a:gd name="adj" fmla="val 8000"/>
+              <a:gd name="adj" fmla="val 7000"/>
             </a:avLst>
           </a:prstGeom>
-          <a:solidFill>
-            <a:srgbClr val="F9FCF3"/>
-          </a:solidFill>
+          <a:noFill/>
           <a:ln w="15875">
             <a:solidFill>
-              <a:srgbClr val="EBF7D4"/>
+              <a:srgbClr val="D0ED97"/>
             </a:solidFill>
           </a:ln>
         </p:spPr>
@@ -8971,56 +9204,51 @@
       </p:sp>
       <p:sp>
         <p:nvSpPr>
-          <p:cNvPr id="14" name="번호 3"/>
-          <p:cNvSpPr/>
+          <p:cNvPr id="15" name="번호 3"/>
+          <p:cNvSpPr txBox="1"/>
           <p:nvPr/>
         </p:nvSpPr>
         <p:spPr>
           <a:xfrm>
-            <a:off x="8249716" y="1783080"/>
-            <a:ext cx="457200" cy="457200"/>
-          </a:xfrm>
-          <a:prstGeom prst="ellipse">
+            <a:off x="8158276" y="1920240"/>
+            <a:ext cx="914400" cy="548640"/>
+          </a:xfrm>
+          <a:prstGeom prst="rect">
             <a:avLst/>
           </a:prstGeom>
-          <a:solidFill>
-            <a:srgbClr val="9DBF5A"/>
-          </a:solidFill>
-          <a:ln>
-            <a:noFill/>
-          </a:ln>
-        </p:spPr>
-        <p:txBody>
-          <a:bodyPr rtlCol="0" anchor="ctr" wrap="square" lIns="54864" rIns="54864" tIns="27432" bIns="27432">
+          <a:noFill/>
+        </p:spPr>
+        <p:txBody>
+          <a:bodyPr wrap="square" lIns="54864" rIns="54864" tIns="27432" bIns="27432" anchor="ctr">
             <a:noAutofit/>
           </a:bodyPr>
           <a:lstStyle/>
           <a:p>
-            <a:pPr algn="ctr">
+            <a:pPr algn="l">
               <a:lnSpc>
-                <a:spcPct val="100000"/>
+                <a:spcPct val="115000"/>
               </a:lnSpc>
             </a:pPr>
             <a:r>
-              <a:rPr sz="1600" b="1" i="0">
+              <a:rPr sz="2400" b="1" i="0">
                 <a:solidFill>
-                  <a:srgbClr val="FFFFFF"/>
+                  <a:srgbClr val="D0ED97"/>
                 </a:solidFill>
               </a:rPr>
-              <a:t>3</a:t>
+              <a:t>03</a:t>
             </a:r>
           </a:p>
         </p:txBody>
       </p:sp>
       <p:sp>
         <p:nvSpPr>
-          <p:cNvPr id="15" name="TextBox 14"/>
+          <p:cNvPr id="16" name="TextBox 15"/>
           <p:cNvSpPr txBox="1"/>
           <p:nvPr/>
         </p:nvSpPr>
         <p:spPr>
           <a:xfrm>
-            <a:off x="8203996" y="2377440"/>
+            <a:off x="8203996" y="2560320"/>
             <a:ext cx="3210458" cy="640080"/>
           </a:xfrm>
           <a:prstGeom prst="rect">
@@ -9042,7 +9270,7 @@
             <a:r>
               <a:rPr sz="1800" b="1" i="0">
                 <a:solidFill>
-                  <a:srgbClr val="526728"/>
+                  <a:srgbClr val="3E4927"/>
                 </a:solidFill>
               </a:rPr>
               <a:t>정리할 날짜</a:t>
@@ -9052,14 +9280,14 @@
       </p:sp>
       <p:sp>
         <p:nvSpPr>
-          <p:cNvPr id="16" name="TextBox 15"/>
+          <p:cNvPr id="17" name="TextBox 16"/>
           <p:cNvSpPr txBox="1"/>
           <p:nvPr/>
         </p:nvSpPr>
         <p:spPr>
           <a:xfrm>
-            <a:off x="8203996" y="3063240"/>
-            <a:ext cx="3210458" cy="2560320"/>
+            <a:off x="8203996" y="3246120"/>
+            <a:ext cx="3210458" cy="2331720"/>
           </a:xfrm>
           <a:prstGeom prst="rect">
             <a:avLst/>
@@ -9080,7 +9308,7 @@
             <a:r>
               <a:rPr sz="1500" b="0" i="0">
                 <a:solidFill>
-                  <a:srgbClr val="2B2B2B"/>
+                  <a:srgbClr val="26231F"/>
                 </a:solidFill>
               </a:rPr>
               <a:t>내용을 입력하세요</a:t>
@@ -9090,13 +9318,13 @@
       </p:sp>
       <p:sp>
         <p:nvSpPr>
-          <p:cNvPr id="17" name="안내 문구"/>
+          <p:cNvPr id="18" name="안내 문구"/>
           <p:cNvSpPr txBox="1"/>
           <p:nvPr/>
         </p:nvSpPr>
         <p:spPr>
           <a:xfrm>
-            <a:off x="640080" y="5852160"/>
+            <a:off x="640080" y="5806440"/>
             <a:ext cx="10911535" cy="548640"/>
           </a:xfrm>
           <a:prstGeom prst="rect">
@@ -9145,34 +9373,34 @@
         <a:sysClr val="window" lastClr="FFFFFF"/>
       </a:lt1>
       <a:dk2>
-        <a:srgbClr val="526728"/>
+        <a:srgbClr val="3E4927"/>
       </a:dk2>
       <a:lt2>
-        <a:srgbClr val="F9FCF3"/>
+        <a:srgbClr val="F7FDEA"/>
       </a:lt2>
       <a:accent1>
-        <a:srgbClr val="9DBF5A"/>
+        <a:srgbClr val="D0ED97"/>
       </a:accent1>
       <a:accent2>
-        <a:srgbClr val="339941"/>
+        <a:srgbClr val="C5F3BA"/>
       </a:accent2>
       <a:accent3>
-        <a:srgbClr val="526728"/>
+        <a:srgbClr val="3E4927"/>
       </a:accent3>
       <a:accent4>
-        <a:srgbClr val="EBF7D4"/>
+        <a:srgbClr val="ECFAD1"/>
       </a:accent4>
       <a:accent5>
-        <a:srgbClr val="68AC4E"/>
+        <a:srgbClr val="CAF0A8"/>
       </a:accent5>
       <a:accent6>
-        <a:srgbClr val="97A47E"/>
+        <a:srgbClr val="8B927D"/>
       </a:accent6>
       <a:hlink>
-        <a:srgbClr val="9DBF5A"/>
+        <a:srgbClr val="D0ED97"/>
       </a:hlink>
       <a:folHlink>
-        <a:srgbClr val="526728"/>
+        <a:srgbClr val="3E4927"/>
       </a:folHlink>
     </a:clrScheme>
     <a:fontScheme name="Office">
